--- a/docs/Eliseev EV.pptx
+++ b/docs/Eliseev EV.pptx
@@ -276,7 +276,7 @@
           <a:p>
             <a:fld id="{6C1C013D-C6A7-4DB5-A4FD-238D75ACE54A}" type="datetimeFigureOut">
               <a:rPr lang="ru-RU" smtClean="0"/>
-              <a:t>20.05.2024</a:t>
+              <a:t>21.05.2024</a:t>
             </a:fld>
             <a:endParaRPr lang="ru-RU"/>
           </a:p>
@@ -846,7 +846,7 @@
           <a:p>
             <a:fld id="{9CB2C4F5-5D00-4DC3-8376-C6BD28F02CAB}" type="datetimeFigureOut">
               <a:rPr lang="ru-RU" smtClean="0"/>
-              <a:t>20.05.2024</a:t>
+              <a:t>21.05.2024</a:t>
             </a:fld>
             <a:endParaRPr lang="ru-RU"/>
           </a:p>
@@ -2791,7 +2791,7 @@
           <a:p>
             <a:fld id="{AB6DC8CD-6662-424D-AE90-09DAABF92620}" type="datetime1">
               <a:rPr lang="ru-RU" smtClean="0"/>
-              <a:t>20.05.2024</a:t>
+              <a:t>21.05.2024</a:t>
             </a:fld>
             <a:endParaRPr lang="ru-RU"/>
           </a:p>
@@ -2992,7 +2992,7 @@
           <a:p>
             <a:fld id="{FC10AB9E-9F86-4008-83C2-D060ECF160DE}" type="datetime1">
               <a:rPr lang="ru-RU" smtClean="0"/>
-              <a:t>20.05.2024</a:t>
+              <a:t>21.05.2024</a:t>
             </a:fld>
             <a:endParaRPr lang="ru-RU"/>
           </a:p>
@@ -3203,7 +3203,7 @@
           <a:p>
             <a:fld id="{CE90D746-DE99-49E7-BFDC-F6203EEEF690}" type="datetime1">
               <a:rPr lang="ru-RU" smtClean="0"/>
-              <a:t>20.05.2024</a:t>
+              <a:t>21.05.2024</a:t>
             </a:fld>
             <a:endParaRPr lang="ru-RU"/>
           </a:p>
@@ -3404,7 +3404,7 @@
           <a:p>
             <a:fld id="{D7E82507-A74A-4BF9-AA7C-C9B06358C86A}" type="datetime1">
               <a:rPr lang="ru-RU" smtClean="0"/>
-              <a:t>20.05.2024</a:t>
+              <a:t>21.05.2024</a:t>
             </a:fld>
             <a:endParaRPr lang="ru-RU"/>
           </a:p>
@@ -3682,7 +3682,7 @@
           <a:p>
             <a:fld id="{728A183E-E26E-4A33-96BC-7D4DD5899954}" type="datetime1">
               <a:rPr lang="ru-RU" smtClean="0"/>
-              <a:t>20.05.2024</a:t>
+              <a:t>21.05.2024</a:t>
             </a:fld>
             <a:endParaRPr lang="ru-RU"/>
           </a:p>
@@ -3950,7 +3950,7 @@
           <a:p>
             <a:fld id="{7DE59FAF-71FF-4857-A9AC-33A232A7D036}" type="datetime1">
               <a:rPr lang="ru-RU" smtClean="0"/>
-              <a:t>20.05.2024</a:t>
+              <a:t>21.05.2024</a:t>
             </a:fld>
             <a:endParaRPr lang="ru-RU"/>
           </a:p>
@@ -4365,7 +4365,7 @@
           <a:p>
             <a:fld id="{49BFE76A-CA5A-4492-9E51-5062A098B11E}" type="datetime1">
               <a:rPr lang="ru-RU" smtClean="0"/>
-              <a:t>20.05.2024</a:t>
+              <a:t>21.05.2024</a:t>
             </a:fld>
             <a:endParaRPr lang="ru-RU"/>
           </a:p>
@@ -4509,7 +4509,7 @@
           <a:p>
             <a:fld id="{B10BA3AC-209D-4273-8D5F-8B3583970EE6}" type="datetime1">
               <a:rPr lang="ru-RU" smtClean="0"/>
-              <a:t>20.05.2024</a:t>
+              <a:t>21.05.2024</a:t>
             </a:fld>
             <a:endParaRPr lang="ru-RU"/>
           </a:p>
@@ -4944,7 +4944,7 @@
           <a:p>
             <a:fld id="{7ACA74DB-CB7C-44E0-85BB-5DF41B44EDDA}" type="datetime1">
               <a:rPr lang="ru-RU" smtClean="0"/>
-              <a:t>20.05.2024</a:t>
+              <a:t>21.05.2024</a:t>
             </a:fld>
             <a:endParaRPr lang="ru-RU"/>
           </a:p>
@@ -5235,7 +5235,7 @@
           <a:p>
             <a:fld id="{5505F3AB-125B-44BD-91E0-D0D5DD24AA45}" type="datetime1">
               <a:rPr lang="ru-RU" smtClean="0"/>
-              <a:t>20.05.2024</a:t>
+              <a:t>21.05.2024</a:t>
             </a:fld>
             <a:endParaRPr lang="ru-RU"/>
           </a:p>
@@ -5479,7 +5479,7 @@
           <a:p>
             <a:fld id="{41B538B3-6C19-4897-BE7C-A7C7284CDE90}" type="datetime1">
               <a:rPr lang="ru-RU" smtClean="0"/>
-              <a:t>20.05.2024</a:t>
+              <a:t>21.05.2024</a:t>
             </a:fld>
             <a:endParaRPr lang="ru-RU"/>
           </a:p>
@@ -9034,12 +9034,74 @@
           </a:p>
         </p:txBody>
       </p:sp>
+      <p:sp>
+        <p:nvSpPr>
+          <p:cNvPr id="4" name="Footer Placeholder 3">
+            <a:extLst>
+              <a:ext uri="{FF2B5EF4-FFF2-40B4-BE49-F238E27FC236}">
+                <a16:creationId xmlns:a16="http://schemas.microsoft.com/office/drawing/2014/main" id="{D07AB4D5-EBAB-A843-97C2-17C51A169A12}"/>
+              </a:ext>
+            </a:extLst>
+          </p:cNvPr>
+          <p:cNvSpPr>
+            <a:spLocks noGrp="1"/>
+          </p:cNvSpPr>
+          <p:nvPr>
+            <p:ph type="ftr" sz="quarter" idx="11"/>
+          </p:nvPr>
+        </p:nvSpPr>
+        <p:spPr/>
+        <p:txBody>
+          <a:bodyPr/>
+          <a:lstStyle/>
+          <a:p>
+            <a:r>
+              <a:rPr lang="ru-RU"/>
+              <a:t>Система поиска шаблонов в данных GitHub</a:t>
+            </a:r>
+            <a:endParaRPr lang="ru-RU" dirty="0"/>
+          </a:p>
+        </p:txBody>
+      </p:sp>
+      <p:sp>
+        <p:nvSpPr>
+          <p:cNvPr id="2" name="Slide Number Placeholder 1">
+            <a:extLst>
+              <a:ext uri="{FF2B5EF4-FFF2-40B4-BE49-F238E27FC236}">
+                <a16:creationId xmlns:a16="http://schemas.microsoft.com/office/drawing/2014/main" id="{573D64B6-9EF6-4756-C38C-767F7BCA6823}"/>
+              </a:ext>
+            </a:extLst>
+          </p:cNvPr>
+          <p:cNvSpPr>
+            <a:spLocks noGrp="1"/>
+          </p:cNvSpPr>
+          <p:nvPr>
+            <p:ph type="sldNum" sz="quarter" idx="12"/>
+          </p:nvPr>
+        </p:nvSpPr>
+        <p:spPr/>
+        <p:txBody>
+          <a:bodyPr/>
+          <a:lstStyle/>
+          <a:p>
+            <a:fld id="{7EC09024-2147-4C4E-87D2-FF66EAF91B1A}" type="slidenum">
+              <a:rPr lang="ru-RU" smtClean="0"/>
+              <a:pPr/>
+              <a:t>16</a:t>
+            </a:fld>
+            <a:r>
+              <a:rPr lang="ru-RU" dirty="0"/>
+              <a:t>/21</a:t>
+            </a:r>
+          </a:p>
+        </p:txBody>
+      </p:sp>
       <p:pic>
         <p:nvPicPr>
-          <p:cNvPr id="6" name="Picture 5">
-            <a:extLst>
-              <a:ext uri="{FF2B5EF4-FFF2-40B4-BE49-F238E27FC236}">
-                <a16:creationId xmlns:a16="http://schemas.microsoft.com/office/drawing/2014/main" id="{1B7B6E12-90BB-E584-A2E9-2EFC18F6A082}"/>
+          <p:cNvPr id="7" name="Picture 6">
+            <a:extLst>
+              <a:ext uri="{FF2B5EF4-FFF2-40B4-BE49-F238E27FC236}">
+                <a16:creationId xmlns:a16="http://schemas.microsoft.com/office/drawing/2014/main" id="{18779764-6135-341E-1B35-2EEE9AA47D41}"/>
               </a:ext>
             </a:extLst>
           </p:cNvPr>
@@ -9056,8 +9118,8 @@
         </p:blipFill>
         <p:spPr>
           <a:xfrm>
-            <a:off x="1043104" y="1016297"/>
-            <a:ext cx="10105792" cy="5082795"/>
+            <a:off x="1251237" y="989398"/>
+            <a:ext cx="9689525" cy="4879204"/>
           </a:xfrm>
           <a:prstGeom prst="rect">
             <a:avLst/>
@@ -9069,68 +9131,6 @@
           </a:ln>
         </p:spPr>
       </p:pic>
-      <p:sp>
-        <p:nvSpPr>
-          <p:cNvPr id="4" name="Footer Placeholder 3">
-            <a:extLst>
-              <a:ext uri="{FF2B5EF4-FFF2-40B4-BE49-F238E27FC236}">
-                <a16:creationId xmlns:a16="http://schemas.microsoft.com/office/drawing/2014/main" id="{D07AB4D5-EBAB-A843-97C2-17C51A169A12}"/>
-              </a:ext>
-            </a:extLst>
-          </p:cNvPr>
-          <p:cNvSpPr>
-            <a:spLocks noGrp="1"/>
-          </p:cNvSpPr>
-          <p:nvPr>
-            <p:ph type="ftr" sz="quarter" idx="11"/>
-          </p:nvPr>
-        </p:nvSpPr>
-        <p:spPr/>
-        <p:txBody>
-          <a:bodyPr/>
-          <a:lstStyle/>
-          <a:p>
-            <a:r>
-              <a:rPr lang="ru-RU"/>
-              <a:t>Система поиска шаблонов в данных GitHub</a:t>
-            </a:r>
-            <a:endParaRPr lang="ru-RU" dirty="0"/>
-          </a:p>
-        </p:txBody>
-      </p:sp>
-      <p:sp>
-        <p:nvSpPr>
-          <p:cNvPr id="2" name="Slide Number Placeholder 1">
-            <a:extLst>
-              <a:ext uri="{FF2B5EF4-FFF2-40B4-BE49-F238E27FC236}">
-                <a16:creationId xmlns:a16="http://schemas.microsoft.com/office/drawing/2014/main" id="{573D64B6-9EF6-4756-C38C-767F7BCA6823}"/>
-              </a:ext>
-            </a:extLst>
-          </p:cNvPr>
-          <p:cNvSpPr>
-            <a:spLocks noGrp="1"/>
-          </p:cNvSpPr>
-          <p:nvPr>
-            <p:ph type="sldNum" sz="quarter" idx="12"/>
-          </p:nvPr>
-        </p:nvSpPr>
-        <p:spPr/>
-        <p:txBody>
-          <a:bodyPr/>
-          <a:lstStyle/>
-          <a:p>
-            <a:fld id="{7EC09024-2147-4C4E-87D2-FF66EAF91B1A}" type="slidenum">
-              <a:rPr lang="ru-RU" smtClean="0"/>
-              <a:pPr/>
-              <a:t>16</a:t>
-            </a:fld>
-            <a:r>
-              <a:rPr lang="ru-RU" dirty="0"/>
-              <a:t>/21</a:t>
-            </a:r>
-          </a:p>
-        </p:txBody>
-      </p:sp>
     </p:spTree>
     <p:extLst>
       <p:ext uri="{BB962C8B-B14F-4D97-AF65-F5344CB8AC3E}">

--- a/docs/Eliseev EV.pptx
+++ b/docs/Eliseev EV.pptx
@@ -13,25 +13,25 @@
   <p:sldIdLst>
     <p:sldId id="256" r:id="rId2"/>
     <p:sldId id="257" r:id="rId3"/>
-    <p:sldId id="288" r:id="rId4"/>
-    <p:sldId id="289" r:id="rId5"/>
-    <p:sldId id="258" r:id="rId6"/>
-    <p:sldId id="259" r:id="rId7"/>
-    <p:sldId id="283" r:id="rId8"/>
-    <p:sldId id="284" r:id="rId9"/>
-    <p:sldId id="287" r:id="rId10"/>
-    <p:sldId id="260" r:id="rId11"/>
-    <p:sldId id="272" r:id="rId12"/>
-    <p:sldId id="285" r:id="rId13"/>
-    <p:sldId id="263" r:id="rId14"/>
-    <p:sldId id="286" r:id="rId15"/>
-    <p:sldId id="262" r:id="rId16"/>
-    <p:sldId id="269" r:id="rId17"/>
-    <p:sldId id="264" r:id="rId18"/>
-    <p:sldId id="278" r:id="rId19"/>
-    <p:sldId id="280" r:id="rId20"/>
-    <p:sldId id="279" r:id="rId21"/>
-    <p:sldId id="273" r:id="rId22"/>
+    <p:sldId id="258" r:id="rId4"/>
+    <p:sldId id="259" r:id="rId5"/>
+    <p:sldId id="287" r:id="rId6"/>
+    <p:sldId id="260" r:id="rId7"/>
+    <p:sldId id="272" r:id="rId8"/>
+    <p:sldId id="285" r:id="rId9"/>
+    <p:sldId id="263" r:id="rId10"/>
+    <p:sldId id="286" r:id="rId11"/>
+    <p:sldId id="262" r:id="rId12"/>
+    <p:sldId id="269" r:id="rId13"/>
+    <p:sldId id="264" r:id="rId14"/>
+    <p:sldId id="278" r:id="rId15"/>
+    <p:sldId id="280" r:id="rId16"/>
+    <p:sldId id="279" r:id="rId17"/>
+    <p:sldId id="273" r:id="rId18"/>
+    <p:sldId id="288" r:id="rId19"/>
+    <p:sldId id="289" r:id="rId20"/>
+    <p:sldId id="283" r:id="rId21"/>
+    <p:sldId id="284" r:id="rId22"/>
   </p:sldIdLst>
   <p:sldSz cx="12192000" cy="6858000"/>
   <p:notesSz cx="6858000" cy="9144000"/>
@@ -137,12 +137,8 @@
           <p14:sldIdLst>
             <p14:sldId id="256"/>
             <p14:sldId id="257"/>
-            <p14:sldId id="288"/>
-            <p14:sldId id="289"/>
             <p14:sldId id="258"/>
             <p14:sldId id="259"/>
-            <p14:sldId id="283"/>
-            <p14:sldId id="284"/>
             <p14:sldId id="287"/>
             <p14:sldId id="260"/>
             <p14:sldId id="272"/>
@@ -160,6 +156,10 @@
             <p14:sldId id="280"/>
             <p14:sldId id="279"/>
             <p14:sldId id="273"/>
+            <p14:sldId id="288"/>
+            <p14:sldId id="289"/>
+            <p14:sldId id="283"/>
+            <p14:sldId id="284"/>
           </p14:sldIdLst>
         </p14:section>
       </p14:sectionLst>
@@ -1223,7 +1223,7 @@
       </p:grpSpPr>
       <p:sp>
         <p:nvSpPr>
-          <p:cNvPr id="2" name="Slide Image Placeholder 1"/>
+          <p:cNvPr id="2" name="Образ слайда 1"/>
           <p:cNvSpPr>
             <a:spLocks noGrp="1" noRot="1" noChangeAspect="1"/>
           </p:cNvSpPr>
@@ -1235,7 +1235,7 @@
       </p:sp>
       <p:sp>
         <p:nvSpPr>
-          <p:cNvPr id="3" name="Notes Placeholder 2"/>
+          <p:cNvPr id="3" name="Заметки 2"/>
           <p:cNvSpPr>
             <a:spLocks noGrp="1"/>
           </p:cNvSpPr>
@@ -1257,7 +1257,7 @@
           <p:cNvPr id="5" name="Slide Number Placeholder 4">
             <a:extLst>
               <a:ext uri="{FF2B5EF4-FFF2-40B4-BE49-F238E27FC236}">
-                <a16:creationId xmlns:a16="http://schemas.microsoft.com/office/drawing/2014/main" id="{717FE0E1-87A9-9E3F-9204-A5B16398ED45}"/>
+                <a16:creationId xmlns:a16="http://schemas.microsoft.com/office/drawing/2014/main" id="{13FD46D1-B06D-0EBD-6F21-79EEB9F5702B}"/>
               </a:ext>
             </a:extLst>
           </p:cNvPr>
@@ -1275,7 +1275,7 @@
           <a:p>
             <a:fld id="{D00F3401-F479-4CFB-ABB6-A35D76EA0D8E}" type="slidenum">
               <a:rPr lang="ru-RU" smtClean="0"/>
-              <a:t>14</a:t>
+              <a:t>11</a:t>
             </a:fld>
             <a:endParaRPr lang="ru-RU"/>
           </a:p>
@@ -1284,7 +1284,7 @@
     </p:spTree>
     <p:extLst>
       <p:ext uri="{BB962C8B-B14F-4D97-AF65-F5344CB8AC3E}">
-        <p14:creationId xmlns:p14="http://schemas.microsoft.com/office/powerpoint/2010/main" val="2697756950"/>
+        <p14:creationId xmlns:p14="http://schemas.microsoft.com/office/powerpoint/2010/main" val="1418168339"/>
       </p:ext>
     </p:extLst>
   </p:cSld>
@@ -1338,7 +1338,7 @@
           <a:bodyPr/>
           <a:lstStyle/>
           <a:p>
-            <a:endParaRPr lang="ru-RU" dirty="0"/>
+            <a:endParaRPr lang="ru-RU"/>
           </a:p>
         </p:txBody>
       </p:sp>
@@ -1347,7 +1347,7 @@
           <p:cNvPr id="5" name="Slide Number Placeholder 4">
             <a:extLst>
               <a:ext uri="{FF2B5EF4-FFF2-40B4-BE49-F238E27FC236}">
-                <a16:creationId xmlns:a16="http://schemas.microsoft.com/office/drawing/2014/main" id="{13FD46D1-B06D-0EBD-6F21-79EEB9F5702B}"/>
+                <a16:creationId xmlns:a16="http://schemas.microsoft.com/office/drawing/2014/main" id="{3ADCBF7C-E759-169E-1E35-DA92F37959D8}"/>
               </a:ext>
             </a:extLst>
           </p:cNvPr>
@@ -1365,7 +1365,7 @@
           <a:p>
             <a:fld id="{D00F3401-F479-4CFB-ABB6-A35D76EA0D8E}" type="slidenum">
               <a:rPr lang="ru-RU" smtClean="0"/>
-              <a:t>15</a:t>
+              <a:t>12</a:t>
             </a:fld>
             <a:endParaRPr lang="ru-RU"/>
           </a:p>
@@ -1374,7 +1374,7 @@
     </p:spTree>
     <p:extLst>
       <p:ext uri="{BB962C8B-B14F-4D97-AF65-F5344CB8AC3E}">
-        <p14:creationId xmlns:p14="http://schemas.microsoft.com/office/powerpoint/2010/main" val="1418168339"/>
+        <p14:creationId xmlns:p14="http://schemas.microsoft.com/office/powerpoint/2010/main" val="1295523658"/>
       </p:ext>
     </p:extLst>
   </p:cSld>
@@ -1437,7 +1437,7 @@
           <p:cNvPr id="5" name="Slide Number Placeholder 4">
             <a:extLst>
               <a:ext uri="{FF2B5EF4-FFF2-40B4-BE49-F238E27FC236}">
-                <a16:creationId xmlns:a16="http://schemas.microsoft.com/office/drawing/2014/main" id="{3ADCBF7C-E759-169E-1E35-DA92F37959D8}"/>
+                <a16:creationId xmlns:a16="http://schemas.microsoft.com/office/drawing/2014/main" id="{76E9CE34-B9FE-C04D-46AB-4FFDEF6EAC7B}"/>
               </a:ext>
             </a:extLst>
           </p:cNvPr>
@@ -1455,7 +1455,7 @@
           <a:p>
             <a:fld id="{D00F3401-F479-4CFB-ABB6-A35D76EA0D8E}" type="slidenum">
               <a:rPr lang="ru-RU" smtClean="0"/>
-              <a:t>16</a:t>
+              <a:t>13</a:t>
             </a:fld>
             <a:endParaRPr lang="ru-RU"/>
           </a:p>
@@ -1464,7 +1464,7 @@
     </p:spTree>
     <p:extLst>
       <p:ext uri="{BB962C8B-B14F-4D97-AF65-F5344CB8AC3E}">
-        <p14:creationId xmlns:p14="http://schemas.microsoft.com/office/powerpoint/2010/main" val="1295523658"/>
+        <p14:creationId xmlns:p14="http://schemas.microsoft.com/office/powerpoint/2010/main" val="157310351"/>
       </p:ext>
     </p:extLst>
   </p:cSld>
@@ -1527,7 +1527,7 @@
           <p:cNvPr id="5" name="Slide Number Placeholder 4">
             <a:extLst>
               <a:ext uri="{FF2B5EF4-FFF2-40B4-BE49-F238E27FC236}">
-                <a16:creationId xmlns:a16="http://schemas.microsoft.com/office/drawing/2014/main" id="{76E9CE34-B9FE-C04D-46AB-4FFDEF6EAC7B}"/>
+                <a16:creationId xmlns:a16="http://schemas.microsoft.com/office/drawing/2014/main" id="{38426FA7-4A31-DD81-C125-DF0227C8812F}"/>
               </a:ext>
             </a:extLst>
           </p:cNvPr>
@@ -1545,7 +1545,7 @@
           <a:p>
             <a:fld id="{D00F3401-F479-4CFB-ABB6-A35D76EA0D8E}" type="slidenum">
               <a:rPr lang="ru-RU" smtClean="0"/>
-              <a:t>17</a:t>
+              <a:t>14</a:t>
             </a:fld>
             <a:endParaRPr lang="ru-RU"/>
           </a:p>
@@ -1554,7 +1554,7 @@
     </p:spTree>
     <p:extLst>
       <p:ext uri="{BB962C8B-B14F-4D97-AF65-F5344CB8AC3E}">
-        <p14:creationId xmlns:p14="http://schemas.microsoft.com/office/powerpoint/2010/main" val="157310351"/>
+        <p14:creationId xmlns:p14="http://schemas.microsoft.com/office/powerpoint/2010/main" val="3588778521"/>
       </p:ext>
     </p:extLst>
   </p:cSld>
@@ -1617,7 +1617,7 @@
           <p:cNvPr id="5" name="Slide Number Placeholder 4">
             <a:extLst>
               <a:ext uri="{FF2B5EF4-FFF2-40B4-BE49-F238E27FC236}">
-                <a16:creationId xmlns:a16="http://schemas.microsoft.com/office/drawing/2014/main" id="{38426FA7-4A31-DD81-C125-DF0227C8812F}"/>
+                <a16:creationId xmlns:a16="http://schemas.microsoft.com/office/drawing/2014/main" id="{42BF9463-7D13-EBF7-1553-D41E14AF5EF6}"/>
               </a:ext>
             </a:extLst>
           </p:cNvPr>
@@ -1635,7 +1635,7 @@
           <a:p>
             <a:fld id="{D00F3401-F479-4CFB-ABB6-A35D76EA0D8E}" type="slidenum">
               <a:rPr lang="ru-RU" smtClean="0"/>
-              <a:t>18</a:t>
+              <a:t>15</a:t>
             </a:fld>
             <a:endParaRPr lang="ru-RU"/>
           </a:p>
@@ -1644,7 +1644,7 @@
     </p:spTree>
     <p:extLst>
       <p:ext uri="{BB962C8B-B14F-4D97-AF65-F5344CB8AC3E}">
-        <p14:creationId xmlns:p14="http://schemas.microsoft.com/office/powerpoint/2010/main" val="3588778521"/>
+        <p14:creationId xmlns:p14="http://schemas.microsoft.com/office/powerpoint/2010/main" val="862484516"/>
       </p:ext>
     </p:extLst>
   </p:cSld>
@@ -1707,7 +1707,7 @@
           <p:cNvPr id="5" name="Slide Number Placeholder 4">
             <a:extLst>
               <a:ext uri="{FF2B5EF4-FFF2-40B4-BE49-F238E27FC236}">
-                <a16:creationId xmlns:a16="http://schemas.microsoft.com/office/drawing/2014/main" id="{42BF9463-7D13-EBF7-1553-D41E14AF5EF6}"/>
+                <a16:creationId xmlns:a16="http://schemas.microsoft.com/office/drawing/2014/main" id="{06805C02-1AD3-FAA5-937B-CAC53029D2FA}"/>
               </a:ext>
             </a:extLst>
           </p:cNvPr>
@@ -1725,7 +1725,7 @@
           <a:p>
             <a:fld id="{D00F3401-F479-4CFB-ABB6-A35D76EA0D8E}" type="slidenum">
               <a:rPr lang="ru-RU" smtClean="0"/>
-              <a:t>19</a:t>
+              <a:t>16</a:t>
             </a:fld>
             <a:endParaRPr lang="ru-RU"/>
           </a:p>
@@ -1734,7 +1734,7 @@
     </p:spTree>
     <p:extLst>
       <p:ext uri="{BB962C8B-B14F-4D97-AF65-F5344CB8AC3E}">
-        <p14:creationId xmlns:p14="http://schemas.microsoft.com/office/powerpoint/2010/main" val="862484516"/>
+        <p14:creationId xmlns:p14="http://schemas.microsoft.com/office/powerpoint/2010/main" val="2740999404"/>
       </p:ext>
     </p:extLst>
   </p:cSld>
@@ -1797,7 +1797,7 @@
           <p:cNvPr id="5" name="Slide Number Placeholder 4">
             <a:extLst>
               <a:ext uri="{FF2B5EF4-FFF2-40B4-BE49-F238E27FC236}">
-                <a16:creationId xmlns:a16="http://schemas.microsoft.com/office/drawing/2014/main" id="{06805C02-1AD3-FAA5-937B-CAC53029D2FA}"/>
+                <a16:creationId xmlns:a16="http://schemas.microsoft.com/office/drawing/2014/main" id="{FD3A3943-8A59-423A-6779-E535329B6423}"/>
               </a:ext>
             </a:extLst>
           </p:cNvPr>
@@ -1815,7 +1815,7 @@
           <a:p>
             <a:fld id="{D00F3401-F479-4CFB-ABB6-A35D76EA0D8E}" type="slidenum">
               <a:rPr lang="ru-RU" smtClean="0"/>
-              <a:t>20</a:t>
+              <a:t>17</a:t>
             </a:fld>
             <a:endParaRPr lang="ru-RU"/>
           </a:p>
@@ -1824,7 +1824,7 @@
     </p:spTree>
     <p:extLst>
       <p:ext uri="{BB962C8B-B14F-4D97-AF65-F5344CB8AC3E}">
-        <p14:creationId xmlns:p14="http://schemas.microsoft.com/office/powerpoint/2010/main" val="2740999404"/>
+        <p14:creationId xmlns:p14="http://schemas.microsoft.com/office/powerpoint/2010/main" val="1787919214"/>
       </p:ext>
     </p:extLst>
   </p:cSld>
@@ -1887,7 +1887,97 @@
           <p:cNvPr id="5" name="Slide Number Placeholder 4">
             <a:extLst>
               <a:ext uri="{FF2B5EF4-FFF2-40B4-BE49-F238E27FC236}">
-                <a16:creationId xmlns:a16="http://schemas.microsoft.com/office/drawing/2014/main" id="{FD3A3943-8A59-423A-6779-E535329B6423}"/>
+                <a16:creationId xmlns:a16="http://schemas.microsoft.com/office/drawing/2014/main" id="{DF7CA18B-1C3B-C130-D1D2-0466C1A93BF3}"/>
+              </a:ext>
+            </a:extLst>
+          </p:cNvPr>
+          <p:cNvSpPr>
+            <a:spLocks noGrp="1"/>
+          </p:cNvSpPr>
+          <p:nvPr>
+            <p:ph type="sldNum" sz="quarter" idx="5"/>
+          </p:nvPr>
+        </p:nvSpPr>
+        <p:spPr/>
+        <p:txBody>
+          <a:bodyPr/>
+          <a:lstStyle/>
+          <a:p>
+            <a:fld id="{D00F3401-F479-4CFB-ABB6-A35D76EA0D8E}" type="slidenum">
+              <a:rPr lang="ru-RU" smtClean="0"/>
+              <a:t>20</a:t>
+            </a:fld>
+            <a:endParaRPr lang="ru-RU"/>
+          </a:p>
+        </p:txBody>
+      </p:sp>
+    </p:spTree>
+    <p:extLst>
+      <p:ext uri="{BB962C8B-B14F-4D97-AF65-F5344CB8AC3E}">
+        <p14:creationId xmlns:p14="http://schemas.microsoft.com/office/powerpoint/2010/main" val="2631820705"/>
+      </p:ext>
+    </p:extLst>
+  </p:cSld>
+  <p:clrMapOvr>
+    <a:masterClrMapping/>
+  </p:clrMapOvr>
+</p:notes>
+</file>
+
+<file path=ppt/notesSlides/notesSlide18.xml><?xml version="1.0" encoding="utf-8"?>
+<p:notes xmlns:a="http://schemas.openxmlformats.org/drawingml/2006/main" xmlns:r="http://schemas.openxmlformats.org/officeDocument/2006/relationships" xmlns:p="http://schemas.openxmlformats.org/presentationml/2006/main">
+  <p:cSld>
+    <p:spTree>
+      <p:nvGrpSpPr>
+        <p:cNvPr id="1" name=""/>
+        <p:cNvGrpSpPr/>
+        <p:nvPr/>
+      </p:nvGrpSpPr>
+      <p:grpSpPr>
+        <a:xfrm>
+          <a:off x="0" y="0"/>
+          <a:ext cx="0" cy="0"/>
+          <a:chOff x="0" y="0"/>
+          <a:chExt cx="0" cy="0"/>
+        </a:xfrm>
+      </p:grpSpPr>
+      <p:sp>
+        <p:nvSpPr>
+          <p:cNvPr id="2" name="Образ слайда 1"/>
+          <p:cNvSpPr>
+            <a:spLocks noGrp="1" noRot="1" noChangeAspect="1"/>
+          </p:cNvSpPr>
+          <p:nvPr>
+            <p:ph type="sldImg"/>
+          </p:nvPr>
+        </p:nvSpPr>
+        <p:spPr/>
+      </p:sp>
+      <p:sp>
+        <p:nvSpPr>
+          <p:cNvPr id="3" name="Заметки 2"/>
+          <p:cNvSpPr>
+            <a:spLocks noGrp="1"/>
+          </p:cNvSpPr>
+          <p:nvPr>
+            <p:ph type="body" idx="1"/>
+          </p:nvPr>
+        </p:nvSpPr>
+        <p:spPr/>
+        <p:txBody>
+          <a:bodyPr/>
+          <a:lstStyle/>
+          <a:p>
+            <a:endParaRPr lang="ru-RU" dirty="0"/>
+          </a:p>
+        </p:txBody>
+      </p:sp>
+      <p:sp>
+        <p:nvSpPr>
+          <p:cNvPr id="5" name="Slide Number Placeholder 4">
+            <a:extLst>
+              <a:ext uri="{FF2B5EF4-FFF2-40B4-BE49-F238E27FC236}">
+                <a16:creationId xmlns:a16="http://schemas.microsoft.com/office/drawing/2014/main" id="{813EFF11-3295-9502-9536-A51C774B4880}"/>
               </a:ext>
             </a:extLst>
           </p:cNvPr>
@@ -1914,7 +2004,7 @@
     </p:spTree>
     <p:extLst>
       <p:ext uri="{BB962C8B-B14F-4D97-AF65-F5344CB8AC3E}">
-        <p14:creationId xmlns:p14="http://schemas.microsoft.com/office/powerpoint/2010/main" val="1787919214"/>
+        <p14:creationId xmlns:p14="http://schemas.microsoft.com/office/powerpoint/2010/main" val="1611200264"/>
       </p:ext>
     </p:extLst>
   </p:cSld>
@@ -1968,7 +2058,21 @@
           <a:bodyPr/>
           <a:lstStyle/>
           <a:p>
-            <a:endParaRPr lang="ru-RU" dirty="0"/>
+            <a:r>
+              <a:rPr lang="ru-RU" dirty="0"/>
+              <a:t>В настоящем времени стандартном инженерии является использование портала </a:t>
+            </a:r>
+            <a:r>
+              <a:rPr lang="en-US" dirty="0"/>
+              <a:t>GitHub</a:t>
+            </a:r>
+            <a:br>
+              <a:rPr lang="en-US" dirty="0"/>
+            </a:br>
+            <a:r>
+              <a:rPr lang="ru-RU" dirty="0"/>
+              <a:t>В соответствии с этим актуальным является проблема поиска закономерностей.</a:t>
+            </a:r>
           </a:p>
         </p:txBody>
       </p:sp>
@@ -2085,7 +2189,7 @@
           <a:p>
             <a:fld id="{D00F3401-F479-4CFB-ABB6-A35D76EA0D8E}" type="slidenum">
               <a:rPr lang="ru-RU" smtClean="0"/>
-              <a:t>5</a:t>
+              <a:t>3</a:t>
             </a:fld>
             <a:endParaRPr lang="ru-RU"/>
           </a:p>
@@ -2148,7 +2252,10 @@
           <a:bodyPr/>
           <a:lstStyle/>
           <a:p>
-            <a:endParaRPr lang="ru-RU"/>
+            <a:r>
+              <a:rPr lang="ru-RU" dirty="0"/>
+              <a:t>Формулы, пример транзакции, </a:t>
+            </a:r>
           </a:p>
         </p:txBody>
       </p:sp>
@@ -2175,7 +2282,7 @@
           <a:p>
             <a:fld id="{D00F3401-F479-4CFB-ABB6-A35D76EA0D8E}" type="slidenum">
               <a:rPr lang="ru-RU" smtClean="0"/>
-              <a:t>6</a:t>
+              <a:t>4</a:t>
             </a:fld>
             <a:endParaRPr lang="ru-RU"/>
           </a:p>
@@ -2238,7 +2345,7 @@
           <a:bodyPr/>
           <a:lstStyle/>
           <a:p>
-            <a:endParaRPr lang="ru-RU"/>
+            <a:endParaRPr lang="ru-RU" dirty="0"/>
           </a:p>
         </p:txBody>
       </p:sp>
@@ -2247,7 +2354,7 @@
           <p:cNvPr id="5" name="Slide Number Placeholder 4">
             <a:extLst>
               <a:ext uri="{FF2B5EF4-FFF2-40B4-BE49-F238E27FC236}">
-                <a16:creationId xmlns:a16="http://schemas.microsoft.com/office/drawing/2014/main" id="{DF7CA18B-1C3B-C130-D1D2-0466C1A93BF3}"/>
+                <a16:creationId xmlns:a16="http://schemas.microsoft.com/office/drawing/2014/main" id="{5E8212C7-0789-614D-0BF9-5450F28D161B}"/>
               </a:ext>
             </a:extLst>
           </p:cNvPr>
@@ -2265,7 +2372,7 @@
           <a:p>
             <a:fld id="{D00F3401-F479-4CFB-ABB6-A35D76EA0D8E}" type="slidenum">
               <a:rPr lang="ru-RU" smtClean="0"/>
-              <a:t>7</a:t>
+              <a:t>6</a:t>
             </a:fld>
             <a:endParaRPr lang="ru-RU"/>
           </a:p>
@@ -2274,7 +2381,7 @@
     </p:spTree>
     <p:extLst>
       <p:ext uri="{BB962C8B-B14F-4D97-AF65-F5344CB8AC3E}">
-        <p14:creationId xmlns:p14="http://schemas.microsoft.com/office/powerpoint/2010/main" val="2631820705"/>
+        <p14:creationId xmlns:p14="http://schemas.microsoft.com/office/powerpoint/2010/main" val="446187027"/>
       </p:ext>
     </p:extLst>
   </p:cSld>
@@ -2337,7 +2444,7 @@
           <p:cNvPr id="5" name="Slide Number Placeholder 4">
             <a:extLst>
               <a:ext uri="{FF2B5EF4-FFF2-40B4-BE49-F238E27FC236}">
-                <a16:creationId xmlns:a16="http://schemas.microsoft.com/office/drawing/2014/main" id="{813EFF11-3295-9502-9536-A51C774B4880}"/>
+                <a16:creationId xmlns:a16="http://schemas.microsoft.com/office/drawing/2014/main" id="{A2CE75BF-5265-4AAF-9ED5-F6E72D86B89F}"/>
               </a:ext>
             </a:extLst>
           </p:cNvPr>
@@ -2355,7 +2462,7 @@
           <a:p>
             <a:fld id="{D00F3401-F479-4CFB-ABB6-A35D76EA0D8E}" type="slidenum">
               <a:rPr lang="ru-RU" smtClean="0"/>
-              <a:t>8</a:t>
+              <a:t>7</a:t>
             </a:fld>
             <a:endParaRPr lang="ru-RU"/>
           </a:p>
@@ -2364,7 +2471,7 @@
     </p:spTree>
     <p:extLst>
       <p:ext uri="{BB962C8B-B14F-4D97-AF65-F5344CB8AC3E}">
-        <p14:creationId xmlns:p14="http://schemas.microsoft.com/office/powerpoint/2010/main" val="1611200264"/>
+        <p14:creationId xmlns:p14="http://schemas.microsoft.com/office/powerpoint/2010/main" val="1892717512"/>
       </p:ext>
     </p:extLst>
   </p:cSld>
@@ -2393,7 +2500,7 @@
       </p:grpSpPr>
       <p:sp>
         <p:nvSpPr>
-          <p:cNvPr id="2" name="Образ слайда 1"/>
+          <p:cNvPr id="2" name="Slide Image Placeholder 1"/>
           <p:cNvSpPr>
             <a:spLocks noGrp="1" noRot="1" noChangeAspect="1"/>
           </p:cNvSpPr>
@@ -2405,7 +2512,7 @@
       </p:sp>
       <p:sp>
         <p:nvSpPr>
-          <p:cNvPr id="3" name="Заметки 2"/>
+          <p:cNvPr id="3" name="Notes Placeholder 2"/>
           <p:cNvSpPr>
             <a:spLocks noGrp="1"/>
           </p:cNvSpPr>
@@ -2418,19 +2525,20 @@
           <a:bodyPr/>
           <a:lstStyle/>
           <a:p>
-            <a:endParaRPr lang="ru-RU" dirty="0"/>
-          </a:p>
-        </p:txBody>
-      </p:sp>
-      <p:sp>
-        <p:nvSpPr>
-          <p:cNvPr id="5" name="Slide Number Placeholder 4">
-            <a:extLst>
-              <a:ext uri="{FF2B5EF4-FFF2-40B4-BE49-F238E27FC236}">
-                <a16:creationId xmlns:a16="http://schemas.microsoft.com/office/drawing/2014/main" id="{5E8212C7-0789-614D-0BF9-5450F28D161B}"/>
-              </a:ext>
-            </a:extLst>
-          </p:cNvPr>
+            <a:r>
+              <a:rPr lang="en-US" dirty="0"/>
+              <a:t>	</a:t>
+            </a:r>
+            <a:r>
+              <a:rPr lang="ru-RU" dirty="0"/>
+              <a:t>Транзакции в базе данных имеют такую природу</a:t>
+            </a:r>
+          </a:p>
+        </p:txBody>
+      </p:sp>
+      <p:sp>
+        <p:nvSpPr>
+          <p:cNvPr id="4" name="Slide Number Placeholder 3"/>
           <p:cNvSpPr>
             <a:spLocks noGrp="1"/>
           </p:cNvSpPr>
@@ -2445,7 +2553,7 @@
           <a:p>
             <a:fld id="{D00F3401-F479-4CFB-ABB6-A35D76EA0D8E}" type="slidenum">
               <a:rPr lang="ru-RU" smtClean="0"/>
-              <a:t>10</a:t>
+              <a:t>8</a:t>
             </a:fld>
             <a:endParaRPr lang="ru-RU"/>
           </a:p>
@@ -2454,7 +2562,7 @@
     </p:spTree>
     <p:extLst>
       <p:ext uri="{BB962C8B-B14F-4D97-AF65-F5344CB8AC3E}">
-        <p14:creationId xmlns:p14="http://schemas.microsoft.com/office/powerpoint/2010/main" val="446187027"/>
+        <p14:creationId xmlns:p14="http://schemas.microsoft.com/office/powerpoint/2010/main" val="274779014"/>
       </p:ext>
     </p:extLst>
   </p:cSld>
@@ -2517,7 +2625,7 @@
           <p:cNvPr id="5" name="Slide Number Placeholder 4">
             <a:extLst>
               <a:ext uri="{FF2B5EF4-FFF2-40B4-BE49-F238E27FC236}">
-                <a16:creationId xmlns:a16="http://schemas.microsoft.com/office/drawing/2014/main" id="{A2CE75BF-5265-4AAF-9ED5-F6E72D86B89F}"/>
+                <a16:creationId xmlns:a16="http://schemas.microsoft.com/office/drawing/2014/main" id="{766CDAB2-4431-5AD9-F4FA-A00FBAF25344}"/>
               </a:ext>
             </a:extLst>
           </p:cNvPr>
@@ -2535,7 +2643,7 @@
           <a:p>
             <a:fld id="{D00F3401-F479-4CFB-ABB6-A35D76EA0D8E}" type="slidenum">
               <a:rPr lang="ru-RU" smtClean="0"/>
-              <a:t>11</a:t>
+              <a:t>9</a:t>
             </a:fld>
             <a:endParaRPr lang="ru-RU"/>
           </a:p>
@@ -2544,7 +2652,7 @@
     </p:spTree>
     <p:extLst>
       <p:ext uri="{BB962C8B-B14F-4D97-AF65-F5344CB8AC3E}">
-        <p14:creationId xmlns:p14="http://schemas.microsoft.com/office/powerpoint/2010/main" val="1892717512"/>
+        <p14:creationId xmlns:p14="http://schemas.microsoft.com/office/powerpoint/2010/main" val="1374628166"/>
       </p:ext>
     </p:extLst>
   </p:cSld>
@@ -2573,7 +2681,7 @@
       </p:grpSpPr>
       <p:sp>
         <p:nvSpPr>
-          <p:cNvPr id="2" name="Образ слайда 1"/>
+          <p:cNvPr id="2" name="Slide Image Placeholder 1"/>
           <p:cNvSpPr>
             <a:spLocks noGrp="1" noRot="1" noChangeAspect="1"/>
           </p:cNvSpPr>
@@ -2585,7 +2693,7 @@
       </p:sp>
       <p:sp>
         <p:nvSpPr>
-          <p:cNvPr id="3" name="Заметки 2"/>
+          <p:cNvPr id="3" name="Notes Placeholder 2"/>
           <p:cNvSpPr>
             <a:spLocks noGrp="1"/>
           </p:cNvSpPr>
@@ -2598,7 +2706,7 @@
           <a:bodyPr/>
           <a:lstStyle/>
           <a:p>
-            <a:endParaRPr lang="ru-RU"/>
+            <a:endParaRPr lang="ru-RU" dirty="0"/>
           </a:p>
         </p:txBody>
       </p:sp>
@@ -2607,7 +2715,7 @@
           <p:cNvPr id="5" name="Slide Number Placeholder 4">
             <a:extLst>
               <a:ext uri="{FF2B5EF4-FFF2-40B4-BE49-F238E27FC236}">
-                <a16:creationId xmlns:a16="http://schemas.microsoft.com/office/drawing/2014/main" id="{766CDAB2-4431-5AD9-F4FA-A00FBAF25344}"/>
+                <a16:creationId xmlns:a16="http://schemas.microsoft.com/office/drawing/2014/main" id="{717FE0E1-87A9-9E3F-9204-A5B16398ED45}"/>
               </a:ext>
             </a:extLst>
           </p:cNvPr>
@@ -2625,7 +2733,7 @@
           <a:p>
             <a:fld id="{D00F3401-F479-4CFB-ABB6-A35D76EA0D8E}" type="slidenum">
               <a:rPr lang="ru-RU" smtClean="0"/>
-              <a:t>13</a:t>
+              <a:t>10</a:t>
             </a:fld>
             <a:endParaRPr lang="ru-RU"/>
           </a:p>
@@ -2634,7 +2742,7 @@
     </p:spTree>
     <p:extLst>
       <p:ext uri="{BB962C8B-B14F-4D97-AF65-F5344CB8AC3E}">
-        <p14:creationId xmlns:p14="http://schemas.microsoft.com/office/powerpoint/2010/main" val="1374628166"/>
+        <p14:creationId xmlns:p14="http://schemas.microsoft.com/office/powerpoint/2010/main" val="2697756950"/>
       </p:ext>
     </p:extLst>
   </p:cSld>
@@ -6367,10 +6475,10 @@
       </p:grpSpPr>
       <p:sp>
         <p:nvSpPr>
-          <p:cNvPr id="3" name="TextBox 2">
-            <a:extLst>
-              <a:ext uri="{FF2B5EF4-FFF2-40B4-BE49-F238E27FC236}">
-                <a16:creationId xmlns:a16="http://schemas.microsoft.com/office/drawing/2014/main" id="{100B25DD-8CC4-48A0-A45C-A43464AB841D}"/>
+          <p:cNvPr id="4" name="TextBox 3">
+            <a:extLst>
+              <a:ext uri="{FF2B5EF4-FFF2-40B4-BE49-F238E27FC236}">
+                <a16:creationId xmlns:a16="http://schemas.microsoft.com/office/drawing/2014/main" id="{715F93EE-AF4B-3C0D-484A-2E6DA1471D63}"/>
               </a:ext>
             </a:extLst>
           </p:cNvPr>
@@ -6399,58 +6507,17 @@
                 <a:latin typeface="Times New Roman" panose="02020603050405020304" pitchFamily="18" charset="0"/>
                 <a:cs typeface="Times New Roman" panose="02020603050405020304" pitchFamily="18" charset="0"/>
               </a:rPr>
-              <a:t>ДИАГРАММА ВАРИАНТОВ ИСПОЛЬЗОВАНИЯ</a:t>
-            </a:r>
-          </a:p>
-        </p:txBody>
-      </p:sp>
-      <p:pic>
-        <p:nvPicPr>
-          <p:cNvPr id="5" name="Picture 4">
-            <a:extLst>
-              <a:ext uri="{FF2B5EF4-FFF2-40B4-BE49-F238E27FC236}">
-                <a16:creationId xmlns:a16="http://schemas.microsoft.com/office/drawing/2014/main" id="{58AFD9A4-E09C-4265-4AD3-8D63473737C6}"/>
-              </a:ext>
-            </a:extLst>
-          </p:cNvPr>
-          <p:cNvPicPr>
-            <a:picLocks noChangeAspect="1"/>
-          </p:cNvPicPr>
-          <p:nvPr/>
-        </p:nvPicPr>
-        <p:blipFill>
-          <a:blip r:embed="rId3">
-            <a:extLst>
-              <a:ext uri="{28A0092B-C50C-407E-A947-70E740481C1C}">
-                <a14:useLocalDpi xmlns:a14="http://schemas.microsoft.com/office/drawing/2010/main" val="0"/>
-              </a:ext>
-            </a:extLst>
-          </a:blip>
-          <a:srcRect/>
-          <a:stretch>
-            <a:fillRect/>
-          </a:stretch>
-        </p:blipFill>
-        <p:spPr bwMode="auto">
-          <a:xfrm>
-            <a:off x="1805305" y="1174345"/>
-            <a:ext cx="8581390" cy="4960997"/>
-          </a:xfrm>
-          <a:prstGeom prst="rect">
-            <a:avLst/>
-          </a:prstGeom>
-          <a:noFill/>
-          <a:ln>
-            <a:noFill/>
-          </a:ln>
-        </p:spPr>
-      </p:pic>
-      <p:sp>
-        <p:nvSpPr>
-          <p:cNvPr id="6" name="Footer Placeholder 5">
-            <a:extLst>
-              <a:ext uri="{FF2B5EF4-FFF2-40B4-BE49-F238E27FC236}">
-                <a16:creationId xmlns:a16="http://schemas.microsoft.com/office/drawing/2014/main" id="{85918B98-9227-E89E-4216-E97AC57E0ECB}"/>
+              <a:t>БАЗА ДАННЫХ</a:t>
+            </a:r>
+          </a:p>
+        </p:txBody>
+      </p:sp>
+      <p:sp>
+        <p:nvSpPr>
+          <p:cNvPr id="5" name="Footer Placeholder 4">
+            <a:extLst>
+              <a:ext uri="{FF2B5EF4-FFF2-40B4-BE49-F238E27FC236}">
+                <a16:creationId xmlns:a16="http://schemas.microsoft.com/office/drawing/2014/main" id="{BBCA68B5-8CD0-7CF8-828A-E8515567C197}"/>
               </a:ext>
             </a:extLst>
           </p:cNvPr>
@@ -6479,7 +6546,7 @@
           <p:cNvPr id="2" name="Slide Number Placeholder 1">
             <a:extLst>
               <a:ext uri="{FF2B5EF4-FFF2-40B4-BE49-F238E27FC236}">
-                <a16:creationId xmlns:a16="http://schemas.microsoft.com/office/drawing/2014/main" id="{CE171089-D0F0-A0F1-70B8-DD1E3B11651F}"/>
+                <a16:creationId xmlns:a16="http://schemas.microsoft.com/office/drawing/2014/main" id="{2BB8D3CF-4ADB-1BFF-C4F9-480AD8F166C7}"/>
               </a:ext>
             </a:extLst>
           </p:cNvPr>
@@ -6499,2246 +6566,6 @@
               <a:rPr lang="ru-RU" smtClean="0"/>
               <a:pPr/>
               <a:t>10</a:t>
-            </a:fld>
-            <a:r>
-              <a:rPr lang="ru-RU" dirty="0"/>
-              <a:t>/21</a:t>
-            </a:r>
-          </a:p>
-        </p:txBody>
-      </p:sp>
-    </p:spTree>
-    <p:extLst>
-      <p:ext uri="{BB962C8B-B14F-4D97-AF65-F5344CB8AC3E}">
-        <p14:creationId xmlns:p14="http://schemas.microsoft.com/office/powerpoint/2010/main" val="1136029519"/>
-      </p:ext>
-    </p:extLst>
-  </p:cSld>
-  <p:clrMapOvr>
-    <a:masterClrMapping/>
-  </p:clrMapOvr>
-</p:sld>
-</file>
-
-<file path=ppt/slides/slide11.xml><?xml version="1.0" encoding="utf-8"?>
-<p:sld xmlns:a="http://schemas.openxmlformats.org/drawingml/2006/main" xmlns:r="http://schemas.openxmlformats.org/officeDocument/2006/relationships" xmlns:p="http://schemas.openxmlformats.org/presentationml/2006/main">
-  <p:cSld>
-    <p:spTree>
-      <p:nvGrpSpPr>
-        <p:cNvPr id="1" name=""/>
-        <p:cNvGrpSpPr/>
-        <p:nvPr/>
-      </p:nvGrpSpPr>
-      <p:grpSpPr>
-        <a:xfrm>
-          <a:off x="0" y="0"/>
-          <a:ext cx="0" cy="0"/>
-          <a:chOff x="0" y="0"/>
-          <a:chExt cx="0" cy="0"/>
-        </a:xfrm>
-      </p:grpSpPr>
-      <p:sp>
-        <p:nvSpPr>
-          <p:cNvPr id="3" name="TextBox 2">
-            <a:extLst>
-              <a:ext uri="{FF2B5EF4-FFF2-40B4-BE49-F238E27FC236}">
-                <a16:creationId xmlns:a16="http://schemas.microsoft.com/office/drawing/2014/main" id="{100B25DD-8CC4-48A0-A45C-A43464AB841D}"/>
-              </a:ext>
-            </a:extLst>
-          </p:cNvPr>
-          <p:cNvSpPr txBox="1"/>
-          <p:nvPr/>
-        </p:nvSpPr>
-        <p:spPr>
-          <a:xfrm>
-            <a:off x="0" y="0"/>
-            <a:ext cx="12192000" cy="523220"/>
-          </a:xfrm>
-          <a:prstGeom prst="rect">
-            <a:avLst/>
-          </a:prstGeom>
-          <a:noFill/>
-        </p:spPr>
-        <p:txBody>
-          <a:bodyPr wrap="square">
-            <a:spAutoFit/>
-          </a:bodyPr>
-          <a:lstStyle/>
-          <a:p>
-            <a:pPr algn="ctr"/>
-            <a:r>
-              <a:rPr lang="ru-RU" sz="2800" b="1" dirty="0">
-                <a:latin typeface="Times New Roman" panose="02020603050405020304" pitchFamily="18" charset="0"/>
-                <a:cs typeface="Times New Roman" panose="02020603050405020304" pitchFamily="18" charset="0"/>
-              </a:rPr>
-              <a:t>АРХИТЕКТУРА</a:t>
-            </a:r>
-          </a:p>
-        </p:txBody>
-      </p:sp>
-      <p:pic>
-        <p:nvPicPr>
-          <p:cNvPr id="6" name="Picture 5">
-            <a:extLst>
-              <a:ext uri="{FF2B5EF4-FFF2-40B4-BE49-F238E27FC236}">
-                <a16:creationId xmlns:a16="http://schemas.microsoft.com/office/drawing/2014/main" id="{809FA319-53B1-BCC2-247D-A699B2E21667}"/>
-              </a:ext>
-            </a:extLst>
-          </p:cNvPr>
-          <p:cNvPicPr>
-            <a:picLocks noChangeAspect="1"/>
-          </p:cNvPicPr>
-          <p:nvPr/>
-        </p:nvPicPr>
-        <p:blipFill>
-          <a:blip r:embed="rId3">
-            <a:extLst>
-              <a:ext uri="{28A0092B-C50C-407E-A947-70E740481C1C}">
-                <a14:useLocalDpi xmlns:a14="http://schemas.microsoft.com/office/drawing/2010/main" val="0"/>
-              </a:ext>
-            </a:extLst>
-          </a:blip>
-          <a:srcRect/>
-          <a:stretch>
-            <a:fillRect/>
-          </a:stretch>
-        </p:blipFill>
-        <p:spPr bwMode="auto">
-          <a:xfrm>
-            <a:off x="2018982" y="804459"/>
-            <a:ext cx="8154036" cy="5361323"/>
-          </a:xfrm>
-          <a:prstGeom prst="rect">
-            <a:avLst/>
-          </a:prstGeom>
-          <a:noFill/>
-          <a:ln>
-            <a:noFill/>
-          </a:ln>
-        </p:spPr>
-      </p:pic>
-      <p:sp>
-        <p:nvSpPr>
-          <p:cNvPr id="8" name="Footer Placeholder 7">
-            <a:extLst>
-              <a:ext uri="{FF2B5EF4-FFF2-40B4-BE49-F238E27FC236}">
-                <a16:creationId xmlns:a16="http://schemas.microsoft.com/office/drawing/2014/main" id="{8700C46C-D356-0043-0F28-0736377B9B34}"/>
-              </a:ext>
-            </a:extLst>
-          </p:cNvPr>
-          <p:cNvSpPr>
-            <a:spLocks noGrp="1"/>
-          </p:cNvSpPr>
-          <p:nvPr>
-            <p:ph type="ftr" sz="quarter" idx="11"/>
-          </p:nvPr>
-        </p:nvSpPr>
-        <p:spPr/>
-        <p:txBody>
-          <a:bodyPr/>
-          <a:lstStyle/>
-          <a:p>
-            <a:r>
-              <a:rPr lang="ru-RU"/>
-              <a:t>Система поиска шаблонов в данных GitHub</a:t>
-            </a:r>
-            <a:endParaRPr lang="ru-RU" dirty="0"/>
-          </a:p>
-        </p:txBody>
-      </p:sp>
-      <p:sp>
-        <p:nvSpPr>
-          <p:cNvPr id="2" name="Slide Number Placeholder 1">
-            <a:extLst>
-              <a:ext uri="{FF2B5EF4-FFF2-40B4-BE49-F238E27FC236}">
-                <a16:creationId xmlns:a16="http://schemas.microsoft.com/office/drawing/2014/main" id="{BF9BEB9B-0EED-CEF8-AF80-268091C4C3E7}"/>
-              </a:ext>
-            </a:extLst>
-          </p:cNvPr>
-          <p:cNvSpPr>
-            <a:spLocks noGrp="1"/>
-          </p:cNvSpPr>
-          <p:nvPr>
-            <p:ph type="sldNum" sz="quarter" idx="12"/>
-          </p:nvPr>
-        </p:nvSpPr>
-        <p:spPr/>
-        <p:txBody>
-          <a:bodyPr/>
-          <a:lstStyle/>
-          <a:p>
-            <a:fld id="{7EC09024-2147-4C4E-87D2-FF66EAF91B1A}" type="slidenum">
-              <a:rPr lang="ru-RU" smtClean="0"/>
-              <a:pPr/>
-              <a:t>11</a:t>
-            </a:fld>
-            <a:r>
-              <a:rPr lang="ru-RU" dirty="0"/>
-              <a:t>/21</a:t>
-            </a:r>
-          </a:p>
-        </p:txBody>
-      </p:sp>
-    </p:spTree>
-    <p:extLst>
-      <p:ext uri="{BB962C8B-B14F-4D97-AF65-F5344CB8AC3E}">
-        <p14:creationId xmlns:p14="http://schemas.microsoft.com/office/powerpoint/2010/main" val="3559536693"/>
-      </p:ext>
-    </p:extLst>
-  </p:cSld>
-  <p:clrMapOvr>
-    <a:masterClrMapping/>
-  </p:clrMapOvr>
-</p:sld>
-</file>
-
-<file path=ppt/slides/slide12.xml><?xml version="1.0" encoding="utf-8"?>
-<p:sld xmlns:a="http://schemas.openxmlformats.org/drawingml/2006/main" xmlns:r="http://schemas.openxmlformats.org/officeDocument/2006/relationships" xmlns:p="http://schemas.openxmlformats.org/presentationml/2006/main">
-  <p:cSld>
-    <p:spTree>
-      <p:nvGrpSpPr>
-        <p:cNvPr id="1" name=""/>
-        <p:cNvGrpSpPr/>
-        <p:nvPr/>
-      </p:nvGrpSpPr>
-      <p:grpSpPr>
-        <a:xfrm>
-          <a:off x="0" y="0"/>
-          <a:ext cx="0" cy="0"/>
-          <a:chOff x="0" y="0"/>
-          <a:chExt cx="0" cy="0"/>
-        </a:xfrm>
-      </p:grpSpPr>
-      <p:graphicFrame>
-        <p:nvGraphicFramePr>
-          <p:cNvPr id="6" name="Table 5">
-            <a:extLst>
-              <a:ext uri="{FF2B5EF4-FFF2-40B4-BE49-F238E27FC236}">
-                <a16:creationId xmlns:a16="http://schemas.microsoft.com/office/drawing/2014/main" id="{B7BF36CC-5F4F-EF33-AA74-90EA95756E47}"/>
-              </a:ext>
-            </a:extLst>
-          </p:cNvPr>
-          <p:cNvGraphicFramePr>
-            <a:graphicFrameLocks noGrp="1"/>
-          </p:cNvGraphicFramePr>
-          <p:nvPr>
-            <p:extLst>
-              <p:ext uri="{D42A27DB-BD31-4B8C-83A1-F6EECF244321}">
-                <p14:modId xmlns:p14="http://schemas.microsoft.com/office/powerpoint/2010/main" val="616825397"/>
-              </p:ext>
-            </p:extLst>
-          </p:nvPr>
-        </p:nvGraphicFramePr>
-        <p:xfrm>
-          <a:off x="2133600" y="1247986"/>
-          <a:ext cx="7672070" cy="2133600"/>
-        </p:xfrm>
-        <a:graphic>
-          <a:graphicData uri="http://schemas.openxmlformats.org/drawingml/2006/table">
-            <a:tbl>
-              <a:tblPr firstRow="1" firstCol="1" bandRow="1">
-                <a:tableStyleId>{5940675A-B579-460E-94D1-54222C63F5DA}</a:tableStyleId>
-              </a:tblPr>
-              <a:tblGrid>
-                <a:gridCol w="2452353">
-                  <a:extLst>
-                    <a:ext uri="{9D8B030D-6E8A-4147-A177-3AD203B41FA5}">
-                      <a16:colId xmlns:a16="http://schemas.microsoft.com/office/drawing/2014/main" val="1540626529"/>
-                    </a:ext>
-                  </a:extLst>
-                </a:gridCol>
-                <a:gridCol w="800232">
-                  <a:extLst>
-                    <a:ext uri="{9D8B030D-6E8A-4147-A177-3AD203B41FA5}">
-                      <a16:colId xmlns:a16="http://schemas.microsoft.com/office/drawing/2014/main" val="1058532723"/>
-                    </a:ext>
-                  </a:extLst>
-                </a:gridCol>
-                <a:gridCol w="4419485">
-                  <a:extLst>
-                    <a:ext uri="{9D8B030D-6E8A-4147-A177-3AD203B41FA5}">
-                      <a16:colId xmlns:a16="http://schemas.microsoft.com/office/drawing/2014/main" val="1658150677"/>
-                    </a:ext>
-                  </a:extLst>
-                </a:gridCol>
-              </a:tblGrid>
-              <a:tr h="0">
-                <a:tc>
-                  <a:txBody>
-                    <a:bodyPr/>
-                    <a:lstStyle/>
-                    <a:p>
-                      <a:pPr algn="ctr"/>
-                      <a:r>
-                        <a:rPr lang="ru-RU" sz="1400" dirty="0">
-                          <a:effectLst/>
-                          <a:latin typeface="Times New Roman" panose="02020603050405020304" pitchFamily="18" charset="0"/>
-                          <a:cs typeface="Times New Roman" panose="02020603050405020304" pitchFamily="18" charset="0"/>
-                        </a:rPr>
-                        <a:t>Атрибут</a:t>
-                      </a:r>
-                      <a:endParaRPr lang="ru-RU" sz="1400" b="1" dirty="0">
-                        <a:effectLst/>
-                        <a:latin typeface="Times New Roman" panose="02020603050405020304" pitchFamily="18" charset="0"/>
-                        <a:ea typeface="Times New Roman" panose="02020603050405020304" pitchFamily="18" charset="0"/>
-                        <a:cs typeface="Times New Roman" panose="02020603050405020304" pitchFamily="18" charset="0"/>
-                      </a:endParaRPr>
-                    </a:p>
-                  </a:txBody>
-                  <a:tcPr marL="68580" marR="68580" marT="0" marB="0"/>
-                </a:tc>
-                <a:tc>
-                  <a:txBody>
-                    <a:bodyPr/>
-                    <a:lstStyle/>
-                    <a:p>
-                      <a:pPr algn="ctr"/>
-                      <a:r>
-                        <a:rPr lang="ru-RU" sz="1400">
-                          <a:effectLst/>
-                          <a:latin typeface="Times New Roman" panose="02020603050405020304" pitchFamily="18" charset="0"/>
-                          <a:cs typeface="Times New Roman" panose="02020603050405020304" pitchFamily="18" charset="0"/>
-                        </a:rPr>
-                        <a:t>Тип данных</a:t>
-                      </a:r>
-                      <a:endParaRPr lang="ru-RU" sz="1400" b="1">
-                        <a:effectLst/>
-                        <a:latin typeface="Times New Roman" panose="02020603050405020304" pitchFamily="18" charset="0"/>
-                        <a:ea typeface="Times New Roman" panose="02020603050405020304" pitchFamily="18" charset="0"/>
-                        <a:cs typeface="Times New Roman" panose="02020603050405020304" pitchFamily="18" charset="0"/>
-                      </a:endParaRPr>
-                    </a:p>
-                  </a:txBody>
-                  <a:tcPr marL="68580" marR="68580" marT="0" marB="0"/>
-                </a:tc>
-                <a:tc>
-                  <a:txBody>
-                    <a:bodyPr/>
-                    <a:lstStyle/>
-                    <a:p>
-                      <a:pPr algn="ctr"/>
-                      <a:r>
-                        <a:rPr lang="ru-RU" sz="1400">
-                          <a:effectLst/>
-                          <a:latin typeface="Times New Roman" panose="02020603050405020304" pitchFamily="18" charset="0"/>
-                          <a:cs typeface="Times New Roman" panose="02020603050405020304" pitchFamily="18" charset="0"/>
-                        </a:rPr>
-                        <a:t>Семантика</a:t>
-                      </a:r>
-                      <a:endParaRPr lang="ru-RU" sz="1400" b="1">
-                        <a:effectLst/>
-                        <a:latin typeface="Times New Roman" panose="02020603050405020304" pitchFamily="18" charset="0"/>
-                        <a:ea typeface="Times New Roman" panose="02020603050405020304" pitchFamily="18" charset="0"/>
-                        <a:cs typeface="Times New Roman" panose="02020603050405020304" pitchFamily="18" charset="0"/>
-                      </a:endParaRPr>
-                    </a:p>
-                  </a:txBody>
-                  <a:tcPr marL="68580" marR="68580" marT="0" marB="0"/>
-                </a:tc>
-                <a:extLst>
-                  <a:ext uri="{0D108BD9-81ED-4DB2-BD59-A6C34878D82A}">
-                    <a16:rowId xmlns:a16="http://schemas.microsoft.com/office/drawing/2014/main" val="3693032744"/>
-                  </a:ext>
-                </a:extLst>
-              </a:tr>
-              <a:tr h="0">
-                <a:tc>
-                  <a:txBody>
-                    <a:bodyPr/>
-                    <a:lstStyle/>
-                    <a:p>
-                      <a:r>
-                        <a:rPr lang="ru-RU" sz="1400">
-                          <a:effectLst/>
-                          <a:latin typeface="Times New Roman" panose="02020603050405020304" pitchFamily="18" charset="0"/>
-                          <a:cs typeface="Times New Roman" panose="02020603050405020304" pitchFamily="18" charset="0"/>
-                        </a:rPr>
-                        <a:t>pushes</a:t>
-                      </a:r>
-                      <a:endParaRPr lang="ru-RU" sz="1400">
-                        <a:effectLst/>
-                        <a:latin typeface="Times New Roman" panose="02020603050405020304" pitchFamily="18" charset="0"/>
-                        <a:ea typeface="Times New Roman" panose="02020603050405020304" pitchFamily="18" charset="0"/>
-                        <a:cs typeface="Times New Roman" panose="02020603050405020304" pitchFamily="18" charset="0"/>
-                      </a:endParaRPr>
-                    </a:p>
-                  </a:txBody>
-                  <a:tcPr marL="68580" marR="68580" marT="0" marB="0"/>
-                </a:tc>
-                <a:tc>
-                  <a:txBody>
-                    <a:bodyPr/>
-                    <a:lstStyle/>
-                    <a:p>
-                      <a:r>
-                        <a:rPr lang="ru-RU" sz="1400">
-                          <a:effectLst/>
-                          <a:latin typeface="Times New Roman" panose="02020603050405020304" pitchFamily="18" charset="0"/>
-                          <a:cs typeface="Times New Roman" panose="02020603050405020304" pitchFamily="18" charset="0"/>
-                        </a:rPr>
-                        <a:t>Число</a:t>
-                      </a:r>
-                      <a:endParaRPr lang="ru-RU" sz="1400">
-                        <a:effectLst/>
-                        <a:latin typeface="Times New Roman" panose="02020603050405020304" pitchFamily="18" charset="0"/>
-                        <a:ea typeface="Times New Roman" panose="02020603050405020304" pitchFamily="18" charset="0"/>
-                        <a:cs typeface="Times New Roman" panose="02020603050405020304" pitchFamily="18" charset="0"/>
-                      </a:endParaRPr>
-                    </a:p>
-                  </a:txBody>
-                  <a:tcPr marL="68580" marR="68580" marT="0" marB="0"/>
-                </a:tc>
-                <a:tc>
-                  <a:txBody>
-                    <a:bodyPr/>
-                    <a:lstStyle/>
-                    <a:p>
-                      <a:r>
-                        <a:rPr lang="ru-RU" sz="1400" dirty="0">
-                          <a:effectLst/>
-                          <a:latin typeface="Times New Roman" panose="02020603050405020304" pitchFamily="18" charset="0"/>
-                          <a:cs typeface="Times New Roman" panose="02020603050405020304" pitchFamily="18" charset="0"/>
-                        </a:rPr>
-                        <a:t>Количество отправленных изменений (</a:t>
-                      </a:r>
-                      <a:r>
-                        <a:rPr lang="ru-RU" sz="1400" dirty="0" err="1">
-                          <a:effectLst/>
-                          <a:latin typeface="Times New Roman" panose="02020603050405020304" pitchFamily="18" charset="0"/>
-                          <a:cs typeface="Times New Roman" panose="02020603050405020304" pitchFamily="18" charset="0"/>
-                        </a:rPr>
-                        <a:t>pushes</a:t>
-                      </a:r>
-                      <a:r>
-                        <a:rPr lang="ru-RU" sz="1400" dirty="0">
-                          <a:effectLst/>
-                          <a:latin typeface="Times New Roman" panose="02020603050405020304" pitchFamily="18" charset="0"/>
-                          <a:cs typeface="Times New Roman" panose="02020603050405020304" pitchFamily="18" charset="0"/>
-                        </a:rPr>
-                        <a:t>) в репозиторий</a:t>
-                      </a:r>
-                      <a:endParaRPr lang="ru-RU" sz="1400" dirty="0">
-                        <a:effectLst/>
-                        <a:latin typeface="Times New Roman" panose="02020603050405020304" pitchFamily="18" charset="0"/>
-                        <a:ea typeface="Times New Roman" panose="02020603050405020304" pitchFamily="18" charset="0"/>
-                        <a:cs typeface="Times New Roman" panose="02020603050405020304" pitchFamily="18" charset="0"/>
-                      </a:endParaRPr>
-                    </a:p>
-                  </a:txBody>
-                  <a:tcPr marL="68580" marR="68580" marT="0" marB="0"/>
-                </a:tc>
-                <a:extLst>
-                  <a:ext uri="{0D108BD9-81ED-4DB2-BD59-A6C34878D82A}">
-                    <a16:rowId xmlns:a16="http://schemas.microsoft.com/office/drawing/2014/main" val="2298570547"/>
-                  </a:ext>
-                </a:extLst>
-              </a:tr>
-              <a:tr h="0">
-                <a:tc>
-                  <a:txBody>
-                    <a:bodyPr/>
-                    <a:lstStyle/>
-                    <a:p>
-                      <a:r>
-                        <a:rPr lang="ru-RU" sz="1400" dirty="0" err="1">
-                          <a:effectLst/>
-                          <a:latin typeface="Times New Roman" panose="02020603050405020304" pitchFamily="18" charset="0"/>
-                          <a:cs typeface="Times New Roman" panose="02020603050405020304" pitchFamily="18" charset="0"/>
-                        </a:rPr>
-                        <a:t>avg_push_size</a:t>
-                      </a:r>
-                      <a:endParaRPr lang="ru-RU" sz="1400" dirty="0">
-                        <a:effectLst/>
-                        <a:latin typeface="Times New Roman" panose="02020603050405020304" pitchFamily="18" charset="0"/>
-                        <a:ea typeface="Times New Roman" panose="02020603050405020304" pitchFamily="18" charset="0"/>
-                        <a:cs typeface="Times New Roman" panose="02020603050405020304" pitchFamily="18" charset="0"/>
-                      </a:endParaRPr>
-                    </a:p>
-                  </a:txBody>
-                  <a:tcPr marL="68580" marR="68580" marT="0" marB="0"/>
-                </a:tc>
-                <a:tc>
-                  <a:txBody>
-                    <a:bodyPr/>
-                    <a:lstStyle/>
-                    <a:p>
-                      <a:r>
-                        <a:rPr lang="ru-RU" sz="1400">
-                          <a:effectLst/>
-                          <a:latin typeface="Times New Roman" panose="02020603050405020304" pitchFamily="18" charset="0"/>
-                          <a:cs typeface="Times New Roman" panose="02020603050405020304" pitchFamily="18" charset="0"/>
-                        </a:rPr>
-                        <a:t>Число</a:t>
-                      </a:r>
-                      <a:endParaRPr lang="ru-RU" sz="1400">
-                        <a:effectLst/>
-                        <a:latin typeface="Times New Roman" panose="02020603050405020304" pitchFamily="18" charset="0"/>
-                        <a:ea typeface="Times New Roman" panose="02020603050405020304" pitchFamily="18" charset="0"/>
-                        <a:cs typeface="Times New Roman" panose="02020603050405020304" pitchFamily="18" charset="0"/>
-                      </a:endParaRPr>
-                    </a:p>
-                  </a:txBody>
-                  <a:tcPr marL="68580" marR="68580" marT="0" marB="0"/>
-                </a:tc>
-                <a:tc>
-                  <a:txBody>
-                    <a:bodyPr/>
-                    <a:lstStyle/>
-                    <a:p>
-                      <a:r>
-                        <a:rPr lang="ru-RU" sz="1400">
-                          <a:effectLst/>
-                          <a:latin typeface="Times New Roman" panose="02020603050405020304" pitchFamily="18" charset="0"/>
-                          <a:cs typeface="Times New Roman" panose="02020603050405020304" pitchFamily="18" charset="0"/>
-                        </a:rPr>
-                        <a:t>Средний размер отправленных изменений (pushes)</a:t>
-                      </a:r>
-                      <a:endParaRPr lang="ru-RU" sz="1400">
-                        <a:effectLst/>
-                        <a:latin typeface="Times New Roman" panose="02020603050405020304" pitchFamily="18" charset="0"/>
-                        <a:ea typeface="Times New Roman" panose="02020603050405020304" pitchFamily="18" charset="0"/>
-                        <a:cs typeface="Times New Roman" panose="02020603050405020304" pitchFamily="18" charset="0"/>
-                      </a:endParaRPr>
-                    </a:p>
-                  </a:txBody>
-                  <a:tcPr marL="68580" marR="68580" marT="0" marB="0"/>
-                </a:tc>
-                <a:extLst>
-                  <a:ext uri="{0D108BD9-81ED-4DB2-BD59-A6C34878D82A}">
-                    <a16:rowId xmlns:a16="http://schemas.microsoft.com/office/drawing/2014/main" val="1672261219"/>
-                  </a:ext>
-                </a:extLst>
-              </a:tr>
-              <a:tr h="0">
-                <a:tc>
-                  <a:txBody>
-                    <a:bodyPr/>
-                    <a:lstStyle/>
-                    <a:p>
-                      <a:r>
-                        <a:rPr lang="ru-RU" sz="1400" dirty="0" err="1">
-                          <a:effectLst/>
-                          <a:latin typeface="Times New Roman" panose="02020603050405020304" pitchFamily="18" charset="0"/>
-                          <a:cs typeface="Times New Roman" panose="02020603050405020304" pitchFamily="18" charset="0"/>
-                        </a:rPr>
-                        <a:t>pull_requests</a:t>
-                      </a:r>
-                      <a:endParaRPr lang="ru-RU" sz="1400" dirty="0">
-                        <a:effectLst/>
-                        <a:latin typeface="Times New Roman" panose="02020603050405020304" pitchFamily="18" charset="0"/>
-                        <a:ea typeface="Times New Roman" panose="02020603050405020304" pitchFamily="18" charset="0"/>
-                        <a:cs typeface="Times New Roman" panose="02020603050405020304" pitchFamily="18" charset="0"/>
-                      </a:endParaRPr>
-                    </a:p>
-                  </a:txBody>
-                  <a:tcPr marL="68580" marR="68580" marT="0" marB="0"/>
-                </a:tc>
-                <a:tc>
-                  <a:txBody>
-                    <a:bodyPr/>
-                    <a:lstStyle/>
-                    <a:p>
-                      <a:r>
-                        <a:rPr lang="ru-RU" sz="1400" dirty="0">
-                          <a:effectLst/>
-                          <a:latin typeface="Times New Roman" panose="02020603050405020304" pitchFamily="18" charset="0"/>
-                          <a:cs typeface="Times New Roman" panose="02020603050405020304" pitchFamily="18" charset="0"/>
-                        </a:rPr>
-                        <a:t>Число</a:t>
-                      </a:r>
-                      <a:endParaRPr lang="ru-RU" sz="1400" dirty="0">
-                        <a:effectLst/>
-                        <a:latin typeface="Times New Roman" panose="02020603050405020304" pitchFamily="18" charset="0"/>
-                        <a:ea typeface="Times New Roman" panose="02020603050405020304" pitchFamily="18" charset="0"/>
-                        <a:cs typeface="Times New Roman" panose="02020603050405020304" pitchFamily="18" charset="0"/>
-                      </a:endParaRPr>
-                    </a:p>
-                  </a:txBody>
-                  <a:tcPr marL="68580" marR="68580" marT="0" marB="0"/>
-                </a:tc>
-                <a:tc>
-                  <a:txBody>
-                    <a:bodyPr/>
-                    <a:lstStyle/>
-                    <a:p>
-                      <a:r>
-                        <a:rPr lang="ru-RU" sz="1400">
-                          <a:effectLst/>
-                          <a:latin typeface="Times New Roman" panose="02020603050405020304" pitchFamily="18" charset="0"/>
-                          <a:cs typeface="Times New Roman" panose="02020603050405020304" pitchFamily="18" charset="0"/>
-                        </a:rPr>
-                        <a:t>Количество запросов на внесение изменений (pull requests)</a:t>
-                      </a:r>
-                      <a:endParaRPr lang="ru-RU" sz="1400">
-                        <a:effectLst/>
-                        <a:latin typeface="Times New Roman" panose="02020603050405020304" pitchFamily="18" charset="0"/>
-                        <a:ea typeface="Times New Roman" panose="02020603050405020304" pitchFamily="18" charset="0"/>
-                        <a:cs typeface="Times New Roman" panose="02020603050405020304" pitchFamily="18" charset="0"/>
-                      </a:endParaRPr>
-                    </a:p>
-                  </a:txBody>
-                  <a:tcPr marL="68580" marR="68580" marT="0" marB="0"/>
-                </a:tc>
-                <a:extLst>
-                  <a:ext uri="{0D108BD9-81ED-4DB2-BD59-A6C34878D82A}">
-                    <a16:rowId xmlns:a16="http://schemas.microsoft.com/office/drawing/2014/main" val="734987367"/>
-                  </a:ext>
-                </a:extLst>
-              </a:tr>
-              <a:tr h="0">
-                <a:tc>
-                  <a:txBody>
-                    <a:bodyPr/>
-                    <a:lstStyle/>
-                    <a:p>
-                      <a:r>
-                        <a:rPr lang="ru-RU" sz="1400" dirty="0" err="1">
-                          <a:effectLst/>
-                          <a:latin typeface="Times New Roman" panose="02020603050405020304" pitchFamily="18" charset="0"/>
-                          <a:cs typeface="Times New Roman" panose="02020603050405020304" pitchFamily="18" charset="0"/>
-                        </a:rPr>
-                        <a:t>merged_pull_requests_ratio</a:t>
-                      </a:r>
-                      <a:endParaRPr lang="ru-RU" sz="1400" dirty="0">
-                        <a:effectLst/>
-                        <a:latin typeface="Times New Roman" panose="02020603050405020304" pitchFamily="18" charset="0"/>
-                        <a:ea typeface="Times New Roman" panose="02020603050405020304" pitchFamily="18" charset="0"/>
-                        <a:cs typeface="Times New Roman" panose="02020603050405020304" pitchFamily="18" charset="0"/>
-                      </a:endParaRPr>
-                    </a:p>
-                  </a:txBody>
-                  <a:tcPr marL="68580" marR="68580" marT="0" marB="0"/>
-                </a:tc>
-                <a:tc>
-                  <a:txBody>
-                    <a:bodyPr/>
-                    <a:lstStyle/>
-                    <a:p>
-                      <a:r>
-                        <a:rPr lang="ru-RU" sz="1400">
-                          <a:effectLst/>
-                          <a:latin typeface="Times New Roman" panose="02020603050405020304" pitchFamily="18" charset="0"/>
-                          <a:cs typeface="Times New Roman" panose="02020603050405020304" pitchFamily="18" charset="0"/>
-                        </a:rPr>
-                        <a:t>Число</a:t>
-                      </a:r>
-                      <a:endParaRPr lang="ru-RU" sz="1400">
-                        <a:effectLst/>
-                        <a:latin typeface="Times New Roman" panose="02020603050405020304" pitchFamily="18" charset="0"/>
-                        <a:ea typeface="Times New Roman" panose="02020603050405020304" pitchFamily="18" charset="0"/>
-                        <a:cs typeface="Times New Roman" panose="02020603050405020304" pitchFamily="18" charset="0"/>
-                      </a:endParaRPr>
-                    </a:p>
-                  </a:txBody>
-                  <a:tcPr marL="68580" marR="68580" marT="0" marB="0"/>
-                </a:tc>
-                <a:tc>
-                  <a:txBody>
-                    <a:bodyPr/>
-                    <a:lstStyle/>
-                    <a:p>
-                      <a:r>
-                        <a:rPr lang="ru-RU" sz="1400" dirty="0">
-                          <a:effectLst/>
-                          <a:latin typeface="Times New Roman" panose="02020603050405020304" pitchFamily="18" charset="0"/>
-                          <a:cs typeface="Times New Roman" panose="02020603050405020304" pitchFamily="18" charset="0"/>
-                        </a:rPr>
-                        <a:t>Отношение успешно принятых запросов на внесение изменений (</a:t>
-                      </a:r>
-                      <a:r>
-                        <a:rPr lang="ru-RU" sz="1400" dirty="0" err="1">
-                          <a:effectLst/>
-                          <a:latin typeface="Times New Roman" panose="02020603050405020304" pitchFamily="18" charset="0"/>
-                          <a:cs typeface="Times New Roman" panose="02020603050405020304" pitchFamily="18" charset="0"/>
-                        </a:rPr>
-                        <a:t>pull</a:t>
-                      </a:r>
-                      <a:r>
-                        <a:rPr lang="ru-RU" sz="1400" dirty="0">
-                          <a:effectLst/>
-                          <a:latin typeface="Times New Roman" panose="02020603050405020304" pitchFamily="18" charset="0"/>
-                          <a:cs typeface="Times New Roman" panose="02020603050405020304" pitchFamily="18" charset="0"/>
-                        </a:rPr>
-                        <a:t> </a:t>
-                      </a:r>
-                      <a:r>
-                        <a:rPr lang="ru-RU" sz="1400" dirty="0" err="1">
-                          <a:effectLst/>
-                          <a:latin typeface="Times New Roman" panose="02020603050405020304" pitchFamily="18" charset="0"/>
-                          <a:cs typeface="Times New Roman" panose="02020603050405020304" pitchFamily="18" charset="0"/>
-                        </a:rPr>
-                        <a:t>requests</a:t>
-                      </a:r>
-                      <a:r>
-                        <a:rPr lang="ru-RU" sz="1400" dirty="0">
-                          <a:effectLst/>
-                          <a:latin typeface="Times New Roman" panose="02020603050405020304" pitchFamily="18" charset="0"/>
-                          <a:cs typeface="Times New Roman" panose="02020603050405020304" pitchFamily="18" charset="0"/>
-                        </a:rPr>
-                        <a:t>) к общему числу таких запросов</a:t>
-                      </a:r>
-                      <a:endParaRPr lang="ru-RU" sz="1400" dirty="0">
-                        <a:effectLst/>
-                        <a:latin typeface="Times New Roman" panose="02020603050405020304" pitchFamily="18" charset="0"/>
-                        <a:ea typeface="Times New Roman" panose="02020603050405020304" pitchFamily="18" charset="0"/>
-                        <a:cs typeface="Times New Roman" panose="02020603050405020304" pitchFamily="18" charset="0"/>
-                      </a:endParaRPr>
-                    </a:p>
-                  </a:txBody>
-                  <a:tcPr marL="68580" marR="68580" marT="0" marB="0"/>
-                </a:tc>
-                <a:extLst>
-                  <a:ext uri="{0D108BD9-81ED-4DB2-BD59-A6C34878D82A}">
-                    <a16:rowId xmlns:a16="http://schemas.microsoft.com/office/drawing/2014/main" val="2069057979"/>
-                  </a:ext>
-                </a:extLst>
-              </a:tr>
-            </a:tbl>
-          </a:graphicData>
-        </a:graphic>
-      </p:graphicFrame>
-      <p:graphicFrame>
-        <p:nvGraphicFramePr>
-          <p:cNvPr id="7" name="Table 6">
-            <a:extLst>
-              <a:ext uri="{FF2B5EF4-FFF2-40B4-BE49-F238E27FC236}">
-                <a16:creationId xmlns:a16="http://schemas.microsoft.com/office/drawing/2014/main" id="{B569CDED-8AE1-E809-599B-A96351ADA4F9}"/>
-              </a:ext>
-            </a:extLst>
-          </p:cNvPr>
-          <p:cNvGraphicFramePr>
-            <a:graphicFrameLocks noGrp="1"/>
-          </p:cNvGraphicFramePr>
-          <p:nvPr>
-            <p:extLst>
-              <p:ext uri="{D42A27DB-BD31-4B8C-83A1-F6EECF244321}">
-                <p14:modId xmlns:p14="http://schemas.microsoft.com/office/powerpoint/2010/main" val="3355597408"/>
-              </p:ext>
-            </p:extLst>
-          </p:nvPr>
-        </p:nvGraphicFramePr>
-        <p:xfrm>
-          <a:off x="2133599" y="3379046"/>
-          <a:ext cx="7672068" cy="2898140"/>
-        </p:xfrm>
-        <a:graphic>
-          <a:graphicData uri="http://schemas.openxmlformats.org/drawingml/2006/table">
-            <a:tbl>
-              <a:tblPr firstRow="1" firstCol="1" bandRow="1">
-                <a:tableStyleId>{5940675A-B579-460E-94D1-54222C63F5DA}</a:tableStyleId>
-              </a:tblPr>
-              <a:tblGrid>
-                <a:gridCol w="2452352">
-                  <a:extLst>
-                    <a:ext uri="{9D8B030D-6E8A-4147-A177-3AD203B41FA5}">
-                      <a16:colId xmlns:a16="http://schemas.microsoft.com/office/drawing/2014/main" val="1533574516"/>
-                    </a:ext>
-                  </a:extLst>
-                </a:gridCol>
-                <a:gridCol w="800232">
-                  <a:extLst>
-                    <a:ext uri="{9D8B030D-6E8A-4147-A177-3AD203B41FA5}">
-                      <a16:colId xmlns:a16="http://schemas.microsoft.com/office/drawing/2014/main" val="2388763894"/>
-                    </a:ext>
-                  </a:extLst>
-                </a:gridCol>
-                <a:gridCol w="4419484">
-                  <a:extLst>
-                    <a:ext uri="{9D8B030D-6E8A-4147-A177-3AD203B41FA5}">
-                      <a16:colId xmlns:a16="http://schemas.microsoft.com/office/drawing/2014/main" val="1032431029"/>
-                    </a:ext>
-                  </a:extLst>
-                </a:gridCol>
-              </a:tblGrid>
-              <a:tr h="0">
-                <a:tc>
-                  <a:txBody>
-                    <a:bodyPr/>
-                    <a:lstStyle/>
-                    <a:p>
-                      <a:r>
-                        <a:rPr lang="ru-RU" sz="1400" dirty="0" err="1">
-                          <a:effectLst/>
-                          <a:latin typeface="Times New Roman" panose="02020603050405020304" pitchFamily="18" charset="0"/>
-                          <a:cs typeface="Times New Roman" panose="02020603050405020304" pitchFamily="18" charset="0"/>
-                        </a:rPr>
-                        <a:t>issues</a:t>
-                      </a:r>
-                      <a:endParaRPr lang="ru-RU" sz="1400" dirty="0">
-                        <a:effectLst/>
-                        <a:latin typeface="Times New Roman" panose="02020603050405020304" pitchFamily="18" charset="0"/>
-                        <a:ea typeface="Times New Roman" panose="02020603050405020304" pitchFamily="18" charset="0"/>
-                        <a:cs typeface="Times New Roman" panose="02020603050405020304" pitchFamily="18" charset="0"/>
-                      </a:endParaRPr>
-                    </a:p>
-                  </a:txBody>
-                  <a:tcPr marL="68580" marR="68580" marT="0" marB="0"/>
-                </a:tc>
-                <a:tc>
-                  <a:txBody>
-                    <a:bodyPr/>
-                    <a:lstStyle/>
-                    <a:p>
-                      <a:r>
-                        <a:rPr lang="ru-RU" sz="1400">
-                          <a:effectLst/>
-                          <a:latin typeface="Times New Roman" panose="02020603050405020304" pitchFamily="18" charset="0"/>
-                          <a:cs typeface="Times New Roman" panose="02020603050405020304" pitchFamily="18" charset="0"/>
-                        </a:rPr>
-                        <a:t>Число</a:t>
-                      </a:r>
-                      <a:endParaRPr lang="ru-RU" sz="1400">
-                        <a:effectLst/>
-                        <a:latin typeface="Times New Roman" panose="02020603050405020304" pitchFamily="18" charset="0"/>
-                        <a:ea typeface="Times New Roman" panose="02020603050405020304" pitchFamily="18" charset="0"/>
-                        <a:cs typeface="Times New Roman" panose="02020603050405020304" pitchFamily="18" charset="0"/>
-                      </a:endParaRPr>
-                    </a:p>
-                  </a:txBody>
-                  <a:tcPr marL="68580" marR="68580" marT="0" marB="0"/>
-                </a:tc>
-                <a:tc>
-                  <a:txBody>
-                    <a:bodyPr/>
-                    <a:lstStyle/>
-                    <a:p>
-                      <a:r>
-                        <a:rPr lang="ru-RU" sz="1400">
-                          <a:effectLst/>
-                          <a:latin typeface="Times New Roman" panose="02020603050405020304" pitchFamily="18" charset="0"/>
-                          <a:cs typeface="Times New Roman" panose="02020603050405020304" pitchFamily="18" charset="0"/>
-                        </a:rPr>
-                        <a:t>Количество созданных вопросов или проблем (issues)</a:t>
-                      </a:r>
-                      <a:endParaRPr lang="ru-RU" sz="1400">
-                        <a:effectLst/>
-                        <a:latin typeface="Times New Roman" panose="02020603050405020304" pitchFamily="18" charset="0"/>
-                        <a:ea typeface="Times New Roman" panose="02020603050405020304" pitchFamily="18" charset="0"/>
-                        <a:cs typeface="Times New Roman" panose="02020603050405020304" pitchFamily="18" charset="0"/>
-                      </a:endParaRPr>
-                    </a:p>
-                  </a:txBody>
-                  <a:tcPr marL="68580" marR="68580" marT="0" marB="0"/>
-                </a:tc>
-                <a:extLst>
-                  <a:ext uri="{0D108BD9-81ED-4DB2-BD59-A6C34878D82A}">
-                    <a16:rowId xmlns:a16="http://schemas.microsoft.com/office/drawing/2014/main" val="3890829921"/>
-                  </a:ext>
-                </a:extLst>
-              </a:tr>
-              <a:tr h="276225">
-                <a:tc>
-                  <a:txBody>
-                    <a:bodyPr/>
-                    <a:lstStyle/>
-                    <a:p>
-                      <a:r>
-                        <a:rPr lang="ru-RU" sz="1400" dirty="0" err="1">
-                          <a:effectLst/>
-                          <a:latin typeface="Times New Roman" panose="02020603050405020304" pitchFamily="18" charset="0"/>
-                          <a:cs typeface="Times New Roman" panose="02020603050405020304" pitchFamily="18" charset="0"/>
-                        </a:rPr>
-                        <a:t>new_members_count</a:t>
-                      </a:r>
-                      <a:endParaRPr lang="ru-RU" sz="1400" dirty="0">
-                        <a:effectLst/>
-                        <a:latin typeface="Times New Roman" panose="02020603050405020304" pitchFamily="18" charset="0"/>
-                        <a:ea typeface="Times New Roman" panose="02020603050405020304" pitchFamily="18" charset="0"/>
-                        <a:cs typeface="Times New Roman" panose="02020603050405020304" pitchFamily="18" charset="0"/>
-                      </a:endParaRPr>
-                    </a:p>
-                  </a:txBody>
-                  <a:tcPr marL="68580" marR="68580" marT="0" marB="0"/>
-                </a:tc>
-                <a:tc>
-                  <a:txBody>
-                    <a:bodyPr/>
-                    <a:lstStyle/>
-                    <a:p>
-                      <a:r>
-                        <a:rPr lang="ru-RU" sz="1400">
-                          <a:effectLst/>
-                          <a:latin typeface="Times New Roman" panose="02020603050405020304" pitchFamily="18" charset="0"/>
-                          <a:cs typeface="Times New Roman" panose="02020603050405020304" pitchFamily="18" charset="0"/>
-                        </a:rPr>
-                        <a:t>Число</a:t>
-                      </a:r>
-                      <a:endParaRPr lang="ru-RU" sz="1400">
-                        <a:effectLst/>
-                        <a:latin typeface="Times New Roman" panose="02020603050405020304" pitchFamily="18" charset="0"/>
-                        <a:ea typeface="Times New Roman" panose="02020603050405020304" pitchFamily="18" charset="0"/>
-                        <a:cs typeface="Times New Roman" panose="02020603050405020304" pitchFamily="18" charset="0"/>
-                      </a:endParaRPr>
-                    </a:p>
-                  </a:txBody>
-                  <a:tcPr marL="68580" marR="68580" marT="0" marB="0"/>
-                </a:tc>
-                <a:tc>
-                  <a:txBody>
-                    <a:bodyPr/>
-                    <a:lstStyle/>
-                    <a:p>
-                      <a:r>
-                        <a:rPr lang="ru-RU" sz="1400">
-                          <a:effectLst/>
-                          <a:latin typeface="Times New Roman" panose="02020603050405020304" pitchFamily="18" charset="0"/>
-                          <a:cs typeface="Times New Roman" panose="02020603050405020304" pitchFamily="18" charset="0"/>
-                        </a:rPr>
-                        <a:t>Количество новых участников репозитория</a:t>
-                      </a:r>
-                      <a:endParaRPr lang="ru-RU" sz="1400">
-                        <a:effectLst/>
-                        <a:latin typeface="Times New Roman" panose="02020603050405020304" pitchFamily="18" charset="0"/>
-                        <a:ea typeface="Times New Roman" panose="02020603050405020304" pitchFamily="18" charset="0"/>
-                        <a:cs typeface="Times New Roman" panose="02020603050405020304" pitchFamily="18" charset="0"/>
-                      </a:endParaRPr>
-                    </a:p>
-                  </a:txBody>
-                  <a:tcPr marL="68580" marR="68580" marT="0" marB="0"/>
-                </a:tc>
-                <a:extLst>
-                  <a:ext uri="{0D108BD9-81ED-4DB2-BD59-A6C34878D82A}">
-                    <a16:rowId xmlns:a16="http://schemas.microsoft.com/office/drawing/2014/main" val="1755832373"/>
-                  </a:ext>
-                </a:extLst>
-              </a:tr>
-              <a:tr h="0">
-                <a:tc>
-                  <a:txBody>
-                    <a:bodyPr/>
-                    <a:lstStyle/>
-                    <a:p>
-                      <a:r>
-                        <a:rPr lang="ru-RU" sz="1400" dirty="0" err="1">
-                          <a:effectLst/>
-                          <a:latin typeface="Times New Roman" panose="02020603050405020304" pitchFamily="18" charset="0"/>
-                          <a:cs typeface="Times New Roman" panose="02020603050405020304" pitchFamily="18" charset="0"/>
-                        </a:rPr>
-                        <a:t>closed_issues_ratio</a:t>
-                      </a:r>
-                      <a:endParaRPr lang="ru-RU" sz="1400" dirty="0">
-                        <a:effectLst/>
-                        <a:latin typeface="Times New Roman" panose="02020603050405020304" pitchFamily="18" charset="0"/>
-                        <a:ea typeface="Times New Roman" panose="02020603050405020304" pitchFamily="18" charset="0"/>
-                        <a:cs typeface="Times New Roman" panose="02020603050405020304" pitchFamily="18" charset="0"/>
-                      </a:endParaRPr>
-                    </a:p>
-                  </a:txBody>
-                  <a:tcPr marL="68580" marR="68580" marT="0" marB="0"/>
-                </a:tc>
-                <a:tc>
-                  <a:txBody>
-                    <a:bodyPr/>
-                    <a:lstStyle/>
-                    <a:p>
-                      <a:r>
-                        <a:rPr lang="ru-RU" sz="1400" dirty="0">
-                          <a:effectLst/>
-                          <a:latin typeface="Times New Roman" panose="02020603050405020304" pitchFamily="18" charset="0"/>
-                          <a:cs typeface="Times New Roman" panose="02020603050405020304" pitchFamily="18" charset="0"/>
-                        </a:rPr>
-                        <a:t>Число</a:t>
-                      </a:r>
-                      <a:endParaRPr lang="ru-RU" sz="1400" dirty="0">
-                        <a:effectLst/>
-                        <a:latin typeface="Times New Roman" panose="02020603050405020304" pitchFamily="18" charset="0"/>
-                        <a:ea typeface="Times New Roman" panose="02020603050405020304" pitchFamily="18" charset="0"/>
-                        <a:cs typeface="Times New Roman" panose="02020603050405020304" pitchFamily="18" charset="0"/>
-                      </a:endParaRPr>
-                    </a:p>
-                  </a:txBody>
-                  <a:tcPr marL="68580" marR="68580" marT="0" marB="0"/>
-                </a:tc>
-                <a:tc>
-                  <a:txBody>
-                    <a:bodyPr/>
-                    <a:lstStyle/>
-                    <a:p>
-                      <a:r>
-                        <a:rPr lang="ru-RU" sz="1400" dirty="0">
-                          <a:effectLst/>
-                          <a:latin typeface="Times New Roman" panose="02020603050405020304" pitchFamily="18" charset="0"/>
-                          <a:cs typeface="Times New Roman" panose="02020603050405020304" pitchFamily="18" charset="0"/>
-                        </a:rPr>
-                        <a:t>Отношение успешно закрытых вопросов или проблем (</a:t>
-                      </a:r>
-                      <a:r>
-                        <a:rPr lang="ru-RU" sz="1400" dirty="0" err="1">
-                          <a:effectLst/>
-                          <a:latin typeface="Times New Roman" panose="02020603050405020304" pitchFamily="18" charset="0"/>
-                          <a:cs typeface="Times New Roman" panose="02020603050405020304" pitchFamily="18" charset="0"/>
-                        </a:rPr>
-                        <a:t>issues</a:t>
-                      </a:r>
-                      <a:r>
-                        <a:rPr lang="ru-RU" sz="1400" dirty="0">
-                          <a:effectLst/>
-                          <a:latin typeface="Times New Roman" panose="02020603050405020304" pitchFamily="18" charset="0"/>
-                          <a:cs typeface="Times New Roman" panose="02020603050405020304" pitchFamily="18" charset="0"/>
-                        </a:rPr>
-                        <a:t>) к общему числу таких вопросов</a:t>
-                      </a:r>
-                      <a:endParaRPr lang="ru-RU" sz="1400" dirty="0">
-                        <a:effectLst/>
-                        <a:latin typeface="Times New Roman" panose="02020603050405020304" pitchFamily="18" charset="0"/>
-                        <a:ea typeface="Times New Roman" panose="02020603050405020304" pitchFamily="18" charset="0"/>
-                        <a:cs typeface="Times New Roman" panose="02020603050405020304" pitchFamily="18" charset="0"/>
-                      </a:endParaRPr>
-                    </a:p>
-                  </a:txBody>
-                  <a:tcPr marL="68580" marR="68580" marT="0" marB="0"/>
-                </a:tc>
-                <a:extLst>
-                  <a:ext uri="{0D108BD9-81ED-4DB2-BD59-A6C34878D82A}">
-                    <a16:rowId xmlns:a16="http://schemas.microsoft.com/office/drawing/2014/main" val="199243005"/>
-                  </a:ext>
-                </a:extLst>
-              </a:tr>
-              <a:tr h="0">
-                <a:tc>
-                  <a:txBody>
-                    <a:bodyPr/>
-                    <a:lstStyle/>
-                    <a:p>
-                      <a:r>
-                        <a:rPr lang="ru-RU" sz="1400">
-                          <a:effectLst/>
-                          <a:latin typeface="Times New Roman" panose="02020603050405020304" pitchFamily="18" charset="0"/>
-                          <a:cs typeface="Times New Roman" panose="02020603050405020304" pitchFamily="18" charset="0"/>
-                        </a:rPr>
-                        <a:t>watches</a:t>
-                      </a:r>
-                      <a:endParaRPr lang="ru-RU" sz="1400">
-                        <a:effectLst/>
-                        <a:latin typeface="Times New Roman" panose="02020603050405020304" pitchFamily="18" charset="0"/>
-                        <a:ea typeface="Times New Roman" panose="02020603050405020304" pitchFamily="18" charset="0"/>
-                        <a:cs typeface="Times New Roman" panose="02020603050405020304" pitchFamily="18" charset="0"/>
-                      </a:endParaRPr>
-                    </a:p>
-                  </a:txBody>
-                  <a:tcPr marL="68580" marR="68580" marT="0" marB="0"/>
-                </a:tc>
-                <a:tc>
-                  <a:txBody>
-                    <a:bodyPr/>
-                    <a:lstStyle/>
-                    <a:p>
-                      <a:r>
-                        <a:rPr lang="ru-RU" sz="1400" dirty="0">
-                          <a:effectLst/>
-                          <a:latin typeface="Times New Roman" panose="02020603050405020304" pitchFamily="18" charset="0"/>
-                          <a:cs typeface="Times New Roman" panose="02020603050405020304" pitchFamily="18" charset="0"/>
-                        </a:rPr>
-                        <a:t>Число</a:t>
-                      </a:r>
-                      <a:endParaRPr lang="ru-RU" sz="1400" dirty="0">
-                        <a:effectLst/>
-                        <a:latin typeface="Times New Roman" panose="02020603050405020304" pitchFamily="18" charset="0"/>
-                        <a:ea typeface="Times New Roman" panose="02020603050405020304" pitchFamily="18" charset="0"/>
-                        <a:cs typeface="Times New Roman" panose="02020603050405020304" pitchFamily="18" charset="0"/>
-                      </a:endParaRPr>
-                    </a:p>
-                  </a:txBody>
-                  <a:tcPr marL="68580" marR="68580" marT="0" marB="0"/>
-                </a:tc>
-                <a:tc>
-                  <a:txBody>
-                    <a:bodyPr/>
-                    <a:lstStyle/>
-                    <a:p>
-                      <a:r>
-                        <a:rPr lang="ru-RU" sz="1400" dirty="0">
-                          <a:effectLst/>
-                          <a:latin typeface="Times New Roman" panose="02020603050405020304" pitchFamily="18" charset="0"/>
-                          <a:cs typeface="Times New Roman" panose="02020603050405020304" pitchFamily="18" charset="0"/>
-                        </a:rPr>
-                        <a:t>Количество пользователей, отслеживающих обновления репозитория</a:t>
-                      </a:r>
-                      <a:endParaRPr lang="ru-RU" sz="1400" dirty="0">
-                        <a:effectLst/>
-                        <a:latin typeface="Times New Roman" panose="02020603050405020304" pitchFamily="18" charset="0"/>
-                        <a:ea typeface="Times New Roman" panose="02020603050405020304" pitchFamily="18" charset="0"/>
-                        <a:cs typeface="Times New Roman" panose="02020603050405020304" pitchFamily="18" charset="0"/>
-                      </a:endParaRPr>
-                    </a:p>
-                  </a:txBody>
-                  <a:tcPr marL="68580" marR="68580" marT="0" marB="0"/>
-                </a:tc>
-                <a:extLst>
-                  <a:ext uri="{0D108BD9-81ED-4DB2-BD59-A6C34878D82A}">
-                    <a16:rowId xmlns:a16="http://schemas.microsoft.com/office/drawing/2014/main" val="1016787709"/>
-                  </a:ext>
-                </a:extLst>
-              </a:tr>
-              <a:tr h="274955">
-                <a:tc>
-                  <a:txBody>
-                    <a:bodyPr/>
-                    <a:lstStyle/>
-                    <a:p>
-                      <a:r>
-                        <a:rPr lang="ru-RU" sz="1400">
-                          <a:effectLst/>
-                          <a:latin typeface="Times New Roman" panose="02020603050405020304" pitchFamily="18" charset="0"/>
-                          <a:cs typeface="Times New Roman" panose="02020603050405020304" pitchFamily="18" charset="0"/>
-                        </a:rPr>
-                        <a:t>forks</a:t>
-                      </a:r>
-                      <a:endParaRPr lang="ru-RU" sz="1400">
-                        <a:effectLst/>
-                        <a:latin typeface="Times New Roman" panose="02020603050405020304" pitchFamily="18" charset="0"/>
-                        <a:ea typeface="Times New Roman" panose="02020603050405020304" pitchFamily="18" charset="0"/>
-                        <a:cs typeface="Times New Roman" panose="02020603050405020304" pitchFamily="18" charset="0"/>
-                      </a:endParaRPr>
-                    </a:p>
-                  </a:txBody>
-                  <a:tcPr marL="68580" marR="68580" marT="0" marB="0"/>
-                </a:tc>
-                <a:tc>
-                  <a:txBody>
-                    <a:bodyPr/>
-                    <a:lstStyle/>
-                    <a:p>
-                      <a:r>
-                        <a:rPr lang="ru-RU" sz="1400" dirty="0">
-                          <a:effectLst/>
-                          <a:latin typeface="Times New Roman" panose="02020603050405020304" pitchFamily="18" charset="0"/>
-                          <a:cs typeface="Times New Roman" panose="02020603050405020304" pitchFamily="18" charset="0"/>
-                        </a:rPr>
-                        <a:t>Число</a:t>
-                      </a:r>
-                      <a:endParaRPr lang="ru-RU" sz="1400" dirty="0">
-                        <a:effectLst/>
-                        <a:latin typeface="Times New Roman" panose="02020603050405020304" pitchFamily="18" charset="0"/>
-                        <a:ea typeface="Times New Roman" panose="02020603050405020304" pitchFamily="18" charset="0"/>
-                        <a:cs typeface="Times New Roman" panose="02020603050405020304" pitchFamily="18" charset="0"/>
-                      </a:endParaRPr>
-                    </a:p>
-                  </a:txBody>
-                  <a:tcPr marL="68580" marR="68580" marT="0" marB="0"/>
-                </a:tc>
-                <a:tc>
-                  <a:txBody>
-                    <a:bodyPr/>
-                    <a:lstStyle/>
-                    <a:p>
-                      <a:r>
-                        <a:rPr lang="ru-RU" sz="1400" dirty="0">
-                          <a:effectLst/>
-                          <a:latin typeface="Times New Roman" panose="02020603050405020304" pitchFamily="18" charset="0"/>
-                          <a:cs typeface="Times New Roman" panose="02020603050405020304" pitchFamily="18" charset="0"/>
-                        </a:rPr>
-                        <a:t>Количество ветвлений (</a:t>
-                      </a:r>
-                      <a:r>
-                        <a:rPr lang="ru-RU" sz="1400" dirty="0" err="1">
-                          <a:effectLst/>
-                          <a:latin typeface="Times New Roman" panose="02020603050405020304" pitchFamily="18" charset="0"/>
-                          <a:cs typeface="Times New Roman" panose="02020603050405020304" pitchFamily="18" charset="0"/>
-                        </a:rPr>
-                        <a:t>forks</a:t>
-                      </a:r>
-                      <a:r>
-                        <a:rPr lang="ru-RU" sz="1400" dirty="0">
-                          <a:effectLst/>
-                          <a:latin typeface="Times New Roman" panose="02020603050405020304" pitchFamily="18" charset="0"/>
-                          <a:cs typeface="Times New Roman" panose="02020603050405020304" pitchFamily="18" charset="0"/>
-                        </a:rPr>
-                        <a:t>) репозитория</a:t>
-                      </a:r>
-                      <a:endParaRPr lang="ru-RU" sz="1400" dirty="0">
-                        <a:effectLst/>
-                        <a:latin typeface="Times New Roman" panose="02020603050405020304" pitchFamily="18" charset="0"/>
-                        <a:ea typeface="Times New Roman" panose="02020603050405020304" pitchFamily="18" charset="0"/>
-                        <a:cs typeface="Times New Roman" panose="02020603050405020304" pitchFamily="18" charset="0"/>
-                      </a:endParaRPr>
-                    </a:p>
-                  </a:txBody>
-                  <a:tcPr marL="68580" marR="68580" marT="0" marB="0"/>
-                </a:tc>
-                <a:extLst>
-                  <a:ext uri="{0D108BD9-81ED-4DB2-BD59-A6C34878D82A}">
-                    <a16:rowId xmlns:a16="http://schemas.microsoft.com/office/drawing/2014/main" val="3449522417"/>
-                  </a:ext>
-                </a:extLst>
-              </a:tr>
-              <a:tr h="0">
-                <a:tc>
-                  <a:txBody>
-                    <a:bodyPr/>
-                    <a:lstStyle/>
-                    <a:p>
-                      <a:r>
-                        <a:rPr lang="ru-RU" sz="1400">
-                          <a:effectLst/>
-                          <a:latin typeface="Times New Roman" panose="02020603050405020304" pitchFamily="18" charset="0"/>
-                          <a:cs typeface="Times New Roman" panose="02020603050405020304" pitchFamily="18" charset="0"/>
-                        </a:rPr>
-                        <a:t>language</a:t>
-                      </a:r>
-                      <a:endParaRPr lang="ru-RU" sz="1400">
-                        <a:effectLst/>
-                        <a:latin typeface="Times New Roman" panose="02020603050405020304" pitchFamily="18" charset="0"/>
-                        <a:ea typeface="Times New Roman" panose="02020603050405020304" pitchFamily="18" charset="0"/>
-                        <a:cs typeface="Times New Roman" panose="02020603050405020304" pitchFamily="18" charset="0"/>
-                      </a:endParaRPr>
-                    </a:p>
-                  </a:txBody>
-                  <a:tcPr marL="68580" marR="68580" marT="0" marB="0"/>
-                </a:tc>
-                <a:tc>
-                  <a:txBody>
-                    <a:bodyPr/>
-                    <a:lstStyle/>
-                    <a:p>
-                      <a:r>
-                        <a:rPr lang="ru-RU" sz="1400" dirty="0">
-                          <a:effectLst/>
-                          <a:latin typeface="Times New Roman" panose="02020603050405020304" pitchFamily="18" charset="0"/>
-                          <a:cs typeface="Times New Roman" panose="02020603050405020304" pitchFamily="18" charset="0"/>
-                        </a:rPr>
-                        <a:t>Строка</a:t>
-                      </a:r>
-                      <a:endParaRPr lang="ru-RU" sz="1400" dirty="0">
-                        <a:effectLst/>
-                        <a:latin typeface="Times New Roman" panose="02020603050405020304" pitchFamily="18" charset="0"/>
-                        <a:ea typeface="Times New Roman" panose="02020603050405020304" pitchFamily="18" charset="0"/>
-                        <a:cs typeface="Times New Roman" panose="02020603050405020304" pitchFamily="18" charset="0"/>
-                      </a:endParaRPr>
-                    </a:p>
-                  </a:txBody>
-                  <a:tcPr marL="68580" marR="68580" marT="0" marB="0"/>
-                </a:tc>
-                <a:tc>
-                  <a:txBody>
-                    <a:bodyPr/>
-                    <a:lstStyle/>
-                    <a:p>
-                      <a:r>
-                        <a:rPr lang="ru-RU" sz="1400" dirty="0">
-                          <a:effectLst/>
-                          <a:latin typeface="Times New Roman" panose="02020603050405020304" pitchFamily="18" charset="0"/>
-                          <a:cs typeface="Times New Roman" panose="02020603050405020304" pitchFamily="18" charset="0"/>
-                        </a:rPr>
-                        <a:t>Язык программирования, на котором написан код в репозитории</a:t>
-                      </a:r>
-                      <a:endParaRPr lang="ru-RU" sz="1400" dirty="0">
-                        <a:effectLst/>
-                        <a:latin typeface="Times New Roman" panose="02020603050405020304" pitchFamily="18" charset="0"/>
-                        <a:ea typeface="Times New Roman" panose="02020603050405020304" pitchFamily="18" charset="0"/>
-                        <a:cs typeface="Times New Roman" panose="02020603050405020304" pitchFamily="18" charset="0"/>
-                      </a:endParaRPr>
-                    </a:p>
-                  </a:txBody>
-                  <a:tcPr marL="68580" marR="68580" marT="0" marB="0"/>
-                </a:tc>
-                <a:extLst>
-                  <a:ext uri="{0D108BD9-81ED-4DB2-BD59-A6C34878D82A}">
-                    <a16:rowId xmlns:a16="http://schemas.microsoft.com/office/drawing/2014/main" val="2965922709"/>
-                  </a:ext>
-                </a:extLst>
-              </a:tr>
-              <a:tr h="0">
-                <a:tc>
-                  <a:txBody>
-                    <a:bodyPr/>
-                    <a:lstStyle/>
-                    <a:p>
-                      <a:r>
-                        <a:rPr lang="ru-RU" sz="1400">
-                          <a:effectLst/>
-                          <a:latin typeface="Times New Roman" panose="02020603050405020304" pitchFamily="18" charset="0"/>
-                          <a:cs typeface="Times New Roman" panose="02020603050405020304" pitchFamily="18" charset="0"/>
-                        </a:rPr>
-                        <a:t>license_name</a:t>
-                      </a:r>
-                      <a:endParaRPr lang="ru-RU" sz="1400">
-                        <a:effectLst/>
-                        <a:latin typeface="Times New Roman" panose="02020603050405020304" pitchFamily="18" charset="0"/>
-                        <a:ea typeface="Times New Roman" panose="02020603050405020304" pitchFamily="18" charset="0"/>
-                        <a:cs typeface="Times New Roman" panose="02020603050405020304" pitchFamily="18" charset="0"/>
-                      </a:endParaRPr>
-                    </a:p>
-                  </a:txBody>
-                  <a:tcPr marL="68580" marR="68580" marT="0" marB="0"/>
-                </a:tc>
-                <a:tc>
-                  <a:txBody>
-                    <a:bodyPr/>
-                    <a:lstStyle/>
-                    <a:p>
-                      <a:r>
-                        <a:rPr lang="ru-RU" sz="1400" dirty="0">
-                          <a:effectLst/>
-                          <a:latin typeface="Times New Roman" panose="02020603050405020304" pitchFamily="18" charset="0"/>
-                          <a:cs typeface="Times New Roman" panose="02020603050405020304" pitchFamily="18" charset="0"/>
-                        </a:rPr>
-                        <a:t>Строка</a:t>
-                      </a:r>
-                      <a:endParaRPr lang="ru-RU" sz="1400" dirty="0">
-                        <a:effectLst/>
-                        <a:latin typeface="Times New Roman" panose="02020603050405020304" pitchFamily="18" charset="0"/>
-                        <a:ea typeface="Times New Roman" panose="02020603050405020304" pitchFamily="18" charset="0"/>
-                        <a:cs typeface="Times New Roman" panose="02020603050405020304" pitchFamily="18" charset="0"/>
-                      </a:endParaRPr>
-                    </a:p>
-                  </a:txBody>
-                  <a:tcPr marL="68580" marR="68580" marT="0" marB="0"/>
-                </a:tc>
-                <a:tc>
-                  <a:txBody>
-                    <a:bodyPr/>
-                    <a:lstStyle/>
-                    <a:p>
-                      <a:r>
-                        <a:rPr lang="ru-RU" sz="1400" dirty="0">
-                          <a:effectLst/>
-                          <a:latin typeface="Times New Roman" panose="02020603050405020304" pitchFamily="18" charset="0"/>
-                          <a:cs typeface="Times New Roman" panose="02020603050405020304" pitchFamily="18" charset="0"/>
-                        </a:rPr>
-                        <a:t>Название лицензии, под которой распространяется код в репозитории</a:t>
-                      </a:r>
-                      <a:endParaRPr lang="ru-RU" sz="1400" dirty="0">
-                        <a:effectLst/>
-                        <a:latin typeface="Times New Roman" panose="02020603050405020304" pitchFamily="18" charset="0"/>
-                        <a:ea typeface="Times New Roman" panose="02020603050405020304" pitchFamily="18" charset="0"/>
-                        <a:cs typeface="Times New Roman" panose="02020603050405020304" pitchFamily="18" charset="0"/>
-                      </a:endParaRPr>
-                    </a:p>
-                  </a:txBody>
-                  <a:tcPr marL="68580" marR="68580" marT="0" marB="0"/>
-                </a:tc>
-                <a:extLst>
-                  <a:ext uri="{0D108BD9-81ED-4DB2-BD59-A6C34878D82A}">
-                    <a16:rowId xmlns:a16="http://schemas.microsoft.com/office/drawing/2014/main" val="1559159964"/>
-                  </a:ext>
-                </a:extLst>
-              </a:tr>
-              <a:tr h="0">
-                <a:tc>
-                  <a:txBody>
-                    <a:bodyPr/>
-                    <a:lstStyle/>
-                    <a:p>
-                      <a:r>
-                        <a:rPr lang="ru-RU" sz="1400">
-                          <a:effectLst/>
-                          <a:latin typeface="Times New Roman" panose="02020603050405020304" pitchFamily="18" charset="0"/>
-                          <a:cs typeface="Times New Roman" panose="02020603050405020304" pitchFamily="18" charset="0"/>
-                        </a:rPr>
-                        <a:t>is_deleted_or_private</a:t>
-                      </a:r>
-                      <a:endParaRPr lang="ru-RU" sz="1400">
-                        <a:effectLst/>
-                        <a:latin typeface="Times New Roman" panose="02020603050405020304" pitchFamily="18" charset="0"/>
-                        <a:ea typeface="Times New Roman" panose="02020603050405020304" pitchFamily="18" charset="0"/>
-                        <a:cs typeface="Times New Roman" panose="02020603050405020304" pitchFamily="18" charset="0"/>
-                      </a:endParaRPr>
-                    </a:p>
-                  </a:txBody>
-                  <a:tcPr marL="68580" marR="68580" marT="0" marB="0"/>
-                </a:tc>
-                <a:tc>
-                  <a:txBody>
-                    <a:bodyPr/>
-                    <a:lstStyle/>
-                    <a:p>
-                      <a:r>
-                        <a:rPr lang="ru-RU" sz="1400" dirty="0">
-                          <a:effectLst/>
-                          <a:latin typeface="Times New Roman" panose="02020603050405020304" pitchFamily="18" charset="0"/>
-                          <a:cs typeface="Times New Roman" panose="02020603050405020304" pitchFamily="18" charset="0"/>
-                        </a:rPr>
-                        <a:t>Булево</a:t>
-                      </a:r>
-                      <a:endParaRPr lang="ru-RU" sz="1400" dirty="0">
-                        <a:effectLst/>
-                        <a:latin typeface="Times New Roman" panose="02020603050405020304" pitchFamily="18" charset="0"/>
-                        <a:ea typeface="Times New Roman" panose="02020603050405020304" pitchFamily="18" charset="0"/>
-                        <a:cs typeface="Times New Roman" panose="02020603050405020304" pitchFamily="18" charset="0"/>
-                      </a:endParaRPr>
-                    </a:p>
-                  </a:txBody>
-                  <a:tcPr marL="68580" marR="68580" marT="0" marB="0"/>
-                </a:tc>
-                <a:tc>
-                  <a:txBody>
-                    <a:bodyPr/>
-                    <a:lstStyle/>
-                    <a:p>
-                      <a:r>
-                        <a:rPr lang="ru-RU" sz="1400" dirty="0">
-                          <a:effectLst/>
-                          <a:latin typeface="Times New Roman" panose="02020603050405020304" pitchFamily="18" charset="0"/>
-                          <a:cs typeface="Times New Roman" panose="02020603050405020304" pitchFamily="18" charset="0"/>
-                        </a:rPr>
-                        <a:t>Индикатор, указывающий, удален репозиторий или является ли он приватным</a:t>
-                      </a:r>
-                      <a:endParaRPr lang="ru-RU" sz="1400" dirty="0">
-                        <a:effectLst/>
-                        <a:latin typeface="Times New Roman" panose="02020603050405020304" pitchFamily="18" charset="0"/>
-                        <a:ea typeface="Times New Roman" panose="02020603050405020304" pitchFamily="18" charset="0"/>
-                        <a:cs typeface="Times New Roman" panose="02020603050405020304" pitchFamily="18" charset="0"/>
-                      </a:endParaRPr>
-                    </a:p>
-                  </a:txBody>
-                  <a:tcPr marL="68580" marR="68580" marT="0" marB="0"/>
-                </a:tc>
-                <a:extLst>
-                  <a:ext uri="{0D108BD9-81ED-4DB2-BD59-A6C34878D82A}">
-                    <a16:rowId xmlns:a16="http://schemas.microsoft.com/office/drawing/2014/main" val="895075867"/>
-                  </a:ext>
-                </a:extLst>
-              </a:tr>
-            </a:tbl>
-          </a:graphicData>
-        </a:graphic>
-      </p:graphicFrame>
-      <p:sp>
-        <p:nvSpPr>
-          <p:cNvPr id="9" name="TextBox 8">
-            <a:extLst>
-              <a:ext uri="{FF2B5EF4-FFF2-40B4-BE49-F238E27FC236}">
-                <a16:creationId xmlns:a16="http://schemas.microsoft.com/office/drawing/2014/main" id="{536328AF-06C6-9624-8276-E3DA5DD89AE1}"/>
-              </a:ext>
-            </a:extLst>
-          </p:cNvPr>
-          <p:cNvSpPr txBox="1"/>
-          <p:nvPr/>
-        </p:nvSpPr>
-        <p:spPr>
-          <a:xfrm>
-            <a:off x="0" y="0"/>
-            <a:ext cx="12192000" cy="523220"/>
-          </a:xfrm>
-          <a:prstGeom prst="rect">
-            <a:avLst/>
-          </a:prstGeom>
-          <a:noFill/>
-        </p:spPr>
-        <p:txBody>
-          <a:bodyPr wrap="square">
-            <a:spAutoFit/>
-          </a:bodyPr>
-          <a:lstStyle/>
-          <a:p>
-            <a:pPr algn="ctr"/>
-            <a:r>
-              <a:rPr lang="ru-RU" sz="2800" b="1" dirty="0">
-                <a:latin typeface="Times New Roman" panose="02020603050405020304" pitchFamily="18" charset="0"/>
-                <a:cs typeface="Times New Roman" panose="02020603050405020304" pitchFamily="18" charset="0"/>
-              </a:rPr>
-              <a:t>СОСТАВ ТРАНЗАКЦИИ</a:t>
-            </a:r>
-          </a:p>
-        </p:txBody>
-      </p:sp>
-      <p:sp>
-        <p:nvSpPr>
-          <p:cNvPr id="10" name="Footer Placeholder 9">
-            <a:extLst>
-              <a:ext uri="{FF2B5EF4-FFF2-40B4-BE49-F238E27FC236}">
-                <a16:creationId xmlns:a16="http://schemas.microsoft.com/office/drawing/2014/main" id="{4209F32A-4ECF-C331-C576-6B2BAA968566}"/>
-              </a:ext>
-            </a:extLst>
-          </p:cNvPr>
-          <p:cNvSpPr>
-            <a:spLocks noGrp="1"/>
-          </p:cNvSpPr>
-          <p:nvPr>
-            <p:ph type="ftr" sz="quarter" idx="11"/>
-          </p:nvPr>
-        </p:nvSpPr>
-        <p:spPr/>
-        <p:txBody>
-          <a:bodyPr/>
-          <a:lstStyle/>
-          <a:p>
-            <a:r>
-              <a:rPr lang="ru-RU"/>
-              <a:t>Система поиска шаблонов в данных GitHub</a:t>
-            </a:r>
-            <a:endParaRPr lang="ru-RU" dirty="0"/>
-          </a:p>
-        </p:txBody>
-      </p:sp>
-      <p:sp>
-        <p:nvSpPr>
-          <p:cNvPr id="2" name="Slide Number Placeholder 1">
-            <a:extLst>
-              <a:ext uri="{FF2B5EF4-FFF2-40B4-BE49-F238E27FC236}">
-                <a16:creationId xmlns:a16="http://schemas.microsoft.com/office/drawing/2014/main" id="{08D6E7C9-78EA-0D85-48B9-878386FA4875}"/>
-              </a:ext>
-            </a:extLst>
-          </p:cNvPr>
-          <p:cNvSpPr>
-            <a:spLocks noGrp="1"/>
-          </p:cNvSpPr>
-          <p:nvPr>
-            <p:ph type="sldNum" sz="quarter" idx="12"/>
-          </p:nvPr>
-        </p:nvSpPr>
-        <p:spPr/>
-        <p:txBody>
-          <a:bodyPr/>
-          <a:lstStyle/>
-          <a:p>
-            <a:fld id="{7EC09024-2147-4C4E-87D2-FF66EAF91B1A}" type="slidenum">
-              <a:rPr lang="ru-RU" smtClean="0"/>
-              <a:pPr/>
-              <a:t>12</a:t>
-            </a:fld>
-            <a:r>
-              <a:rPr lang="ru-RU" dirty="0"/>
-              <a:t>/21</a:t>
-            </a:r>
-          </a:p>
-        </p:txBody>
-      </p:sp>
-    </p:spTree>
-    <p:extLst>
-      <p:ext uri="{BB962C8B-B14F-4D97-AF65-F5344CB8AC3E}">
-        <p14:creationId xmlns:p14="http://schemas.microsoft.com/office/powerpoint/2010/main" val="3626478721"/>
-      </p:ext>
-    </p:extLst>
-  </p:cSld>
-  <p:clrMapOvr>
-    <a:masterClrMapping/>
-  </p:clrMapOvr>
-</p:sld>
-</file>
-
-<file path=ppt/slides/slide13.xml><?xml version="1.0" encoding="utf-8"?>
-<p:sld xmlns:a="http://schemas.openxmlformats.org/drawingml/2006/main" xmlns:r="http://schemas.openxmlformats.org/officeDocument/2006/relationships" xmlns:p="http://schemas.openxmlformats.org/presentationml/2006/main">
-  <p:cSld>
-    <p:spTree>
-      <p:nvGrpSpPr>
-        <p:cNvPr id="1" name=""/>
-        <p:cNvGrpSpPr/>
-        <p:nvPr/>
-      </p:nvGrpSpPr>
-      <p:grpSpPr>
-        <a:xfrm>
-          <a:off x="0" y="0"/>
-          <a:ext cx="0" cy="0"/>
-          <a:chOff x="0" y="0"/>
-          <a:chExt cx="0" cy="0"/>
-        </a:xfrm>
-      </p:grpSpPr>
-      <p:sp>
-        <p:nvSpPr>
-          <p:cNvPr id="3" name="TextBox 2">
-            <a:extLst>
-              <a:ext uri="{FF2B5EF4-FFF2-40B4-BE49-F238E27FC236}">
-                <a16:creationId xmlns:a16="http://schemas.microsoft.com/office/drawing/2014/main" id="{100B25DD-8CC4-48A0-A45C-A43464AB841D}"/>
-              </a:ext>
-            </a:extLst>
-          </p:cNvPr>
-          <p:cNvSpPr txBox="1"/>
-          <p:nvPr/>
-        </p:nvSpPr>
-        <p:spPr>
-          <a:xfrm>
-            <a:off x="0" y="0"/>
-            <a:ext cx="12192000" cy="523220"/>
-          </a:xfrm>
-          <a:prstGeom prst="rect">
-            <a:avLst/>
-          </a:prstGeom>
-          <a:noFill/>
-        </p:spPr>
-        <p:txBody>
-          <a:bodyPr wrap="square">
-            <a:spAutoFit/>
-          </a:bodyPr>
-          <a:lstStyle/>
-          <a:p>
-            <a:pPr algn="ctr"/>
-            <a:r>
-              <a:rPr lang="ru-RU" sz="2800" b="1" dirty="0">
-                <a:latin typeface="Times New Roman" panose="02020603050405020304" pitchFamily="18" charset="0"/>
-                <a:cs typeface="Times New Roman" panose="02020603050405020304" pitchFamily="18" charset="0"/>
-              </a:rPr>
-              <a:t>СРЕДСТВА РАЗРАБОТКИ</a:t>
-            </a:r>
-          </a:p>
-        </p:txBody>
-      </p:sp>
-      <p:sp>
-        <p:nvSpPr>
-          <p:cNvPr id="7" name="TextBox 6">
-            <a:extLst>
-              <a:ext uri="{FF2B5EF4-FFF2-40B4-BE49-F238E27FC236}">
-                <a16:creationId xmlns:a16="http://schemas.microsoft.com/office/drawing/2014/main" id="{BE24D6F0-2BBA-4957-AFC5-93A7AC6BA1FC}"/>
-              </a:ext>
-            </a:extLst>
-          </p:cNvPr>
-          <p:cNvSpPr txBox="1"/>
-          <p:nvPr/>
-        </p:nvSpPr>
-        <p:spPr>
-          <a:xfrm>
-            <a:off x="497540" y="676088"/>
-            <a:ext cx="11053483" cy="661207"/>
-          </a:xfrm>
-          <a:prstGeom prst="rect">
-            <a:avLst/>
-          </a:prstGeom>
-          <a:noFill/>
-        </p:spPr>
-        <p:txBody>
-          <a:bodyPr wrap="square" rtlCol="0">
-            <a:spAutoFit/>
-          </a:bodyPr>
-          <a:lstStyle/>
-          <a:p>
-            <a:pPr algn="just">
-              <a:lnSpc>
-                <a:spcPct val="150000"/>
-              </a:lnSpc>
-            </a:pPr>
-            <a:r>
-              <a:rPr lang="ru-RU" sz="2800" b="1" dirty="0">
-                <a:latin typeface="Times New Roman" panose="02020603050405020304" pitchFamily="18" charset="0"/>
-                <a:cs typeface="Times New Roman" panose="02020603050405020304" pitchFamily="18" charset="0"/>
-              </a:rPr>
-              <a:t>Язык программирования: </a:t>
-            </a:r>
-            <a:r>
-              <a:rPr lang="en-US" sz="2800" dirty="0">
-                <a:latin typeface="Times New Roman" panose="02020603050405020304" pitchFamily="18" charset="0"/>
-                <a:cs typeface="Times New Roman" panose="02020603050405020304" pitchFamily="18" charset="0"/>
-              </a:rPr>
-              <a:t>Python 3.11.7</a:t>
-            </a:r>
-            <a:endParaRPr lang="ru-RU" sz="2800" dirty="0">
-              <a:latin typeface="Times New Roman" panose="02020603050405020304" pitchFamily="18" charset="0"/>
-              <a:cs typeface="Times New Roman" panose="02020603050405020304" pitchFamily="18" charset="0"/>
-            </a:endParaRPr>
-          </a:p>
-        </p:txBody>
-      </p:sp>
-      <p:sp>
-        <p:nvSpPr>
-          <p:cNvPr id="8" name="TextBox 7">
-            <a:extLst>
-              <a:ext uri="{FF2B5EF4-FFF2-40B4-BE49-F238E27FC236}">
-                <a16:creationId xmlns:a16="http://schemas.microsoft.com/office/drawing/2014/main" id="{81517F12-9988-40E4-9947-B94A9D063E28}"/>
-              </a:ext>
-            </a:extLst>
-          </p:cNvPr>
-          <p:cNvSpPr txBox="1"/>
-          <p:nvPr/>
-        </p:nvSpPr>
-        <p:spPr>
-          <a:xfrm>
-            <a:off x="497540" y="1628507"/>
-            <a:ext cx="2315697" cy="523220"/>
-          </a:xfrm>
-          <a:prstGeom prst="rect">
-            <a:avLst/>
-          </a:prstGeom>
-          <a:noFill/>
-        </p:spPr>
-        <p:txBody>
-          <a:bodyPr wrap="square" rtlCol="0">
-            <a:spAutoFit/>
-          </a:bodyPr>
-          <a:lstStyle/>
-          <a:p>
-            <a:pPr algn="just"/>
-            <a:r>
-              <a:rPr lang="ru-RU" sz="2800" b="1" dirty="0">
-                <a:latin typeface="Times New Roman" panose="02020603050405020304" pitchFamily="18" charset="0"/>
-                <a:cs typeface="Times New Roman" panose="02020603050405020304" pitchFamily="18" charset="0"/>
-              </a:rPr>
-              <a:t>Библиотеки:</a:t>
-            </a:r>
-            <a:endParaRPr lang="en-US" sz="2800" dirty="0">
-              <a:latin typeface="Times New Roman" panose="02020603050405020304" pitchFamily="18" charset="0"/>
-              <a:cs typeface="Times New Roman" panose="02020603050405020304" pitchFamily="18" charset="0"/>
-            </a:endParaRPr>
-          </a:p>
-        </p:txBody>
-      </p:sp>
-      <p:graphicFrame>
-        <p:nvGraphicFramePr>
-          <p:cNvPr id="10" name="Таблица 10">
-            <a:extLst>
-              <a:ext uri="{FF2B5EF4-FFF2-40B4-BE49-F238E27FC236}">
-                <a16:creationId xmlns:a16="http://schemas.microsoft.com/office/drawing/2014/main" id="{B3DC80B2-F4E9-4C8D-8012-A196D51CEBFE}"/>
-              </a:ext>
-            </a:extLst>
-          </p:cNvPr>
-          <p:cNvGraphicFramePr>
-            <a:graphicFrameLocks noGrp="1"/>
-          </p:cNvGraphicFramePr>
-          <p:nvPr>
-            <p:extLst>
-              <p:ext uri="{D42A27DB-BD31-4B8C-83A1-F6EECF244321}">
-                <p14:modId xmlns:p14="http://schemas.microsoft.com/office/powerpoint/2010/main" val="1550775521"/>
-              </p:ext>
-            </p:extLst>
-          </p:nvPr>
-        </p:nvGraphicFramePr>
-        <p:xfrm>
-          <a:off x="497540" y="2300843"/>
-          <a:ext cx="11264154" cy="4096668"/>
-        </p:xfrm>
-        <a:graphic>
-          <a:graphicData uri="http://schemas.openxmlformats.org/drawingml/2006/table">
-            <a:tbl>
-              <a:tblPr firstRow="1" bandRow="1">
-                <a:tableStyleId>{5940675A-B579-460E-94D1-54222C63F5DA}</a:tableStyleId>
-              </a:tblPr>
-              <a:tblGrid>
-                <a:gridCol w="2523566">
-                  <a:extLst>
-                    <a:ext uri="{9D8B030D-6E8A-4147-A177-3AD203B41FA5}">
-                      <a16:colId xmlns:a16="http://schemas.microsoft.com/office/drawing/2014/main" val="1253534247"/>
-                    </a:ext>
-                  </a:extLst>
-                </a:gridCol>
-                <a:gridCol w="3087627">
-                  <a:extLst>
-                    <a:ext uri="{9D8B030D-6E8A-4147-A177-3AD203B41FA5}">
-                      <a16:colId xmlns:a16="http://schemas.microsoft.com/office/drawing/2014/main" val="4231175743"/>
-                    </a:ext>
-                  </a:extLst>
-                </a:gridCol>
-                <a:gridCol w="2784711">
-                  <a:extLst>
-                    <a:ext uri="{9D8B030D-6E8A-4147-A177-3AD203B41FA5}">
-                      <a16:colId xmlns:a16="http://schemas.microsoft.com/office/drawing/2014/main" val="2219686513"/>
-                    </a:ext>
-                  </a:extLst>
-                </a:gridCol>
-                <a:gridCol w="2868250">
-                  <a:extLst>
-                    <a:ext uri="{9D8B030D-6E8A-4147-A177-3AD203B41FA5}">
-                      <a16:colId xmlns:a16="http://schemas.microsoft.com/office/drawing/2014/main" val="2332371237"/>
-                    </a:ext>
-                  </a:extLst>
-                </a:gridCol>
-              </a:tblGrid>
-              <a:tr h="700546">
-                <a:tc>
-                  <a:txBody>
-                    <a:bodyPr/>
-                    <a:lstStyle/>
-                    <a:p>
-                      <a:pPr algn="ctr"/>
-                      <a:r>
-                        <a:rPr lang="ru-RU" sz="2800" dirty="0">
-                          <a:latin typeface="Times New Roman" panose="02020603050405020304" pitchFamily="18" charset="0"/>
-                          <a:cs typeface="Times New Roman" panose="02020603050405020304" pitchFamily="18" charset="0"/>
-                        </a:rPr>
-                        <a:t>Веб-интерфейс</a:t>
-                      </a:r>
-                    </a:p>
-                  </a:txBody>
-                  <a:tcPr/>
-                </a:tc>
-                <a:tc>
-                  <a:txBody>
-                    <a:bodyPr/>
-                    <a:lstStyle/>
-                    <a:p>
-                      <a:pPr algn="ctr"/>
-                      <a:r>
-                        <a:rPr lang="ru-RU" sz="2800" dirty="0">
-                          <a:latin typeface="Times New Roman" panose="02020603050405020304" pitchFamily="18" charset="0"/>
-                          <a:cs typeface="Times New Roman" panose="02020603050405020304" pitchFamily="18" charset="0"/>
-                        </a:rPr>
-                        <a:t>Запрос данных</a:t>
-                      </a:r>
-                    </a:p>
-                  </a:txBody>
-                  <a:tcPr/>
-                </a:tc>
-                <a:tc>
-                  <a:txBody>
-                    <a:bodyPr/>
-                    <a:lstStyle/>
-                    <a:p>
-                      <a:pPr algn="ctr"/>
-                      <a:r>
-                        <a:rPr lang="ru-RU" sz="2800" dirty="0">
-                          <a:latin typeface="Times New Roman" panose="02020603050405020304" pitchFamily="18" charset="0"/>
-                          <a:cs typeface="Times New Roman" panose="02020603050405020304" pitchFamily="18" charset="0"/>
-                        </a:rPr>
-                        <a:t>Хранение и преобразование</a:t>
-                      </a:r>
-                      <a:r>
-                        <a:rPr lang="ru-RU" sz="2800" baseline="0" dirty="0">
-                          <a:latin typeface="Times New Roman" panose="02020603050405020304" pitchFamily="18" charset="0"/>
-                          <a:cs typeface="Times New Roman" panose="02020603050405020304" pitchFamily="18" charset="0"/>
-                        </a:rPr>
-                        <a:t> данных</a:t>
-                      </a:r>
-                      <a:endParaRPr lang="ru-RU" sz="2800" dirty="0">
-                        <a:latin typeface="Times New Roman" panose="02020603050405020304" pitchFamily="18" charset="0"/>
-                        <a:cs typeface="Times New Roman" panose="02020603050405020304" pitchFamily="18" charset="0"/>
-                      </a:endParaRPr>
-                    </a:p>
-                  </a:txBody>
-                  <a:tcPr/>
-                </a:tc>
-                <a:tc>
-                  <a:txBody>
-                    <a:bodyPr/>
-                    <a:lstStyle/>
-                    <a:p>
-                      <a:pPr algn="ctr"/>
-                      <a:r>
-                        <a:rPr lang="ru-RU" sz="2800" dirty="0">
-                          <a:latin typeface="Times New Roman" panose="02020603050405020304" pitchFamily="18" charset="0"/>
-                          <a:cs typeface="Times New Roman" panose="02020603050405020304" pitchFamily="18" charset="0"/>
-                        </a:rPr>
-                        <a:t>Поиск шаблонов</a:t>
-                      </a:r>
-                    </a:p>
-                  </a:txBody>
-                  <a:tcPr/>
-                </a:tc>
-                <a:extLst>
-                  <a:ext uri="{0D108BD9-81ED-4DB2-BD59-A6C34878D82A}">
-                    <a16:rowId xmlns:a16="http://schemas.microsoft.com/office/drawing/2014/main" val="3025199985"/>
-                  </a:ext>
-                </a:extLst>
-              </a:tr>
-              <a:tr h="2725068">
-                <a:tc>
-                  <a:txBody>
-                    <a:bodyPr/>
-                    <a:lstStyle/>
-                    <a:p>
-                      <a:pPr marL="0" indent="0" algn="l">
-                        <a:lnSpc>
-                          <a:spcPct val="150000"/>
-                        </a:lnSpc>
-                        <a:buFont typeface="+mj-lt"/>
-                        <a:buNone/>
-                      </a:pPr>
-                      <a:r>
-                        <a:rPr lang="en-US" sz="2800" dirty="0">
-                          <a:latin typeface="Times New Roman" panose="02020603050405020304" pitchFamily="18" charset="0"/>
-                          <a:cs typeface="Times New Roman" panose="02020603050405020304" pitchFamily="18" charset="0"/>
-                        </a:rPr>
-                        <a:t>Django</a:t>
-                      </a:r>
-                      <a:endParaRPr lang="ru-RU" sz="2800" dirty="0">
-                        <a:latin typeface="Times New Roman" panose="02020603050405020304" pitchFamily="18" charset="0"/>
-                        <a:cs typeface="Times New Roman" panose="02020603050405020304" pitchFamily="18" charset="0"/>
-                      </a:endParaRPr>
-                    </a:p>
-                  </a:txBody>
-                  <a:tcPr/>
-                </a:tc>
-                <a:tc>
-                  <a:txBody>
-                    <a:bodyPr/>
-                    <a:lstStyle/>
-                    <a:p>
-                      <a:pPr marL="0" marR="0" lvl="0" indent="0" algn="l" defTabSz="914400" rtl="0" eaLnBrk="1" fontAlgn="auto" latinLnBrk="0" hangingPunct="1">
-                        <a:lnSpc>
-                          <a:spcPct val="150000"/>
-                        </a:lnSpc>
-                        <a:spcBef>
-                          <a:spcPts val="0"/>
-                        </a:spcBef>
-                        <a:spcAft>
-                          <a:spcPts val="0"/>
-                        </a:spcAft>
-                        <a:buClrTx/>
-                        <a:buSzTx/>
-                        <a:buFont typeface="+mj-lt"/>
-                        <a:buNone/>
-                        <a:tabLst/>
-                        <a:defRPr/>
-                      </a:pPr>
-                      <a:r>
-                        <a:rPr lang="ru-RU" sz="2800" dirty="0">
-                          <a:latin typeface="Times New Roman" panose="02020603050405020304" pitchFamily="18" charset="0"/>
-                          <a:cs typeface="Times New Roman" panose="02020603050405020304" pitchFamily="18" charset="0"/>
-                        </a:rPr>
-                        <a:t>А</a:t>
-                      </a:r>
-                      <a:r>
-                        <a:rPr lang="en-US" sz="2800" dirty="0" err="1">
-                          <a:latin typeface="Times New Roman" panose="02020603050405020304" pitchFamily="18" charset="0"/>
-                          <a:cs typeface="Times New Roman" panose="02020603050405020304" pitchFamily="18" charset="0"/>
-                        </a:rPr>
-                        <a:t>iohttp</a:t>
-                      </a:r>
-                      <a:endParaRPr lang="ru-RU" sz="2800" dirty="0">
-                        <a:latin typeface="Times New Roman" panose="02020603050405020304" pitchFamily="18" charset="0"/>
-                        <a:cs typeface="Times New Roman" panose="02020603050405020304" pitchFamily="18" charset="0"/>
-                      </a:endParaRPr>
-                    </a:p>
-                    <a:p>
-                      <a:pPr marL="0" marR="0" lvl="0" indent="0" algn="l" defTabSz="914400" rtl="0" eaLnBrk="1" fontAlgn="auto" latinLnBrk="0" hangingPunct="1">
-                        <a:lnSpc>
-                          <a:spcPct val="150000"/>
-                        </a:lnSpc>
-                        <a:spcBef>
-                          <a:spcPts val="0"/>
-                        </a:spcBef>
-                        <a:spcAft>
-                          <a:spcPts val="0"/>
-                        </a:spcAft>
-                        <a:buClrTx/>
-                        <a:buSzTx/>
-                        <a:buFont typeface="+mj-lt"/>
-                        <a:buNone/>
-                        <a:tabLst/>
-                        <a:defRPr/>
-                      </a:pPr>
-                      <a:r>
-                        <a:rPr lang="en-US" sz="2800" kern="1200" dirty="0" err="1">
-                          <a:solidFill>
-                            <a:schemeClr val="tx1"/>
-                          </a:solidFill>
-                          <a:effectLst/>
-                          <a:latin typeface="Times New Roman" panose="02020603050405020304" pitchFamily="18" charset="0"/>
-                          <a:ea typeface="+mn-ea"/>
-                          <a:cs typeface="Times New Roman" panose="02020603050405020304" pitchFamily="18" charset="0"/>
-                        </a:rPr>
-                        <a:t>Asyncio</a:t>
-                      </a:r>
-                      <a:endParaRPr lang="en-US" sz="2800" kern="1200" dirty="0">
-                        <a:solidFill>
-                          <a:schemeClr val="tx1"/>
-                        </a:solidFill>
-                        <a:effectLst/>
-                        <a:latin typeface="Times New Roman" panose="02020603050405020304" pitchFamily="18" charset="0"/>
-                        <a:ea typeface="+mn-ea"/>
-                        <a:cs typeface="Times New Roman" panose="02020603050405020304" pitchFamily="18" charset="0"/>
-                      </a:endParaRPr>
-                    </a:p>
-                    <a:p>
-                      <a:pPr marL="0" marR="0" lvl="0" indent="0" algn="l" defTabSz="914400" rtl="0" eaLnBrk="1" fontAlgn="auto" latinLnBrk="0" hangingPunct="1">
-                        <a:lnSpc>
-                          <a:spcPct val="150000"/>
-                        </a:lnSpc>
-                        <a:spcBef>
-                          <a:spcPts val="0"/>
-                        </a:spcBef>
-                        <a:spcAft>
-                          <a:spcPts val="0"/>
-                        </a:spcAft>
-                        <a:buClrTx/>
-                        <a:buSzTx/>
-                        <a:buFont typeface="+mj-lt"/>
-                        <a:buNone/>
-                        <a:tabLst/>
-                        <a:defRPr/>
-                      </a:pPr>
-                      <a:r>
-                        <a:rPr lang="en-US" sz="2800" kern="1200" dirty="0">
-                          <a:solidFill>
-                            <a:schemeClr val="tx1"/>
-                          </a:solidFill>
-                          <a:effectLst/>
-                          <a:latin typeface="Times New Roman" panose="02020603050405020304" pitchFamily="18" charset="0"/>
-                          <a:ea typeface="+mn-ea"/>
-                          <a:cs typeface="Times New Roman" panose="02020603050405020304" pitchFamily="18" charset="0"/>
-                        </a:rPr>
-                        <a:t>Selenium</a:t>
-                      </a:r>
-                      <a:endParaRPr lang="ru-RU" sz="2800" kern="1200" dirty="0">
-                        <a:solidFill>
-                          <a:schemeClr val="tx1"/>
-                        </a:solidFill>
-                        <a:effectLst/>
-                        <a:latin typeface="Times New Roman" panose="02020603050405020304" pitchFamily="18" charset="0"/>
-                        <a:ea typeface="+mn-ea"/>
-                        <a:cs typeface="Times New Roman" panose="02020603050405020304" pitchFamily="18" charset="0"/>
-                      </a:endParaRPr>
-                    </a:p>
-                  </a:txBody>
-                  <a:tcPr/>
-                </a:tc>
-                <a:tc>
-                  <a:txBody>
-                    <a:bodyPr/>
-                    <a:lstStyle/>
-                    <a:p>
-                      <a:pPr marL="0" indent="0" algn="l">
-                        <a:lnSpc>
-                          <a:spcPct val="150000"/>
-                        </a:lnSpc>
-                        <a:buFont typeface="+mj-lt"/>
-                        <a:buNone/>
-                      </a:pPr>
-                      <a:r>
-                        <a:rPr lang="en-US" sz="2800" kern="1200" dirty="0">
-                          <a:solidFill>
-                            <a:schemeClr val="tx1"/>
-                          </a:solidFill>
-                          <a:effectLst/>
-                          <a:latin typeface="Times New Roman" panose="02020603050405020304" pitchFamily="18" charset="0"/>
-                          <a:ea typeface="+mn-ea"/>
-                          <a:cs typeface="Times New Roman" panose="02020603050405020304" pitchFamily="18" charset="0"/>
-                        </a:rPr>
-                        <a:t>Pandas </a:t>
-                      </a:r>
-                    </a:p>
-                    <a:p>
-                      <a:pPr marL="0" indent="0" algn="l">
-                        <a:lnSpc>
-                          <a:spcPct val="150000"/>
-                        </a:lnSpc>
-                        <a:buFont typeface="+mj-lt"/>
-                        <a:buNone/>
-                      </a:pPr>
-                      <a:r>
-                        <a:rPr lang="en-US" sz="2800" kern="1200" dirty="0" err="1">
-                          <a:solidFill>
-                            <a:schemeClr val="tx1"/>
-                          </a:solidFill>
-                          <a:effectLst/>
-                          <a:latin typeface="Times New Roman" panose="02020603050405020304" pitchFamily="18" charset="0"/>
-                          <a:ea typeface="+mn-ea"/>
-                          <a:cs typeface="Times New Roman" panose="02020603050405020304" pitchFamily="18" charset="0"/>
-                        </a:rPr>
-                        <a:t>Numpy</a:t>
-                      </a:r>
-                      <a:endParaRPr lang="ru-RU" sz="2800" kern="1200" dirty="0">
-                        <a:solidFill>
-                          <a:schemeClr val="tx1"/>
-                        </a:solidFill>
-                        <a:effectLst/>
-                        <a:latin typeface="Times New Roman" panose="02020603050405020304" pitchFamily="18" charset="0"/>
-                        <a:ea typeface="+mn-ea"/>
-                        <a:cs typeface="Times New Roman" panose="02020603050405020304" pitchFamily="18" charset="0"/>
-                      </a:endParaRPr>
-                    </a:p>
-                  </a:txBody>
-                  <a:tcPr/>
-                </a:tc>
-                <a:tc>
-                  <a:txBody>
-                    <a:bodyPr/>
-                    <a:lstStyle/>
-                    <a:p>
-                      <a:pPr marL="0" indent="0" algn="l">
-                        <a:lnSpc>
-                          <a:spcPct val="150000"/>
-                        </a:lnSpc>
-                        <a:buFont typeface="+mj-lt"/>
-                        <a:buNone/>
-                      </a:pPr>
-                      <a:r>
-                        <a:rPr lang="en-US" sz="2800" dirty="0" err="1">
-                          <a:latin typeface="Times New Roman" panose="02020603050405020304" pitchFamily="18" charset="0"/>
-                          <a:cs typeface="Times New Roman" panose="02020603050405020304" pitchFamily="18" charset="0"/>
-                        </a:rPr>
-                        <a:t>Mlxtend</a:t>
-                      </a:r>
-                      <a:endParaRPr lang="ru-RU" sz="2800" dirty="0">
-                        <a:latin typeface="Times New Roman" panose="02020603050405020304" pitchFamily="18" charset="0"/>
-                        <a:cs typeface="Times New Roman" panose="02020603050405020304" pitchFamily="18" charset="0"/>
-                      </a:endParaRPr>
-                    </a:p>
-                  </a:txBody>
-                  <a:tcPr/>
-                </a:tc>
-                <a:extLst>
-                  <a:ext uri="{0D108BD9-81ED-4DB2-BD59-A6C34878D82A}">
-                    <a16:rowId xmlns:a16="http://schemas.microsoft.com/office/drawing/2014/main" val="1059376421"/>
-                  </a:ext>
-                </a:extLst>
-              </a:tr>
-            </a:tbl>
-          </a:graphicData>
-        </a:graphic>
-      </p:graphicFrame>
-      <p:sp>
-        <p:nvSpPr>
-          <p:cNvPr id="4" name="Footer Placeholder 3">
-            <a:extLst>
-              <a:ext uri="{FF2B5EF4-FFF2-40B4-BE49-F238E27FC236}">
-                <a16:creationId xmlns:a16="http://schemas.microsoft.com/office/drawing/2014/main" id="{530AC945-535B-E233-D133-28DDAB6120C2}"/>
-              </a:ext>
-            </a:extLst>
-          </p:cNvPr>
-          <p:cNvSpPr>
-            <a:spLocks noGrp="1"/>
-          </p:cNvSpPr>
-          <p:nvPr>
-            <p:ph type="ftr" sz="quarter" idx="11"/>
-          </p:nvPr>
-        </p:nvSpPr>
-        <p:spPr/>
-        <p:txBody>
-          <a:bodyPr/>
-          <a:lstStyle/>
-          <a:p>
-            <a:r>
-              <a:rPr lang="ru-RU"/>
-              <a:t>Система поиска шаблонов в данных GitHub</a:t>
-            </a:r>
-            <a:endParaRPr lang="ru-RU" dirty="0"/>
-          </a:p>
-        </p:txBody>
-      </p:sp>
-      <p:sp>
-        <p:nvSpPr>
-          <p:cNvPr id="2" name="Slide Number Placeholder 1">
-            <a:extLst>
-              <a:ext uri="{FF2B5EF4-FFF2-40B4-BE49-F238E27FC236}">
-                <a16:creationId xmlns:a16="http://schemas.microsoft.com/office/drawing/2014/main" id="{F9D0223E-66CA-8800-98BE-2A53CD09E18D}"/>
-              </a:ext>
-            </a:extLst>
-          </p:cNvPr>
-          <p:cNvSpPr>
-            <a:spLocks noGrp="1"/>
-          </p:cNvSpPr>
-          <p:nvPr>
-            <p:ph type="sldNum" sz="quarter" idx="12"/>
-          </p:nvPr>
-        </p:nvSpPr>
-        <p:spPr/>
-        <p:txBody>
-          <a:bodyPr/>
-          <a:lstStyle/>
-          <a:p>
-            <a:fld id="{7EC09024-2147-4C4E-87D2-FF66EAF91B1A}" type="slidenum">
-              <a:rPr lang="ru-RU" smtClean="0"/>
-              <a:pPr/>
-              <a:t>13</a:t>
-            </a:fld>
-            <a:r>
-              <a:rPr lang="ru-RU" dirty="0"/>
-              <a:t>/21</a:t>
-            </a:r>
-          </a:p>
-        </p:txBody>
-      </p:sp>
-    </p:spTree>
-    <p:extLst>
-      <p:ext uri="{BB962C8B-B14F-4D97-AF65-F5344CB8AC3E}">
-        <p14:creationId xmlns:p14="http://schemas.microsoft.com/office/powerpoint/2010/main" val="1433868080"/>
-      </p:ext>
-    </p:extLst>
-  </p:cSld>
-  <p:clrMapOvr>
-    <a:masterClrMapping/>
-  </p:clrMapOvr>
-</p:sld>
-</file>
-
-<file path=ppt/slides/slide14.xml><?xml version="1.0" encoding="utf-8"?>
-<p:sld xmlns:a="http://schemas.openxmlformats.org/drawingml/2006/main" xmlns:r="http://schemas.openxmlformats.org/officeDocument/2006/relationships" xmlns:p="http://schemas.openxmlformats.org/presentationml/2006/main">
-  <p:cSld>
-    <p:spTree>
-      <p:nvGrpSpPr>
-        <p:cNvPr id="1" name=""/>
-        <p:cNvGrpSpPr/>
-        <p:nvPr/>
-      </p:nvGrpSpPr>
-      <p:grpSpPr>
-        <a:xfrm>
-          <a:off x="0" y="0"/>
-          <a:ext cx="0" cy="0"/>
-          <a:chOff x="0" y="0"/>
-          <a:chExt cx="0" cy="0"/>
-        </a:xfrm>
-      </p:grpSpPr>
-      <p:sp>
-        <p:nvSpPr>
-          <p:cNvPr id="4" name="TextBox 3">
-            <a:extLst>
-              <a:ext uri="{FF2B5EF4-FFF2-40B4-BE49-F238E27FC236}">
-                <a16:creationId xmlns:a16="http://schemas.microsoft.com/office/drawing/2014/main" id="{715F93EE-AF4B-3C0D-484A-2E6DA1471D63}"/>
-              </a:ext>
-            </a:extLst>
-          </p:cNvPr>
-          <p:cNvSpPr txBox="1"/>
-          <p:nvPr/>
-        </p:nvSpPr>
-        <p:spPr>
-          <a:xfrm>
-            <a:off x="0" y="0"/>
-            <a:ext cx="12192000" cy="523220"/>
-          </a:xfrm>
-          <a:prstGeom prst="rect">
-            <a:avLst/>
-          </a:prstGeom>
-          <a:noFill/>
-        </p:spPr>
-        <p:txBody>
-          <a:bodyPr wrap="square">
-            <a:spAutoFit/>
-          </a:bodyPr>
-          <a:lstStyle/>
-          <a:p>
-            <a:pPr algn="ctr"/>
-            <a:r>
-              <a:rPr lang="ru-RU" sz="2800" b="1" dirty="0">
-                <a:latin typeface="Times New Roman" panose="02020603050405020304" pitchFamily="18" charset="0"/>
-                <a:cs typeface="Times New Roman" panose="02020603050405020304" pitchFamily="18" charset="0"/>
-              </a:rPr>
-              <a:t>БАЗА ДАННЫХ</a:t>
-            </a:r>
-          </a:p>
-        </p:txBody>
-      </p:sp>
-      <p:sp>
-        <p:nvSpPr>
-          <p:cNvPr id="5" name="Footer Placeholder 4">
-            <a:extLst>
-              <a:ext uri="{FF2B5EF4-FFF2-40B4-BE49-F238E27FC236}">
-                <a16:creationId xmlns:a16="http://schemas.microsoft.com/office/drawing/2014/main" id="{BBCA68B5-8CD0-7CF8-828A-E8515567C197}"/>
-              </a:ext>
-            </a:extLst>
-          </p:cNvPr>
-          <p:cNvSpPr>
-            <a:spLocks noGrp="1"/>
-          </p:cNvSpPr>
-          <p:nvPr>
-            <p:ph type="ftr" sz="quarter" idx="11"/>
-          </p:nvPr>
-        </p:nvSpPr>
-        <p:spPr/>
-        <p:txBody>
-          <a:bodyPr/>
-          <a:lstStyle/>
-          <a:p>
-            <a:r>
-              <a:rPr lang="ru-RU"/>
-              <a:t>Система поиска шаблонов в данных GitHub</a:t>
-            </a:r>
-            <a:endParaRPr lang="ru-RU" dirty="0"/>
-          </a:p>
-        </p:txBody>
-      </p:sp>
-      <p:sp>
-        <p:nvSpPr>
-          <p:cNvPr id="2" name="Slide Number Placeholder 1">
-            <a:extLst>
-              <a:ext uri="{FF2B5EF4-FFF2-40B4-BE49-F238E27FC236}">
-                <a16:creationId xmlns:a16="http://schemas.microsoft.com/office/drawing/2014/main" id="{2BB8D3CF-4ADB-1BFF-C4F9-480AD8F166C7}"/>
-              </a:ext>
-            </a:extLst>
-          </p:cNvPr>
-          <p:cNvSpPr>
-            <a:spLocks noGrp="1"/>
-          </p:cNvSpPr>
-          <p:nvPr>
-            <p:ph type="sldNum" sz="quarter" idx="12"/>
-          </p:nvPr>
-        </p:nvSpPr>
-        <p:spPr/>
-        <p:txBody>
-          <a:bodyPr/>
-          <a:lstStyle/>
-          <a:p>
-            <a:fld id="{7EC09024-2147-4C4E-87D2-FF66EAF91B1A}" type="slidenum">
-              <a:rPr lang="ru-RU" smtClean="0"/>
-              <a:pPr/>
-              <a:t>14</a:t>
             </a:fld>
             <a:r>
               <a:rPr lang="ru-RU" dirty="0"/>
@@ -8801,7 +6628,7 @@
 </p:sld>
 </file>
 
-<file path=ppt/slides/slide15.xml><?xml version="1.0" encoding="utf-8"?>
+<file path=ppt/slides/slide11.xml><?xml version="1.0" encoding="utf-8"?>
 <p:sld xmlns:a="http://schemas.openxmlformats.org/drawingml/2006/main" xmlns:r="http://schemas.openxmlformats.org/officeDocument/2006/relationships" xmlns:p="http://schemas.openxmlformats.org/presentationml/2006/main">
   <p:cSld>
     <p:spTree>
@@ -8852,19 +6679,8 @@
                 <a:latin typeface="Times New Roman" panose="02020603050405020304" pitchFamily="18" charset="0"/>
                 <a:cs typeface="Times New Roman" panose="02020603050405020304" pitchFamily="18" charset="0"/>
               </a:rPr>
-              <a:t>ИНТЕРФЕЙС ПОЛУЧЕНИЯ ДАННЫХ ЧЕРЕЗ </a:t>
-            </a:r>
-            <a:r>
-              <a:rPr lang="en-US" sz="2800" b="1" dirty="0">
-                <a:latin typeface="Times New Roman" panose="02020603050405020304" pitchFamily="18" charset="0"/>
-                <a:cs typeface="Times New Roman" panose="02020603050405020304" pitchFamily="18" charset="0"/>
-              </a:rPr>
-              <a:t>API</a:t>
-            </a:r>
-            <a:endParaRPr lang="ru-RU" sz="2800" b="1" dirty="0">
-              <a:latin typeface="Times New Roman" panose="02020603050405020304" pitchFamily="18" charset="0"/>
-              <a:cs typeface="Times New Roman" panose="02020603050405020304" pitchFamily="18" charset="0"/>
-            </a:endParaRPr>
+              <a:t>РЕАЛИЗАЦИЯ ИНТЕРФЕЙСА</a:t>
+            </a:r>
           </a:p>
         </p:txBody>
       </p:sp>
@@ -8956,7 +6772,7 @@
             <a:fld id="{7EC09024-2147-4C4E-87D2-FF66EAF91B1A}" type="slidenum">
               <a:rPr lang="ru-RU" smtClean="0"/>
               <a:pPr/>
-              <a:t>15</a:t>
+              <a:t>11</a:t>
             </a:fld>
             <a:r>
               <a:rPr lang="ru-RU" dirty="0"/>
@@ -8978,7 +6794,7 @@
 </p:sld>
 </file>
 
-<file path=ppt/slides/slide16.xml><?xml version="1.0" encoding="utf-8"?>
+<file path=ppt/slides/slide12.xml><?xml version="1.0" encoding="utf-8"?>
 <p:sld xmlns:a="http://schemas.openxmlformats.org/drawingml/2006/main" xmlns:r="http://schemas.openxmlformats.org/officeDocument/2006/relationships" xmlns:p="http://schemas.openxmlformats.org/presentationml/2006/main">
   <p:cSld>
     <p:spTree>
@@ -9087,7 +6903,7 @@
             <a:fld id="{7EC09024-2147-4C4E-87D2-FF66EAF91B1A}" type="slidenum">
               <a:rPr lang="ru-RU" smtClean="0"/>
               <a:pPr/>
-              <a:t>16</a:t>
+              <a:t>12</a:t>
             </a:fld>
             <a:r>
               <a:rPr lang="ru-RU" dirty="0"/>
@@ -9144,7 +6960,7 @@
 </p:sld>
 </file>
 
-<file path=ppt/slides/slide17.xml><?xml version="1.0" encoding="utf-8"?>
+<file path=ppt/slides/slide13.xml><?xml version="1.0" encoding="utf-8"?>
 <p:sld xmlns:a="http://schemas.openxmlformats.org/drawingml/2006/main" xmlns:r="http://schemas.openxmlformats.org/officeDocument/2006/relationships" xmlns:p="http://schemas.openxmlformats.org/presentationml/2006/main">
   <p:cSld>
     <p:spTree>
@@ -9321,7 +7137,7 @@
             <a:fld id="{7EC09024-2147-4C4E-87D2-FF66EAF91B1A}" type="slidenum">
               <a:rPr lang="ru-RU" smtClean="0"/>
               <a:pPr/>
-              <a:t>17</a:t>
+              <a:t>13</a:t>
             </a:fld>
             <a:r>
               <a:rPr lang="ru-RU" dirty="0"/>
@@ -9343,7 +7159,7 @@
 </p:sld>
 </file>
 
-<file path=ppt/slides/slide18.xml><?xml version="1.0" encoding="utf-8"?>
+<file path=ppt/slides/slide14.xml><?xml version="1.0" encoding="utf-8"?>
 <p:sld xmlns:a="http://schemas.openxmlformats.org/drawingml/2006/main" xmlns:r="http://schemas.openxmlformats.org/officeDocument/2006/relationships" xmlns:p="http://schemas.openxmlformats.org/presentationml/2006/main">
   <p:cSld>
     <p:spTree>
@@ -9684,7 +7500,7 @@
             <a:fld id="{7EC09024-2147-4C4E-87D2-FF66EAF91B1A}" type="slidenum">
               <a:rPr lang="ru-RU" smtClean="0"/>
               <a:pPr/>
-              <a:t>18</a:t>
+              <a:t>14</a:t>
             </a:fld>
             <a:r>
               <a:rPr lang="ru-RU" dirty="0"/>
@@ -9706,7 +7522,7 @@
 </p:sld>
 </file>
 
-<file path=ppt/slides/slide19.xml><?xml version="1.0" encoding="utf-8"?>
+<file path=ppt/slides/slide15.xml><?xml version="1.0" encoding="utf-8"?>
 <p:sld xmlns:a="http://schemas.openxmlformats.org/drawingml/2006/main" xmlns:r="http://schemas.openxmlformats.org/officeDocument/2006/relationships" xmlns:p="http://schemas.openxmlformats.org/presentationml/2006/main">
   <p:cSld>
     <p:spTree>
@@ -10474,7 +8290,7 @@
             <a:fld id="{7EC09024-2147-4C4E-87D2-FF66EAF91B1A}" type="slidenum">
               <a:rPr lang="ru-RU" smtClean="0"/>
               <a:pPr/>
-              <a:t>19</a:t>
+              <a:t>15</a:t>
             </a:fld>
             <a:r>
               <a:rPr lang="ru-RU" dirty="0"/>
@@ -10496,7 +8312,7 @@
 </p:sld>
 </file>
 
-<file path=ppt/slides/slide2.xml><?xml version="1.0" encoding="utf-8"?>
+<file path=ppt/slides/slide16.xml><?xml version="1.0" encoding="utf-8"?>
 <p:sld xmlns:a="http://schemas.openxmlformats.org/drawingml/2006/main" xmlns:r="http://schemas.openxmlformats.org/officeDocument/2006/relationships" xmlns:p="http://schemas.openxmlformats.org/presentationml/2006/main">
   <p:cSld>
     <p:spTree>
@@ -10527,7 +8343,7 @@
         </p:nvSpPr>
         <p:spPr>
           <a:xfrm>
-            <a:off x="0" y="0"/>
+            <a:off x="0" y="141062"/>
             <a:ext cx="12192000" cy="523220"/>
           </a:xfrm>
           <a:prstGeom prst="rect">
@@ -10547,47 +8363,56 @@
                 <a:latin typeface="Times New Roman" panose="02020603050405020304" pitchFamily="18" charset="0"/>
                 <a:cs typeface="Times New Roman" panose="02020603050405020304" pitchFamily="18" charset="0"/>
               </a:rPr>
-              <a:t>АКТУАЛЬНОСТЬ</a:t>
-            </a:r>
-          </a:p>
-        </p:txBody>
-      </p:sp>
-      <p:pic>
-        <p:nvPicPr>
-          <p:cNvPr id="6" name="Picture 5">
-            <a:extLst>
-              <a:ext uri="{FF2B5EF4-FFF2-40B4-BE49-F238E27FC236}">
-                <a16:creationId xmlns:a16="http://schemas.microsoft.com/office/drawing/2014/main" id="{B55F3362-C79B-4814-802F-A104A7F06A00}"/>
-              </a:ext>
-            </a:extLst>
-          </p:cNvPr>
-          <p:cNvPicPr>
-            <a:picLocks noChangeAspect="1"/>
-          </p:cNvPicPr>
+              <a:t>ЭКСПЕРИМЕНТЫ</a:t>
+            </a:r>
+          </a:p>
+        </p:txBody>
+      </p:sp>
+      <p:sp>
+        <p:nvSpPr>
+          <p:cNvPr id="11" name="TextBox 10">
+            <a:extLst>
+              <a:ext uri="{FF2B5EF4-FFF2-40B4-BE49-F238E27FC236}">
+                <a16:creationId xmlns:a16="http://schemas.microsoft.com/office/drawing/2014/main" id="{5566205B-72AF-4286-B94D-4359513A59E4}"/>
+              </a:ext>
+            </a:extLst>
+          </p:cNvPr>
+          <p:cNvSpPr txBox="1"/>
           <p:nvPr/>
-        </p:nvPicPr>
-        <p:blipFill>
-          <a:blip r:embed="rId3"/>
-          <a:stretch>
-            <a:fillRect/>
-          </a:stretch>
-        </p:blipFill>
+        </p:nvSpPr>
         <p:spPr>
           <a:xfrm>
-            <a:off x="802640" y="736144"/>
-            <a:ext cx="10586720" cy="5385711"/>
+            <a:off x="1783976" y="720049"/>
+            <a:ext cx="8624048" cy="461665"/>
           </a:xfrm>
           <a:prstGeom prst="rect">
             <a:avLst/>
           </a:prstGeom>
+          <a:noFill/>
         </p:spPr>
-      </p:pic>
-      <p:sp>
-        <p:nvSpPr>
-          <p:cNvPr id="8" name="Footer Placeholder 7">
-            <a:extLst>
-              <a:ext uri="{FF2B5EF4-FFF2-40B4-BE49-F238E27FC236}">
-                <a16:creationId xmlns:a16="http://schemas.microsoft.com/office/drawing/2014/main" id="{3924C6ED-FCAC-43D2-B8BB-9875FF968A9C}"/>
+        <p:txBody>
+          <a:bodyPr wrap="square" rtlCol="0">
+            <a:spAutoFit/>
+          </a:bodyPr>
+          <a:lstStyle/>
+          <a:p>
+            <a:pPr algn="ctr"/>
+            <a:r>
+              <a:rPr lang="ru-RU" sz="2400" b="1" dirty="0">
+                <a:latin typeface="Times New Roman" panose="02020603050405020304" pitchFamily="18" charset="0"/>
+                <a:cs typeface="Times New Roman" panose="02020603050405020304" pitchFamily="18" charset="0"/>
+              </a:rPr>
+              <a:t>Шаблоны вида « -&gt; »</a:t>
+            </a:r>
+          </a:p>
+        </p:txBody>
+      </p:sp>
+      <p:sp>
+        <p:nvSpPr>
+          <p:cNvPr id="4" name="Footer Placeholder 3">
+            <a:extLst>
+              <a:ext uri="{FF2B5EF4-FFF2-40B4-BE49-F238E27FC236}">
+                <a16:creationId xmlns:a16="http://schemas.microsoft.com/office/drawing/2014/main" id="{B4596447-8FB2-4F16-F5AB-19090AC38290}"/>
               </a:ext>
             </a:extLst>
           </p:cNvPr>
@@ -10616,7 +8441,7 @@
           <p:cNvPr id="2" name="Slide Number Placeholder 1">
             <a:extLst>
               <a:ext uri="{FF2B5EF4-FFF2-40B4-BE49-F238E27FC236}">
-                <a16:creationId xmlns:a16="http://schemas.microsoft.com/office/drawing/2014/main" id="{982ACC5C-F524-10AE-6654-11E912EC6F1C}"/>
+                <a16:creationId xmlns:a16="http://schemas.microsoft.com/office/drawing/2014/main" id="{A7085C8D-8E43-AD06-9998-56322447FFBF}"/>
               </a:ext>
             </a:extLst>
           </p:cNvPr>
@@ -10635,7 +8460,7 @@
             <a:fld id="{7EC09024-2147-4C4E-87D2-FF66EAF91B1A}" type="slidenum">
               <a:rPr lang="ru-RU" smtClean="0"/>
               <a:pPr/>
-              <a:t>2</a:t>
+              <a:t>16</a:t>
             </a:fld>
             <a:r>
               <a:rPr lang="ru-RU" dirty="0"/>
@@ -10647,7 +8472,7 @@
     </p:spTree>
     <p:extLst>
       <p:ext uri="{BB962C8B-B14F-4D97-AF65-F5344CB8AC3E}">
-        <p14:creationId xmlns:p14="http://schemas.microsoft.com/office/powerpoint/2010/main" val="2693812793"/>
+        <p14:creationId xmlns:p14="http://schemas.microsoft.com/office/powerpoint/2010/main" val="1492425450"/>
       </p:ext>
     </p:extLst>
   </p:cSld>
@@ -10657,7 +8482,7 @@
 </p:sld>
 </file>
 
-<file path=ppt/slides/slide20.xml><?xml version="1.0" encoding="utf-8"?>
+<file path=ppt/slides/slide17.xml><?xml version="1.0" encoding="utf-8"?>
 <p:sld xmlns:a="http://schemas.openxmlformats.org/drawingml/2006/main" xmlns:r="http://schemas.openxmlformats.org/officeDocument/2006/relationships" xmlns:p="http://schemas.openxmlformats.org/presentationml/2006/main">
   <p:cSld>
     <p:spTree>
@@ -10688,7 +8513,7 @@
         </p:nvSpPr>
         <p:spPr>
           <a:xfrm>
-            <a:off x="0" y="141062"/>
+            <a:off x="0" y="125506"/>
             <a:ext cx="12192000" cy="523220"/>
           </a:xfrm>
           <a:prstGeom prst="rect">
@@ -10708,17 +8533,35 @@
                 <a:latin typeface="Times New Roman" panose="02020603050405020304" pitchFamily="18" charset="0"/>
                 <a:cs typeface="Times New Roman" panose="02020603050405020304" pitchFamily="18" charset="0"/>
               </a:rPr>
-              <a:t>ЭКСПЕРИМЕНТЫ</a:t>
-            </a:r>
-          </a:p>
-        </p:txBody>
-      </p:sp>
-      <p:sp>
-        <p:nvSpPr>
-          <p:cNvPr id="11" name="TextBox 10">
-            <a:extLst>
-              <a:ext uri="{FF2B5EF4-FFF2-40B4-BE49-F238E27FC236}">
-                <a16:creationId xmlns:a16="http://schemas.microsoft.com/office/drawing/2014/main" id="{5566205B-72AF-4286-B94D-4359513A59E4}"/>
+              <a:t>ОСНОВНЫЕ</a:t>
+            </a:r>
+            <a:r>
+              <a:rPr lang="ru-RU" sz="2400" b="1" dirty="0">
+                <a:latin typeface="Times New Roman" panose="02020603050405020304" pitchFamily="18" charset="0"/>
+                <a:cs typeface="Times New Roman" panose="02020603050405020304" pitchFamily="18" charset="0"/>
+              </a:rPr>
+              <a:t> </a:t>
+            </a:r>
+            <a:r>
+              <a:rPr lang="ru-RU" sz="2800" b="1" dirty="0">
+                <a:latin typeface="Times New Roman" panose="02020603050405020304" pitchFamily="18" charset="0"/>
+                <a:cs typeface="Times New Roman" panose="02020603050405020304" pitchFamily="18" charset="0"/>
+              </a:rPr>
+              <a:t>РЕЗУЛЬТАТЫ</a:t>
+            </a:r>
+            <a:endParaRPr lang="ru-RU" sz="2400" b="1" dirty="0">
+              <a:latin typeface="Times New Roman" panose="02020603050405020304" pitchFamily="18" charset="0"/>
+              <a:cs typeface="Times New Roman" panose="02020603050405020304" pitchFamily="18" charset="0"/>
+            </a:endParaRPr>
+          </a:p>
+        </p:txBody>
+      </p:sp>
+      <p:sp>
+        <p:nvSpPr>
+          <p:cNvPr id="4" name="TextBox 3">
+            <a:extLst>
+              <a:ext uri="{FF2B5EF4-FFF2-40B4-BE49-F238E27FC236}">
+                <a16:creationId xmlns:a16="http://schemas.microsoft.com/office/drawing/2014/main" id="{D206E9D9-DBC2-472A-9F01-4655CBFD155A}"/>
               </a:ext>
             </a:extLst>
           </p:cNvPr>
@@ -10727,8 +8570,8 @@
         </p:nvSpPr>
         <p:spPr>
           <a:xfrm>
-            <a:off x="1783976" y="720049"/>
-            <a:ext cx="8624048" cy="461665"/>
+            <a:off x="528918" y="1051155"/>
+            <a:ext cx="11134164" cy="2677656"/>
           </a:xfrm>
           <a:prstGeom prst="rect">
             <a:avLst/>
@@ -10736,28 +8579,87 @@
           <a:noFill/>
         </p:spPr>
         <p:txBody>
-          <a:bodyPr wrap="square" rtlCol="0">
+          <a:bodyPr wrap="square">
             <a:spAutoFit/>
           </a:bodyPr>
           <a:lstStyle/>
           <a:p>
-            <a:pPr algn="ctr"/>
-            <a:r>
-              <a:rPr lang="ru-RU" sz="2400" b="1" dirty="0">
+            <a:pPr marL="450000" indent="-450000" algn="just">
+              <a:buFont typeface="+mj-lt"/>
+              <a:buAutoNum type="arabicPeriod"/>
+            </a:pPr>
+            <a:r>
+              <a:rPr lang="ru-RU" sz="2800" dirty="0">
                 <a:latin typeface="Times New Roman" panose="02020603050405020304" pitchFamily="18" charset="0"/>
                 <a:cs typeface="Times New Roman" panose="02020603050405020304" pitchFamily="18" charset="0"/>
               </a:rPr>
-              <a:t>Шаблоны вида « -&gt; »</a:t>
-            </a:r>
-          </a:p>
-        </p:txBody>
-      </p:sp>
-      <p:sp>
-        <p:nvSpPr>
-          <p:cNvPr id="4" name="Footer Placeholder 3">
-            <a:extLst>
-              <a:ext uri="{FF2B5EF4-FFF2-40B4-BE49-F238E27FC236}">
-                <a16:creationId xmlns:a16="http://schemas.microsoft.com/office/drawing/2014/main" id="{B4596447-8FB2-4F16-F5AB-19090AC38290}"/>
+              <a:t>Проведен анализ предметной области</a:t>
+            </a:r>
+          </a:p>
+          <a:p>
+            <a:pPr marL="450000" indent="-450000" algn="just">
+              <a:buFont typeface="+mj-lt"/>
+              <a:buAutoNum type="arabicPeriod"/>
+            </a:pPr>
+            <a:r>
+              <a:rPr lang="ru-RU" sz="2800" dirty="0">
+                <a:latin typeface="Times New Roman" panose="02020603050405020304" pitchFamily="18" charset="0"/>
+                <a:cs typeface="Times New Roman" panose="02020603050405020304" pitchFamily="18" charset="0"/>
+              </a:rPr>
+              <a:t>­Выполнено проектирование системы поиска шаблонов</a:t>
+            </a:r>
+          </a:p>
+          <a:p>
+            <a:pPr marL="450000" indent="-450000" algn="just">
+              <a:buFont typeface="+mj-lt"/>
+              <a:buAutoNum type="arabicPeriod"/>
+            </a:pPr>
+            <a:r>
+              <a:rPr lang="ru-RU" sz="2800" dirty="0">
+                <a:latin typeface="Times New Roman" panose="02020603050405020304" pitchFamily="18" charset="0"/>
+                <a:cs typeface="Times New Roman" panose="02020603050405020304" pitchFamily="18" charset="0"/>
+              </a:rPr>
+              <a:t>­Реализована система поиска шаблонов</a:t>
+            </a:r>
+          </a:p>
+          <a:p>
+            <a:pPr marL="450000" indent="-450000" algn="just">
+              <a:buFont typeface="+mj-lt"/>
+              <a:buAutoNum type="arabicPeriod"/>
+            </a:pPr>
+            <a:r>
+              <a:rPr lang="ru-RU" sz="2800" dirty="0">
+                <a:latin typeface="Times New Roman" panose="02020603050405020304" pitchFamily="18" charset="0"/>
+                <a:cs typeface="Times New Roman" panose="02020603050405020304" pitchFamily="18" charset="0"/>
+              </a:rPr>
+              <a:t>­Проведено тестирование системы поиска шаблонов</a:t>
+            </a:r>
+            <a:endParaRPr lang="en-US" sz="2800" dirty="0">
+              <a:latin typeface="Times New Roman" panose="02020603050405020304" pitchFamily="18" charset="0"/>
+              <a:cs typeface="Times New Roman" panose="02020603050405020304" pitchFamily="18" charset="0"/>
+            </a:endParaRPr>
+          </a:p>
+          <a:p>
+            <a:pPr marL="450000" indent="-450000" algn="just">
+              <a:buFont typeface="+mj-lt"/>
+              <a:buAutoNum type="arabicPeriod"/>
+            </a:pPr>
+            <a:r>
+              <a:rPr lang="ru-RU" sz="2800" dirty="0">
+                <a:latin typeface="Times New Roman" panose="02020603050405020304" pitchFamily="18" charset="0"/>
+                <a:cs typeface="Times New Roman" panose="02020603050405020304" pitchFamily="18" charset="0"/>
+              </a:rPr>
+              <a:t>Проведен ряд экспериментов, которые оценили эффективность системы, а также выявили шаблоны, представляющие интерес</a:t>
+            </a:r>
+          </a:p>
+        </p:txBody>
+      </p:sp>
+      <p:sp>
+        <p:nvSpPr>
+          <p:cNvPr id="5" name="Footer Placeholder 4">
+            <a:extLst>
+              <a:ext uri="{FF2B5EF4-FFF2-40B4-BE49-F238E27FC236}">
+                <a16:creationId xmlns:a16="http://schemas.microsoft.com/office/drawing/2014/main" id="{FCA088BE-0C84-6622-1C87-69D3B9F6B701}"/>
               </a:ext>
             </a:extLst>
           </p:cNvPr>
@@ -10786,7 +8688,7 @@
           <p:cNvPr id="2" name="Slide Number Placeholder 1">
             <a:extLst>
               <a:ext uri="{FF2B5EF4-FFF2-40B4-BE49-F238E27FC236}">
-                <a16:creationId xmlns:a16="http://schemas.microsoft.com/office/drawing/2014/main" id="{A7085C8D-8E43-AD06-9998-56322447FFBF}"/>
+                <a16:creationId xmlns:a16="http://schemas.microsoft.com/office/drawing/2014/main" id="{74831FC9-E3F5-5C66-D748-58AF511BB1DD}"/>
               </a:ext>
             </a:extLst>
           </p:cNvPr>
@@ -10805,7 +8707,7 @@
             <a:fld id="{7EC09024-2147-4C4E-87D2-FF66EAF91B1A}" type="slidenum">
               <a:rPr lang="ru-RU" smtClean="0"/>
               <a:pPr/>
-              <a:t>20</a:t>
+              <a:t>17</a:t>
             </a:fld>
             <a:r>
               <a:rPr lang="ru-RU" dirty="0"/>
@@ -10817,7 +8719,7 @@
     </p:spTree>
     <p:extLst>
       <p:ext uri="{BB962C8B-B14F-4D97-AF65-F5344CB8AC3E}">
-        <p14:creationId xmlns:p14="http://schemas.microsoft.com/office/powerpoint/2010/main" val="1492425450"/>
+        <p14:creationId xmlns:p14="http://schemas.microsoft.com/office/powerpoint/2010/main" val="212835115"/>
       </p:ext>
     </p:extLst>
   </p:cSld>
@@ -10827,7 +8729,7 @@
 </p:sld>
 </file>
 
-<file path=ppt/slides/slide21.xml><?xml version="1.0" encoding="utf-8"?>
+<file path=ppt/slides/slide18.xml><?xml version="1.0" encoding="utf-8"?>
 <p:sld xmlns:a="http://schemas.openxmlformats.org/drawingml/2006/main" xmlns:r="http://schemas.openxmlformats.org/officeDocument/2006/relationships" xmlns:p="http://schemas.openxmlformats.org/presentationml/2006/main">
   <p:cSld>
     <p:spTree>
@@ -10846,165 +8748,10 @@
       </p:grpSpPr>
       <p:sp>
         <p:nvSpPr>
-          <p:cNvPr id="3" name="TextBox 2">
-            <a:extLst>
-              <a:ext uri="{FF2B5EF4-FFF2-40B4-BE49-F238E27FC236}">
-                <a16:creationId xmlns:a16="http://schemas.microsoft.com/office/drawing/2014/main" id="{100B25DD-8CC4-48A0-A45C-A43464AB841D}"/>
-              </a:ext>
-            </a:extLst>
-          </p:cNvPr>
-          <p:cNvSpPr txBox="1"/>
-          <p:nvPr/>
-        </p:nvSpPr>
-        <p:spPr>
-          <a:xfrm>
-            <a:off x="0" y="125506"/>
-            <a:ext cx="12192000" cy="523220"/>
-          </a:xfrm>
-          <a:prstGeom prst="rect">
-            <a:avLst/>
-          </a:prstGeom>
-          <a:noFill/>
-        </p:spPr>
-        <p:txBody>
-          <a:bodyPr wrap="square">
-            <a:spAutoFit/>
-          </a:bodyPr>
-          <a:lstStyle/>
-          <a:p>
-            <a:pPr algn="ctr"/>
-            <a:r>
-              <a:rPr lang="ru-RU" sz="2800" b="1" dirty="0">
-                <a:latin typeface="Times New Roman" panose="02020603050405020304" pitchFamily="18" charset="0"/>
-                <a:cs typeface="Times New Roman" panose="02020603050405020304" pitchFamily="18" charset="0"/>
-              </a:rPr>
-              <a:t>ОСНОВНЫЕ</a:t>
-            </a:r>
-            <a:r>
-              <a:rPr lang="ru-RU" sz="2400" b="1" dirty="0">
-                <a:latin typeface="Times New Roman" panose="02020603050405020304" pitchFamily="18" charset="0"/>
-                <a:cs typeface="Times New Roman" panose="02020603050405020304" pitchFamily="18" charset="0"/>
-              </a:rPr>
-              <a:t> </a:t>
-            </a:r>
-            <a:r>
-              <a:rPr lang="ru-RU" sz="2800" b="1" dirty="0">
-                <a:latin typeface="Times New Roman" panose="02020603050405020304" pitchFamily="18" charset="0"/>
-                <a:cs typeface="Times New Roman" panose="02020603050405020304" pitchFamily="18" charset="0"/>
-              </a:rPr>
-              <a:t>РЕЗУЛЬТАТЫ</a:t>
-            </a:r>
-            <a:endParaRPr lang="ru-RU" sz="2400" b="1" dirty="0">
-              <a:latin typeface="Times New Roman" panose="02020603050405020304" pitchFamily="18" charset="0"/>
-              <a:cs typeface="Times New Roman" panose="02020603050405020304" pitchFamily="18" charset="0"/>
-            </a:endParaRPr>
-          </a:p>
-        </p:txBody>
-      </p:sp>
-      <p:sp>
-        <p:nvSpPr>
-          <p:cNvPr id="4" name="TextBox 3">
-            <a:extLst>
-              <a:ext uri="{FF2B5EF4-FFF2-40B4-BE49-F238E27FC236}">
-                <a16:creationId xmlns:a16="http://schemas.microsoft.com/office/drawing/2014/main" id="{D206E9D9-DBC2-472A-9F01-4655CBFD155A}"/>
-              </a:ext>
-            </a:extLst>
-          </p:cNvPr>
-          <p:cNvSpPr txBox="1"/>
-          <p:nvPr/>
-        </p:nvSpPr>
-        <p:spPr>
-          <a:xfrm>
-            <a:off x="528918" y="1051155"/>
-            <a:ext cx="11134164" cy="2677656"/>
-          </a:xfrm>
-          <a:prstGeom prst="rect">
-            <a:avLst/>
-          </a:prstGeom>
-          <a:noFill/>
-        </p:spPr>
-        <p:txBody>
-          <a:bodyPr wrap="square">
-            <a:spAutoFit/>
-          </a:bodyPr>
-          <a:lstStyle/>
-          <a:p>
-            <a:pPr marL="450000" indent="-450000" algn="just">
-              <a:buFont typeface="+mj-lt"/>
-              <a:buAutoNum type="arabicPeriod"/>
-            </a:pPr>
-            <a:r>
-              <a:rPr lang="ru-RU" sz="2800" dirty="0">
-                <a:latin typeface="Times New Roman" panose="02020603050405020304" pitchFamily="18" charset="0"/>
-                <a:cs typeface="Times New Roman" panose="02020603050405020304" pitchFamily="18" charset="0"/>
-              </a:rPr>
-              <a:t>Проведен анализ предметной области</a:t>
-            </a:r>
-          </a:p>
-          <a:p>
-            <a:pPr marL="450000" indent="-450000" algn="just">
-              <a:buFont typeface="+mj-lt"/>
-              <a:buAutoNum type="arabicPeriod"/>
-            </a:pPr>
-            <a:r>
-              <a:rPr lang="ru-RU" sz="2800" dirty="0">
-                <a:latin typeface="Times New Roman" panose="02020603050405020304" pitchFamily="18" charset="0"/>
-                <a:cs typeface="Times New Roman" panose="02020603050405020304" pitchFamily="18" charset="0"/>
-              </a:rPr>
-              <a:t>­Выполнено проектирование системы поиска шаблонов</a:t>
-            </a:r>
-          </a:p>
-          <a:p>
-            <a:pPr marL="450000" indent="-450000" algn="just">
-              <a:buFont typeface="+mj-lt"/>
-              <a:buAutoNum type="arabicPeriod"/>
-            </a:pPr>
-            <a:r>
-              <a:rPr lang="ru-RU" sz="2800" dirty="0">
-                <a:latin typeface="Times New Roman" panose="02020603050405020304" pitchFamily="18" charset="0"/>
-                <a:cs typeface="Times New Roman" panose="02020603050405020304" pitchFamily="18" charset="0"/>
-              </a:rPr>
-              <a:t>­Реализована система поиска шаблонов</a:t>
-            </a:r>
-          </a:p>
-          <a:p>
-            <a:pPr marL="450000" indent="-450000" algn="just">
-              <a:buFont typeface="+mj-lt"/>
-              <a:buAutoNum type="arabicPeriod"/>
-            </a:pPr>
-            <a:r>
-              <a:rPr lang="ru-RU" sz="2800" dirty="0">
-                <a:latin typeface="Times New Roman" panose="02020603050405020304" pitchFamily="18" charset="0"/>
-                <a:cs typeface="Times New Roman" panose="02020603050405020304" pitchFamily="18" charset="0"/>
-              </a:rPr>
-              <a:t>­Проведено тестирование системы поиска шаблонов</a:t>
-            </a:r>
-            <a:endParaRPr lang="en-US" sz="2800" dirty="0">
-              <a:latin typeface="Times New Roman" panose="02020603050405020304" pitchFamily="18" charset="0"/>
-              <a:cs typeface="Times New Roman" panose="02020603050405020304" pitchFamily="18" charset="0"/>
-            </a:endParaRPr>
-          </a:p>
-          <a:p>
-            <a:pPr marL="450000" indent="-450000" algn="just">
-              <a:buFont typeface="+mj-lt"/>
-              <a:buAutoNum type="arabicPeriod"/>
-            </a:pPr>
-            <a:r>
-              <a:rPr lang="ru-RU" sz="2800" dirty="0">
-                <a:latin typeface="Times New Roman" panose="02020603050405020304" pitchFamily="18" charset="0"/>
-                <a:cs typeface="Times New Roman" panose="02020603050405020304" pitchFamily="18" charset="0"/>
-              </a:rPr>
-              <a:t>Проведен ряд экспериментов, которые оценили эффективность системы, а также выявили шаблоны, представляющие интерес</a:t>
-            </a:r>
-          </a:p>
-        </p:txBody>
-      </p:sp>
-      <p:sp>
-        <p:nvSpPr>
-          <p:cNvPr id="5" name="Footer Placeholder 4">
-            <a:extLst>
-              <a:ext uri="{FF2B5EF4-FFF2-40B4-BE49-F238E27FC236}">
-                <a16:creationId xmlns:a16="http://schemas.microsoft.com/office/drawing/2014/main" id="{FCA088BE-0C84-6622-1C87-69D3B9F6B701}"/>
+          <p:cNvPr id="2" name="Footer Placeholder 1">
+            <a:extLst>
+              <a:ext uri="{FF2B5EF4-FFF2-40B4-BE49-F238E27FC236}">
+                <a16:creationId xmlns:a16="http://schemas.microsoft.com/office/drawing/2014/main" id="{5D59324B-F2C8-D5A1-033A-6F26E24FE551}"/>
               </a:ext>
             </a:extLst>
           </p:cNvPr>
@@ -11030,10 +8777,10 @@
       </p:sp>
       <p:sp>
         <p:nvSpPr>
-          <p:cNvPr id="2" name="Slide Number Placeholder 1">
-            <a:extLst>
-              <a:ext uri="{FF2B5EF4-FFF2-40B4-BE49-F238E27FC236}">
-                <a16:creationId xmlns:a16="http://schemas.microsoft.com/office/drawing/2014/main" id="{74831FC9-E3F5-5C66-D748-58AF511BB1DD}"/>
+          <p:cNvPr id="3" name="Slide Number Placeholder 2">
+            <a:extLst>
+              <a:ext uri="{FF2B5EF4-FFF2-40B4-BE49-F238E27FC236}">
+                <a16:creationId xmlns:a16="http://schemas.microsoft.com/office/drawing/2014/main" id="{9F4F4BF0-71A1-DD7A-65FD-AE3A2756227A}"/>
               </a:ext>
             </a:extLst>
           </p:cNvPr>
@@ -11052,99 +8799,7 @@
             <a:fld id="{7EC09024-2147-4C4E-87D2-FF66EAF91B1A}" type="slidenum">
               <a:rPr lang="ru-RU" smtClean="0"/>
               <a:pPr/>
-              <a:t>21</a:t>
-            </a:fld>
-            <a:r>
-              <a:rPr lang="ru-RU" dirty="0"/>
-              <a:t>/21</a:t>
-            </a:r>
-          </a:p>
-        </p:txBody>
-      </p:sp>
-    </p:spTree>
-    <p:extLst>
-      <p:ext uri="{BB962C8B-B14F-4D97-AF65-F5344CB8AC3E}">
-        <p14:creationId xmlns:p14="http://schemas.microsoft.com/office/powerpoint/2010/main" val="212835115"/>
-      </p:ext>
-    </p:extLst>
-  </p:cSld>
-  <p:clrMapOvr>
-    <a:masterClrMapping/>
-  </p:clrMapOvr>
-</p:sld>
-</file>
-
-<file path=ppt/slides/slide3.xml><?xml version="1.0" encoding="utf-8"?>
-<p:sld xmlns:a="http://schemas.openxmlformats.org/drawingml/2006/main" xmlns:r="http://schemas.openxmlformats.org/officeDocument/2006/relationships" xmlns:p="http://schemas.openxmlformats.org/presentationml/2006/main">
-  <p:cSld>
-    <p:spTree>
-      <p:nvGrpSpPr>
-        <p:cNvPr id="1" name=""/>
-        <p:cNvGrpSpPr/>
-        <p:nvPr/>
-      </p:nvGrpSpPr>
-      <p:grpSpPr>
-        <a:xfrm>
-          <a:off x="0" y="0"/>
-          <a:ext cx="0" cy="0"/>
-          <a:chOff x="0" y="0"/>
-          <a:chExt cx="0" cy="0"/>
-        </a:xfrm>
-      </p:grpSpPr>
-      <p:sp>
-        <p:nvSpPr>
-          <p:cNvPr id="2" name="Footer Placeholder 1">
-            <a:extLst>
-              <a:ext uri="{FF2B5EF4-FFF2-40B4-BE49-F238E27FC236}">
-                <a16:creationId xmlns:a16="http://schemas.microsoft.com/office/drawing/2014/main" id="{5D59324B-F2C8-D5A1-033A-6F26E24FE551}"/>
-              </a:ext>
-            </a:extLst>
-          </p:cNvPr>
-          <p:cNvSpPr>
-            <a:spLocks noGrp="1"/>
-          </p:cNvSpPr>
-          <p:nvPr>
-            <p:ph type="ftr" sz="quarter" idx="11"/>
-          </p:nvPr>
-        </p:nvSpPr>
-        <p:spPr/>
-        <p:txBody>
-          <a:bodyPr/>
-          <a:lstStyle/>
-          <a:p>
-            <a:r>
-              <a:rPr lang="ru-RU"/>
-              <a:t>Система поиска шаблонов в данных GitHub</a:t>
-            </a:r>
-            <a:endParaRPr lang="ru-RU" dirty="0"/>
-          </a:p>
-        </p:txBody>
-      </p:sp>
-      <p:sp>
-        <p:nvSpPr>
-          <p:cNvPr id="3" name="Slide Number Placeholder 2">
-            <a:extLst>
-              <a:ext uri="{FF2B5EF4-FFF2-40B4-BE49-F238E27FC236}">
-                <a16:creationId xmlns:a16="http://schemas.microsoft.com/office/drawing/2014/main" id="{9F4F4BF0-71A1-DD7A-65FD-AE3A2756227A}"/>
-              </a:ext>
-            </a:extLst>
-          </p:cNvPr>
-          <p:cNvSpPr>
-            <a:spLocks noGrp="1"/>
-          </p:cNvSpPr>
-          <p:nvPr>
-            <p:ph type="sldNum" sz="quarter" idx="12"/>
-          </p:nvPr>
-        </p:nvSpPr>
-        <p:spPr/>
-        <p:txBody>
-          <a:bodyPr/>
-          <a:lstStyle/>
-          <a:p>
-            <a:fld id="{7EC09024-2147-4C4E-87D2-FF66EAF91B1A}" type="slidenum">
-              <a:rPr lang="ru-RU" smtClean="0"/>
-              <a:pPr/>
-              <a:t>3</a:t>
+              <a:t>18</a:t>
             </a:fld>
             <a:r>
               <a:rPr lang="ru-RU" dirty="0"/>
@@ -11240,7 +8895,7 @@
 </p:sld>
 </file>
 
-<file path=ppt/slides/slide4.xml><?xml version="1.0" encoding="utf-8"?>
+<file path=ppt/slides/slide19.xml><?xml version="1.0" encoding="utf-8"?>
 <p:sld xmlns:a="http://schemas.openxmlformats.org/drawingml/2006/main" xmlns:r="http://schemas.openxmlformats.org/officeDocument/2006/relationships" xmlns:p="http://schemas.openxmlformats.org/presentationml/2006/main">
   <p:cSld>
     <p:spTree>
@@ -11310,7 +8965,7 @@
             <a:fld id="{7EC09024-2147-4C4E-87D2-FF66EAF91B1A}" type="slidenum">
               <a:rPr lang="ru-RU" smtClean="0"/>
               <a:pPr/>
-              <a:t>4</a:t>
+              <a:t>19</a:t>
             </a:fld>
             <a:r>
               <a:rPr lang="ru-RU" dirty="0"/>
@@ -12263,7 +9918,7 @@
 </p:sld>
 </file>
 
-<file path=ppt/slides/slide5.xml><?xml version="1.0" encoding="utf-8"?>
+<file path=ppt/slides/slide2.xml><?xml version="1.0" encoding="utf-8"?>
 <p:sld xmlns:a="http://schemas.openxmlformats.org/drawingml/2006/main" xmlns:r="http://schemas.openxmlformats.org/officeDocument/2006/relationships" xmlns:p="http://schemas.openxmlformats.org/presentationml/2006/main">
   <p:cSld>
     <p:spTree>
@@ -12314,6 +9969,743 @@
                 <a:latin typeface="Times New Roman" panose="02020603050405020304" pitchFamily="18" charset="0"/>
                 <a:cs typeface="Times New Roman" panose="02020603050405020304" pitchFamily="18" charset="0"/>
               </a:rPr>
+              <a:t>АКТУАЛЬНОСТЬ</a:t>
+            </a:r>
+          </a:p>
+        </p:txBody>
+      </p:sp>
+      <p:pic>
+        <p:nvPicPr>
+          <p:cNvPr id="6" name="Picture 5">
+            <a:extLst>
+              <a:ext uri="{FF2B5EF4-FFF2-40B4-BE49-F238E27FC236}">
+                <a16:creationId xmlns:a16="http://schemas.microsoft.com/office/drawing/2014/main" id="{B55F3362-C79B-4814-802F-A104A7F06A00}"/>
+              </a:ext>
+            </a:extLst>
+          </p:cNvPr>
+          <p:cNvPicPr>
+            <a:picLocks noChangeAspect="1"/>
+          </p:cNvPicPr>
+          <p:nvPr/>
+        </p:nvPicPr>
+        <p:blipFill>
+          <a:blip r:embed="rId3"/>
+          <a:stretch>
+            <a:fillRect/>
+          </a:stretch>
+        </p:blipFill>
+        <p:spPr>
+          <a:xfrm>
+            <a:off x="802640" y="736144"/>
+            <a:ext cx="10586720" cy="5385711"/>
+          </a:xfrm>
+          <a:prstGeom prst="rect">
+            <a:avLst/>
+          </a:prstGeom>
+        </p:spPr>
+      </p:pic>
+      <p:sp>
+        <p:nvSpPr>
+          <p:cNvPr id="8" name="Footer Placeholder 7">
+            <a:extLst>
+              <a:ext uri="{FF2B5EF4-FFF2-40B4-BE49-F238E27FC236}">
+                <a16:creationId xmlns:a16="http://schemas.microsoft.com/office/drawing/2014/main" id="{3924C6ED-FCAC-43D2-B8BB-9875FF968A9C}"/>
+              </a:ext>
+            </a:extLst>
+          </p:cNvPr>
+          <p:cNvSpPr>
+            <a:spLocks noGrp="1"/>
+          </p:cNvSpPr>
+          <p:nvPr>
+            <p:ph type="ftr" sz="quarter" idx="11"/>
+          </p:nvPr>
+        </p:nvSpPr>
+        <p:spPr/>
+        <p:txBody>
+          <a:bodyPr/>
+          <a:lstStyle/>
+          <a:p>
+            <a:r>
+              <a:rPr lang="ru-RU"/>
+              <a:t>Система поиска шаблонов в данных GitHub</a:t>
+            </a:r>
+            <a:endParaRPr lang="ru-RU" dirty="0"/>
+          </a:p>
+        </p:txBody>
+      </p:sp>
+      <p:sp>
+        <p:nvSpPr>
+          <p:cNvPr id="2" name="Slide Number Placeholder 1">
+            <a:extLst>
+              <a:ext uri="{FF2B5EF4-FFF2-40B4-BE49-F238E27FC236}">
+                <a16:creationId xmlns:a16="http://schemas.microsoft.com/office/drawing/2014/main" id="{982ACC5C-F524-10AE-6654-11E912EC6F1C}"/>
+              </a:ext>
+            </a:extLst>
+          </p:cNvPr>
+          <p:cNvSpPr>
+            <a:spLocks noGrp="1"/>
+          </p:cNvSpPr>
+          <p:nvPr>
+            <p:ph type="sldNum" sz="quarter" idx="12"/>
+          </p:nvPr>
+        </p:nvSpPr>
+        <p:spPr/>
+        <p:txBody>
+          <a:bodyPr/>
+          <a:lstStyle/>
+          <a:p>
+            <a:fld id="{7EC09024-2147-4C4E-87D2-FF66EAF91B1A}" type="slidenum">
+              <a:rPr lang="ru-RU" smtClean="0"/>
+              <a:pPr/>
+              <a:t>2</a:t>
+            </a:fld>
+            <a:r>
+              <a:rPr lang="ru-RU" dirty="0"/>
+              <a:t>/21</a:t>
+            </a:r>
+          </a:p>
+        </p:txBody>
+      </p:sp>
+    </p:spTree>
+    <p:extLst>
+      <p:ext uri="{BB962C8B-B14F-4D97-AF65-F5344CB8AC3E}">
+        <p14:creationId xmlns:p14="http://schemas.microsoft.com/office/powerpoint/2010/main" val="2693812793"/>
+      </p:ext>
+    </p:extLst>
+  </p:cSld>
+  <p:clrMapOvr>
+    <a:masterClrMapping/>
+  </p:clrMapOvr>
+</p:sld>
+</file>
+
+<file path=ppt/slides/slide20.xml><?xml version="1.0" encoding="utf-8"?>
+<p:sld xmlns:a="http://schemas.openxmlformats.org/drawingml/2006/main" xmlns:r="http://schemas.openxmlformats.org/officeDocument/2006/relationships" xmlns:p="http://schemas.openxmlformats.org/presentationml/2006/main">
+  <p:cSld>
+    <p:spTree>
+      <p:nvGrpSpPr>
+        <p:cNvPr id="1" name=""/>
+        <p:cNvGrpSpPr/>
+        <p:nvPr/>
+      </p:nvGrpSpPr>
+      <p:grpSpPr>
+        <a:xfrm>
+          <a:off x="0" y="0"/>
+          <a:ext cx="0" cy="0"/>
+          <a:chOff x="0" y="0"/>
+          <a:chExt cx="0" cy="0"/>
+        </a:xfrm>
+      </p:grpSpPr>
+      <p:sp>
+        <p:nvSpPr>
+          <p:cNvPr id="3" name="TextBox 2">
+            <a:extLst>
+              <a:ext uri="{FF2B5EF4-FFF2-40B4-BE49-F238E27FC236}">
+                <a16:creationId xmlns:a16="http://schemas.microsoft.com/office/drawing/2014/main" id="{100B25DD-8CC4-48A0-A45C-A43464AB841D}"/>
+              </a:ext>
+            </a:extLst>
+          </p:cNvPr>
+          <p:cNvSpPr txBox="1"/>
+          <p:nvPr/>
+        </p:nvSpPr>
+        <p:spPr>
+          <a:xfrm>
+            <a:off x="0" y="73750"/>
+            <a:ext cx="12192000" cy="523220"/>
+          </a:xfrm>
+          <a:prstGeom prst="rect">
+            <a:avLst/>
+          </a:prstGeom>
+          <a:noFill/>
+        </p:spPr>
+        <p:txBody>
+          <a:bodyPr wrap="square">
+            <a:spAutoFit/>
+          </a:bodyPr>
+          <a:lstStyle/>
+          <a:p>
+            <a:pPr algn="ctr"/>
+            <a:r>
+              <a:rPr lang="ru-RU" sz="2800" b="1" dirty="0">
+                <a:latin typeface="Times New Roman" panose="02020603050405020304" pitchFamily="18" charset="0"/>
+                <a:cs typeface="Times New Roman" panose="02020603050405020304" pitchFamily="18" charset="0"/>
+              </a:rPr>
+              <a:t>АНАЛИЗ ПРЕДМЕТНОЙ ОБЛАСТИ</a:t>
+            </a:r>
+          </a:p>
+        </p:txBody>
+      </p:sp>
+      <p:sp>
+        <p:nvSpPr>
+          <p:cNvPr id="9" name="TextBox 8">
+            <a:extLst>
+              <a:ext uri="{FF2B5EF4-FFF2-40B4-BE49-F238E27FC236}">
+                <a16:creationId xmlns:a16="http://schemas.microsoft.com/office/drawing/2014/main" id="{E0FBD0C3-B3C9-495C-9842-EB1B6C680096}"/>
+              </a:ext>
+            </a:extLst>
+          </p:cNvPr>
+          <p:cNvSpPr txBox="1"/>
+          <p:nvPr/>
+        </p:nvSpPr>
+        <p:spPr>
+          <a:xfrm>
+            <a:off x="1351280" y="951431"/>
+            <a:ext cx="3139652" cy="461665"/>
+          </a:xfrm>
+          <a:prstGeom prst="rect">
+            <a:avLst/>
+          </a:prstGeom>
+          <a:noFill/>
+        </p:spPr>
+        <p:txBody>
+          <a:bodyPr wrap="square" rtlCol="0">
+            <a:spAutoFit/>
+          </a:bodyPr>
+          <a:lstStyle/>
+          <a:p>
+            <a:r>
+              <a:rPr lang="en-US" sz="2400" dirty="0" err="1">
+                <a:latin typeface="Times New Roman" panose="02020603050405020304" pitchFamily="18" charset="0"/>
+                <a:cs typeface="Times New Roman" panose="02020603050405020304" pitchFamily="18" charset="0"/>
+              </a:rPr>
+              <a:t>Clickhouse</a:t>
+            </a:r>
+            <a:r>
+              <a:rPr lang="en-US" sz="2400" dirty="0">
+                <a:latin typeface="Times New Roman" panose="02020603050405020304" pitchFamily="18" charset="0"/>
+                <a:cs typeface="Times New Roman" panose="02020603050405020304" pitchFamily="18" charset="0"/>
+              </a:rPr>
+              <a:t> playground</a:t>
+            </a:r>
+            <a:endParaRPr lang="ru-RU" sz="2400" dirty="0">
+              <a:latin typeface="Times New Roman" panose="02020603050405020304" pitchFamily="18" charset="0"/>
+              <a:cs typeface="Times New Roman" panose="02020603050405020304" pitchFamily="18" charset="0"/>
+            </a:endParaRPr>
+          </a:p>
+        </p:txBody>
+      </p:sp>
+      <p:sp>
+        <p:nvSpPr>
+          <p:cNvPr id="5" name="AutoShape 2" descr="{\displaystyle \mathrm {supp} (X)={\frac {|\{t\in T;X\subseteq t\}|}{|T|}}}"/>
+          <p:cNvSpPr>
+            <a:spLocks noChangeAspect="1" noChangeArrowheads="1"/>
+          </p:cNvSpPr>
+          <p:nvPr/>
+        </p:nvSpPr>
+        <p:spPr bwMode="auto">
+          <a:xfrm>
+            <a:off x="155575" y="-144463"/>
+            <a:ext cx="304800" cy="304801"/>
+          </a:xfrm>
+          <a:prstGeom prst="rect">
+            <a:avLst/>
+          </a:prstGeom>
+          <a:noFill/>
+          <a:extLst>
+            <a:ext uri="{909E8E84-426E-40DD-AFC4-6F175D3DCCD1}">
+              <a14:hiddenFill xmlns:a14="http://schemas.microsoft.com/office/drawing/2010/main">
+                <a:solidFill>
+                  <a:srgbClr val="FFFFFF"/>
+                </a:solidFill>
+              </a14:hiddenFill>
+            </a:ext>
+          </a:extLst>
+        </p:spPr>
+        <p:txBody>
+          <a:bodyPr vert="horz" wrap="square" lIns="91440" tIns="45720" rIns="91440" bIns="45720" numCol="1" anchor="t" anchorCtr="0" compatLnSpc="1">
+            <a:prstTxWarp prst="textNoShape">
+              <a:avLst/>
+            </a:prstTxWarp>
+          </a:bodyPr>
+          <a:lstStyle/>
+          <a:p>
+            <a:endParaRPr lang="ru-RU"/>
+          </a:p>
+        </p:txBody>
+      </p:sp>
+      <p:sp>
+        <p:nvSpPr>
+          <p:cNvPr id="6" name="AutoShape 4" descr="{\displaystyle \mathrm {supp} (X)={\frac {|\{t\in T;X\subseteq t\}|}{|T|}}}"/>
+          <p:cNvSpPr>
+            <a:spLocks noChangeAspect="1" noChangeArrowheads="1"/>
+          </p:cNvSpPr>
+          <p:nvPr/>
+        </p:nvSpPr>
+        <p:spPr bwMode="auto">
+          <a:xfrm>
+            <a:off x="307975" y="7937"/>
+            <a:ext cx="304800" cy="304801"/>
+          </a:xfrm>
+          <a:prstGeom prst="rect">
+            <a:avLst/>
+          </a:prstGeom>
+          <a:noFill/>
+          <a:extLst>
+            <a:ext uri="{909E8E84-426E-40DD-AFC4-6F175D3DCCD1}">
+              <a14:hiddenFill xmlns:a14="http://schemas.microsoft.com/office/drawing/2010/main">
+                <a:solidFill>
+                  <a:srgbClr val="FFFFFF"/>
+                </a:solidFill>
+              </a14:hiddenFill>
+            </a:ext>
+          </a:extLst>
+        </p:spPr>
+        <p:txBody>
+          <a:bodyPr vert="horz" wrap="square" lIns="91440" tIns="45720" rIns="91440" bIns="45720" numCol="1" anchor="t" anchorCtr="0" compatLnSpc="1">
+            <a:prstTxWarp prst="textNoShape">
+              <a:avLst/>
+            </a:prstTxWarp>
+          </a:bodyPr>
+          <a:lstStyle/>
+          <a:p>
+            <a:endParaRPr lang="ru-RU"/>
+          </a:p>
+        </p:txBody>
+      </p:sp>
+      <p:pic>
+        <p:nvPicPr>
+          <p:cNvPr id="7" name="Picture 6">
+            <a:extLst>
+              <a:ext uri="{FF2B5EF4-FFF2-40B4-BE49-F238E27FC236}">
+                <a16:creationId xmlns:a16="http://schemas.microsoft.com/office/drawing/2014/main" id="{CF72235F-5075-3EA0-DFA5-BBAC7F343781}"/>
+              </a:ext>
+            </a:extLst>
+          </p:cNvPr>
+          <p:cNvPicPr>
+            <a:picLocks noChangeAspect="1"/>
+          </p:cNvPicPr>
+          <p:nvPr/>
+        </p:nvPicPr>
+        <p:blipFill>
+          <a:blip r:embed="rId3"/>
+          <a:stretch>
+            <a:fillRect/>
+          </a:stretch>
+        </p:blipFill>
+        <p:spPr>
+          <a:xfrm>
+            <a:off x="1351280" y="1507988"/>
+            <a:ext cx="9489440" cy="4811532"/>
+          </a:xfrm>
+          <a:prstGeom prst="rect">
+            <a:avLst/>
+          </a:prstGeom>
+        </p:spPr>
+      </p:pic>
+      <p:sp>
+        <p:nvSpPr>
+          <p:cNvPr id="12" name="Footer Placeholder 11">
+            <a:extLst>
+              <a:ext uri="{FF2B5EF4-FFF2-40B4-BE49-F238E27FC236}">
+                <a16:creationId xmlns:a16="http://schemas.microsoft.com/office/drawing/2014/main" id="{2AD122A7-4BA9-6DED-10AE-114970F0E27A}"/>
+              </a:ext>
+            </a:extLst>
+          </p:cNvPr>
+          <p:cNvSpPr>
+            <a:spLocks noGrp="1"/>
+          </p:cNvSpPr>
+          <p:nvPr>
+            <p:ph type="ftr" sz="quarter" idx="11"/>
+          </p:nvPr>
+        </p:nvSpPr>
+        <p:spPr/>
+        <p:txBody>
+          <a:bodyPr/>
+          <a:lstStyle/>
+          <a:p>
+            <a:r>
+              <a:rPr lang="ru-RU"/>
+              <a:t>Система поиска шаблонов в данных GitHub</a:t>
+            </a:r>
+            <a:endParaRPr lang="ru-RU" dirty="0"/>
+          </a:p>
+        </p:txBody>
+      </p:sp>
+      <p:sp>
+        <p:nvSpPr>
+          <p:cNvPr id="2" name="Slide Number Placeholder 1">
+            <a:extLst>
+              <a:ext uri="{FF2B5EF4-FFF2-40B4-BE49-F238E27FC236}">
+                <a16:creationId xmlns:a16="http://schemas.microsoft.com/office/drawing/2014/main" id="{169980F4-B585-36B1-040B-89E1EC101CBD}"/>
+              </a:ext>
+            </a:extLst>
+          </p:cNvPr>
+          <p:cNvSpPr>
+            <a:spLocks noGrp="1"/>
+          </p:cNvSpPr>
+          <p:nvPr>
+            <p:ph type="sldNum" sz="quarter" idx="12"/>
+          </p:nvPr>
+        </p:nvSpPr>
+        <p:spPr/>
+        <p:txBody>
+          <a:bodyPr/>
+          <a:lstStyle/>
+          <a:p>
+            <a:fld id="{7EC09024-2147-4C4E-87D2-FF66EAF91B1A}" type="slidenum">
+              <a:rPr lang="ru-RU" smtClean="0"/>
+              <a:pPr/>
+              <a:t>20</a:t>
+            </a:fld>
+            <a:r>
+              <a:rPr lang="ru-RU" dirty="0"/>
+              <a:t>/21</a:t>
+            </a:r>
+          </a:p>
+        </p:txBody>
+      </p:sp>
+    </p:spTree>
+    <p:extLst>
+      <p:ext uri="{BB962C8B-B14F-4D97-AF65-F5344CB8AC3E}">
+        <p14:creationId xmlns:p14="http://schemas.microsoft.com/office/powerpoint/2010/main" val="2706223742"/>
+      </p:ext>
+    </p:extLst>
+  </p:cSld>
+  <p:clrMapOvr>
+    <a:masterClrMapping/>
+  </p:clrMapOvr>
+</p:sld>
+</file>
+
+<file path=ppt/slides/slide21.xml><?xml version="1.0" encoding="utf-8"?>
+<p:sld xmlns:a="http://schemas.openxmlformats.org/drawingml/2006/main" xmlns:r="http://schemas.openxmlformats.org/officeDocument/2006/relationships" xmlns:p="http://schemas.openxmlformats.org/presentationml/2006/main">
+  <p:cSld>
+    <p:spTree>
+      <p:nvGrpSpPr>
+        <p:cNvPr id="1" name=""/>
+        <p:cNvGrpSpPr/>
+        <p:nvPr/>
+      </p:nvGrpSpPr>
+      <p:grpSpPr>
+        <a:xfrm>
+          <a:off x="0" y="0"/>
+          <a:ext cx="0" cy="0"/>
+          <a:chOff x="0" y="0"/>
+          <a:chExt cx="0" cy="0"/>
+        </a:xfrm>
+      </p:grpSpPr>
+      <p:sp>
+        <p:nvSpPr>
+          <p:cNvPr id="3" name="TextBox 2">
+            <a:extLst>
+              <a:ext uri="{FF2B5EF4-FFF2-40B4-BE49-F238E27FC236}">
+                <a16:creationId xmlns:a16="http://schemas.microsoft.com/office/drawing/2014/main" id="{100B25DD-8CC4-48A0-A45C-A43464AB841D}"/>
+              </a:ext>
+            </a:extLst>
+          </p:cNvPr>
+          <p:cNvSpPr txBox="1"/>
+          <p:nvPr/>
+        </p:nvSpPr>
+        <p:spPr>
+          <a:xfrm>
+            <a:off x="-1" y="109525"/>
+            <a:ext cx="12192000" cy="523220"/>
+          </a:xfrm>
+          <a:prstGeom prst="rect">
+            <a:avLst/>
+          </a:prstGeom>
+          <a:noFill/>
+        </p:spPr>
+        <p:txBody>
+          <a:bodyPr wrap="square">
+            <a:spAutoFit/>
+          </a:bodyPr>
+          <a:lstStyle/>
+          <a:p>
+            <a:pPr algn="ctr"/>
+            <a:r>
+              <a:rPr lang="ru-RU" sz="2800" b="1" dirty="0">
+                <a:latin typeface="Times New Roman" panose="02020603050405020304" pitchFamily="18" charset="0"/>
+                <a:cs typeface="Times New Roman" panose="02020603050405020304" pitchFamily="18" charset="0"/>
+              </a:rPr>
+              <a:t>АНАЛИЗ ПРЕДМЕТНОЙ ОБЛАСТИ</a:t>
+            </a:r>
+          </a:p>
+        </p:txBody>
+      </p:sp>
+      <p:sp>
+        <p:nvSpPr>
+          <p:cNvPr id="9" name="TextBox 8">
+            <a:extLst>
+              <a:ext uri="{FF2B5EF4-FFF2-40B4-BE49-F238E27FC236}">
+                <a16:creationId xmlns:a16="http://schemas.microsoft.com/office/drawing/2014/main" id="{E0FBD0C3-B3C9-495C-9842-EB1B6C680096}"/>
+              </a:ext>
+            </a:extLst>
+          </p:cNvPr>
+          <p:cNvSpPr txBox="1"/>
+          <p:nvPr/>
+        </p:nvSpPr>
+        <p:spPr>
+          <a:xfrm>
+            <a:off x="1459651" y="1115957"/>
+            <a:ext cx="1582474" cy="461665"/>
+          </a:xfrm>
+          <a:prstGeom prst="rect">
+            <a:avLst/>
+          </a:prstGeom>
+          <a:noFill/>
+        </p:spPr>
+        <p:txBody>
+          <a:bodyPr wrap="square" rtlCol="0">
+            <a:spAutoFit/>
+          </a:bodyPr>
+          <a:lstStyle/>
+          <a:p>
+            <a:r>
+              <a:rPr lang="en-US" sz="2400" dirty="0" err="1">
+                <a:latin typeface="Times New Roman" panose="02020603050405020304" pitchFamily="18" charset="0"/>
+                <a:cs typeface="Times New Roman" panose="02020603050405020304" pitchFamily="18" charset="0"/>
+              </a:rPr>
+              <a:t>Github</a:t>
+            </a:r>
+            <a:r>
+              <a:rPr lang="en-US" sz="2400" dirty="0">
+                <a:latin typeface="Times New Roman" panose="02020603050405020304" pitchFamily="18" charset="0"/>
+                <a:cs typeface="Times New Roman" panose="02020603050405020304" pitchFamily="18" charset="0"/>
+              </a:rPr>
+              <a:t> API</a:t>
+            </a:r>
+            <a:endParaRPr lang="ru-RU" sz="2400" dirty="0">
+              <a:latin typeface="Times New Roman" panose="02020603050405020304" pitchFamily="18" charset="0"/>
+              <a:cs typeface="Times New Roman" panose="02020603050405020304" pitchFamily="18" charset="0"/>
+            </a:endParaRPr>
+          </a:p>
+        </p:txBody>
+      </p:sp>
+      <p:sp>
+        <p:nvSpPr>
+          <p:cNvPr id="5" name="AutoShape 2" descr="{\displaystyle \mathrm {supp} (X)={\frac {|\{t\in T;X\subseteq t\}|}{|T|}}}"/>
+          <p:cNvSpPr>
+            <a:spLocks noChangeAspect="1" noChangeArrowheads="1"/>
+          </p:cNvSpPr>
+          <p:nvPr/>
+        </p:nvSpPr>
+        <p:spPr bwMode="auto">
+          <a:xfrm>
+            <a:off x="155575" y="-144463"/>
+            <a:ext cx="304800" cy="304801"/>
+          </a:xfrm>
+          <a:prstGeom prst="rect">
+            <a:avLst/>
+          </a:prstGeom>
+          <a:noFill/>
+          <a:extLst>
+            <a:ext uri="{909E8E84-426E-40DD-AFC4-6F175D3DCCD1}">
+              <a14:hiddenFill xmlns:a14="http://schemas.microsoft.com/office/drawing/2010/main">
+                <a:solidFill>
+                  <a:srgbClr val="FFFFFF"/>
+                </a:solidFill>
+              </a14:hiddenFill>
+            </a:ext>
+          </a:extLst>
+        </p:spPr>
+        <p:txBody>
+          <a:bodyPr vert="horz" wrap="square" lIns="91440" tIns="45720" rIns="91440" bIns="45720" numCol="1" anchor="t" anchorCtr="0" compatLnSpc="1">
+            <a:prstTxWarp prst="textNoShape">
+              <a:avLst/>
+            </a:prstTxWarp>
+          </a:bodyPr>
+          <a:lstStyle/>
+          <a:p>
+            <a:endParaRPr lang="ru-RU"/>
+          </a:p>
+        </p:txBody>
+      </p:sp>
+      <p:sp>
+        <p:nvSpPr>
+          <p:cNvPr id="6" name="AutoShape 4" descr="{\displaystyle \mathrm {supp} (X)={\frac {|\{t\in T;X\subseteq t\}|}{|T|}}}"/>
+          <p:cNvSpPr>
+            <a:spLocks noChangeAspect="1" noChangeArrowheads="1"/>
+          </p:cNvSpPr>
+          <p:nvPr/>
+        </p:nvSpPr>
+        <p:spPr bwMode="auto">
+          <a:xfrm>
+            <a:off x="307975" y="7937"/>
+            <a:ext cx="304800" cy="304801"/>
+          </a:xfrm>
+          <a:prstGeom prst="rect">
+            <a:avLst/>
+          </a:prstGeom>
+          <a:noFill/>
+          <a:extLst>
+            <a:ext uri="{909E8E84-426E-40DD-AFC4-6F175D3DCCD1}">
+              <a14:hiddenFill xmlns:a14="http://schemas.microsoft.com/office/drawing/2010/main">
+                <a:solidFill>
+                  <a:srgbClr val="FFFFFF"/>
+                </a:solidFill>
+              </a14:hiddenFill>
+            </a:ext>
+          </a:extLst>
+        </p:spPr>
+        <p:txBody>
+          <a:bodyPr vert="horz" wrap="square" lIns="91440" tIns="45720" rIns="91440" bIns="45720" numCol="1" anchor="t" anchorCtr="0" compatLnSpc="1">
+            <a:prstTxWarp prst="textNoShape">
+              <a:avLst/>
+            </a:prstTxWarp>
+          </a:bodyPr>
+          <a:lstStyle/>
+          <a:p>
+            <a:endParaRPr lang="ru-RU"/>
+          </a:p>
+        </p:txBody>
+      </p:sp>
+      <p:pic>
+        <p:nvPicPr>
+          <p:cNvPr id="4" name="Picture 3">
+            <a:extLst>
+              <a:ext uri="{FF2B5EF4-FFF2-40B4-BE49-F238E27FC236}">
+                <a16:creationId xmlns:a16="http://schemas.microsoft.com/office/drawing/2014/main" id="{361471FA-019D-0B87-136C-BDEC343CB9CF}"/>
+              </a:ext>
+            </a:extLst>
+          </p:cNvPr>
+          <p:cNvPicPr>
+            <a:picLocks noChangeAspect="1"/>
+          </p:cNvPicPr>
+          <p:nvPr/>
+        </p:nvPicPr>
+        <p:blipFill>
+          <a:blip r:embed="rId3"/>
+          <a:stretch>
+            <a:fillRect/>
+          </a:stretch>
+        </p:blipFill>
+        <p:spPr>
+          <a:xfrm>
+            <a:off x="1459651" y="1636018"/>
+            <a:ext cx="9272695" cy="4643677"/>
+          </a:xfrm>
+          <a:prstGeom prst="rect">
+            <a:avLst/>
+          </a:prstGeom>
+        </p:spPr>
+      </p:pic>
+      <p:sp>
+        <p:nvSpPr>
+          <p:cNvPr id="8" name="Footer Placeholder 7">
+            <a:extLst>
+              <a:ext uri="{FF2B5EF4-FFF2-40B4-BE49-F238E27FC236}">
+                <a16:creationId xmlns:a16="http://schemas.microsoft.com/office/drawing/2014/main" id="{9952E16D-C454-702C-877A-E1FA417E7E8C}"/>
+              </a:ext>
+            </a:extLst>
+          </p:cNvPr>
+          <p:cNvSpPr>
+            <a:spLocks noGrp="1"/>
+          </p:cNvSpPr>
+          <p:nvPr>
+            <p:ph type="ftr" sz="quarter" idx="11"/>
+          </p:nvPr>
+        </p:nvSpPr>
+        <p:spPr/>
+        <p:txBody>
+          <a:bodyPr/>
+          <a:lstStyle/>
+          <a:p>
+            <a:r>
+              <a:rPr lang="ru-RU"/>
+              <a:t>Система поиска шаблонов в данных GitHub</a:t>
+            </a:r>
+            <a:endParaRPr lang="ru-RU" dirty="0"/>
+          </a:p>
+        </p:txBody>
+      </p:sp>
+      <p:sp>
+        <p:nvSpPr>
+          <p:cNvPr id="2" name="Slide Number Placeholder 1">
+            <a:extLst>
+              <a:ext uri="{FF2B5EF4-FFF2-40B4-BE49-F238E27FC236}">
+                <a16:creationId xmlns:a16="http://schemas.microsoft.com/office/drawing/2014/main" id="{B7324E1D-788C-3E3F-4369-43CAD315837D}"/>
+              </a:ext>
+            </a:extLst>
+          </p:cNvPr>
+          <p:cNvSpPr>
+            <a:spLocks noGrp="1"/>
+          </p:cNvSpPr>
+          <p:nvPr>
+            <p:ph type="sldNum" sz="quarter" idx="12"/>
+          </p:nvPr>
+        </p:nvSpPr>
+        <p:spPr/>
+        <p:txBody>
+          <a:bodyPr/>
+          <a:lstStyle/>
+          <a:p>
+            <a:fld id="{7EC09024-2147-4C4E-87D2-FF66EAF91B1A}" type="slidenum">
+              <a:rPr lang="ru-RU" smtClean="0"/>
+              <a:pPr/>
+              <a:t>21</a:t>
+            </a:fld>
+            <a:r>
+              <a:rPr lang="ru-RU" dirty="0"/>
+              <a:t>/21</a:t>
+            </a:r>
+          </a:p>
+        </p:txBody>
+      </p:sp>
+    </p:spTree>
+    <p:extLst>
+      <p:ext uri="{BB962C8B-B14F-4D97-AF65-F5344CB8AC3E}">
+        <p14:creationId xmlns:p14="http://schemas.microsoft.com/office/powerpoint/2010/main" val="3961049603"/>
+      </p:ext>
+    </p:extLst>
+  </p:cSld>
+  <p:clrMapOvr>
+    <a:masterClrMapping/>
+  </p:clrMapOvr>
+</p:sld>
+</file>
+
+<file path=ppt/slides/slide3.xml><?xml version="1.0" encoding="utf-8"?>
+<p:sld xmlns:a="http://schemas.openxmlformats.org/drawingml/2006/main" xmlns:r="http://schemas.openxmlformats.org/officeDocument/2006/relationships" xmlns:p="http://schemas.openxmlformats.org/presentationml/2006/main">
+  <p:cSld>
+    <p:spTree>
+      <p:nvGrpSpPr>
+        <p:cNvPr id="1" name=""/>
+        <p:cNvGrpSpPr/>
+        <p:nvPr/>
+      </p:nvGrpSpPr>
+      <p:grpSpPr>
+        <a:xfrm>
+          <a:off x="0" y="0"/>
+          <a:ext cx="0" cy="0"/>
+          <a:chOff x="0" y="0"/>
+          <a:chExt cx="0" cy="0"/>
+        </a:xfrm>
+      </p:grpSpPr>
+      <p:sp>
+        <p:nvSpPr>
+          <p:cNvPr id="3" name="TextBox 2">
+            <a:extLst>
+              <a:ext uri="{FF2B5EF4-FFF2-40B4-BE49-F238E27FC236}">
+                <a16:creationId xmlns:a16="http://schemas.microsoft.com/office/drawing/2014/main" id="{100B25DD-8CC4-48A0-A45C-A43464AB841D}"/>
+              </a:ext>
+            </a:extLst>
+          </p:cNvPr>
+          <p:cNvSpPr txBox="1"/>
+          <p:nvPr/>
+        </p:nvSpPr>
+        <p:spPr>
+          <a:xfrm>
+            <a:off x="0" y="0"/>
+            <a:ext cx="12192000" cy="523220"/>
+          </a:xfrm>
+          <a:prstGeom prst="rect">
+            <a:avLst/>
+          </a:prstGeom>
+          <a:noFill/>
+        </p:spPr>
+        <p:txBody>
+          <a:bodyPr wrap="square">
+            <a:spAutoFit/>
+          </a:bodyPr>
+          <a:lstStyle/>
+          <a:p>
+            <a:pPr algn="ctr"/>
+            <a:r>
+              <a:rPr lang="ru-RU" sz="2800" b="1" dirty="0">
+                <a:latin typeface="Times New Roman" panose="02020603050405020304" pitchFamily="18" charset="0"/>
+                <a:cs typeface="Times New Roman" panose="02020603050405020304" pitchFamily="18" charset="0"/>
+              </a:rPr>
               <a:t>ЦЕЛЬ И ЗАДАЧИ</a:t>
             </a:r>
           </a:p>
@@ -12521,7 +10913,7 @@
             <a:fld id="{7EC09024-2147-4C4E-87D2-FF66EAF91B1A}" type="slidenum">
               <a:rPr lang="ru-RU" smtClean="0"/>
               <a:pPr/>
-              <a:t>5</a:t>
+              <a:t>3</a:t>
             </a:fld>
             <a:r>
               <a:rPr lang="ru-RU" dirty="0"/>
@@ -12543,7 +10935,7 @@
 </p:sld>
 </file>
 
-<file path=ppt/slides/slide6.xml><?xml version="1.0" encoding="utf-8"?>
+<file path=ppt/slides/slide4.xml><?xml version="1.0" encoding="utf-8"?>
 <p:sld xmlns:a="http://schemas.openxmlformats.org/drawingml/2006/main" xmlns:r="http://schemas.openxmlformats.org/officeDocument/2006/relationships" xmlns:p="http://schemas.openxmlformats.org/presentationml/2006/main">
   <p:cSld>
     <p:spTree>
@@ -12807,7 +11199,7 @@
             <a:fld id="{7EC09024-2147-4C4E-87D2-FF66EAF91B1A}" type="slidenum">
               <a:rPr lang="ru-RU" smtClean="0"/>
               <a:pPr/>
-              <a:t>6</a:t>
+              <a:t>4</a:t>
             </a:fld>
             <a:r>
               <a:rPr lang="ru-RU" dirty="0"/>
@@ -12829,7 +11221,7 @@
 </p:sld>
 </file>
 
-<file path=ppt/slides/slide7.xml><?xml version="1.0" encoding="utf-8"?>
+<file path=ppt/slides/slide5.xml><?xml version="1.0" encoding="utf-8"?>
 <p:sld xmlns:a="http://schemas.openxmlformats.org/drawingml/2006/main" xmlns:r="http://schemas.openxmlformats.org/officeDocument/2006/relationships" xmlns:p="http://schemas.openxmlformats.org/presentationml/2006/main">
   <p:cSld>
     <p:spTree>
@@ -12848,206 +11240,10 @@
       </p:grpSpPr>
       <p:sp>
         <p:nvSpPr>
-          <p:cNvPr id="3" name="TextBox 2">
-            <a:extLst>
-              <a:ext uri="{FF2B5EF4-FFF2-40B4-BE49-F238E27FC236}">
-                <a16:creationId xmlns:a16="http://schemas.microsoft.com/office/drawing/2014/main" id="{100B25DD-8CC4-48A0-A45C-A43464AB841D}"/>
-              </a:ext>
-            </a:extLst>
-          </p:cNvPr>
-          <p:cNvSpPr txBox="1"/>
-          <p:nvPr/>
-        </p:nvSpPr>
-        <p:spPr>
-          <a:xfrm>
-            <a:off x="0" y="73750"/>
-            <a:ext cx="12192000" cy="523220"/>
-          </a:xfrm>
-          <a:prstGeom prst="rect">
-            <a:avLst/>
-          </a:prstGeom>
-          <a:noFill/>
-        </p:spPr>
-        <p:txBody>
-          <a:bodyPr wrap="square">
-            <a:spAutoFit/>
-          </a:bodyPr>
-          <a:lstStyle/>
-          <a:p>
-            <a:pPr algn="ctr"/>
-            <a:r>
-              <a:rPr lang="ru-RU" sz="2800" b="1" dirty="0">
-                <a:latin typeface="Times New Roman" panose="02020603050405020304" pitchFamily="18" charset="0"/>
-                <a:cs typeface="Times New Roman" panose="02020603050405020304" pitchFamily="18" charset="0"/>
-              </a:rPr>
-              <a:t>АНАЛИЗ ПРЕДМЕТНОЙ ОБЛАСТИ</a:t>
-            </a:r>
-          </a:p>
-        </p:txBody>
-      </p:sp>
-      <p:sp>
-        <p:nvSpPr>
-          <p:cNvPr id="9" name="TextBox 8">
-            <a:extLst>
-              <a:ext uri="{FF2B5EF4-FFF2-40B4-BE49-F238E27FC236}">
-                <a16:creationId xmlns:a16="http://schemas.microsoft.com/office/drawing/2014/main" id="{E0FBD0C3-B3C9-495C-9842-EB1B6C680096}"/>
-              </a:ext>
-            </a:extLst>
-          </p:cNvPr>
-          <p:cNvSpPr txBox="1"/>
-          <p:nvPr/>
-        </p:nvSpPr>
-        <p:spPr>
-          <a:xfrm>
-            <a:off x="1351280" y="951431"/>
-            <a:ext cx="3139652" cy="461665"/>
-          </a:xfrm>
-          <a:prstGeom prst="rect">
-            <a:avLst/>
-          </a:prstGeom>
-          <a:noFill/>
-        </p:spPr>
-        <p:txBody>
-          <a:bodyPr wrap="square" rtlCol="0">
-            <a:spAutoFit/>
-          </a:bodyPr>
-          <a:lstStyle/>
-          <a:p>
-            <a:r>
-              <a:rPr lang="en-US" sz="2400" dirty="0" err="1">
-                <a:latin typeface="Times New Roman" panose="02020603050405020304" pitchFamily="18" charset="0"/>
-                <a:cs typeface="Times New Roman" panose="02020603050405020304" pitchFamily="18" charset="0"/>
-              </a:rPr>
-              <a:t>Clickhouse</a:t>
-            </a:r>
-            <a:r>
-              <a:rPr lang="en-US" sz="2400" dirty="0">
-                <a:latin typeface="Times New Roman" panose="02020603050405020304" pitchFamily="18" charset="0"/>
-                <a:cs typeface="Times New Roman" panose="02020603050405020304" pitchFamily="18" charset="0"/>
-              </a:rPr>
-              <a:t> playground</a:t>
-            </a:r>
-            <a:endParaRPr lang="ru-RU" sz="2400" dirty="0">
-              <a:latin typeface="Times New Roman" panose="02020603050405020304" pitchFamily="18" charset="0"/>
-              <a:cs typeface="Times New Roman" panose="02020603050405020304" pitchFamily="18" charset="0"/>
-            </a:endParaRPr>
-          </a:p>
-        </p:txBody>
-      </p:sp>
-      <p:sp>
-        <p:nvSpPr>
-          <p:cNvPr id="5" name="AutoShape 2" descr="{\displaystyle \mathrm {supp} (X)={\frac {|\{t\in T;X\subseteq t\}|}{|T|}}}"/>
-          <p:cNvSpPr>
-            <a:spLocks noChangeAspect="1" noChangeArrowheads="1"/>
-          </p:cNvSpPr>
-          <p:nvPr/>
-        </p:nvSpPr>
-        <p:spPr bwMode="auto">
-          <a:xfrm>
-            <a:off x="155575" y="-144463"/>
-            <a:ext cx="304800" cy="304801"/>
-          </a:xfrm>
-          <a:prstGeom prst="rect">
-            <a:avLst/>
-          </a:prstGeom>
-          <a:noFill/>
-          <a:extLst>
-            <a:ext uri="{909E8E84-426E-40DD-AFC4-6F175D3DCCD1}">
-              <a14:hiddenFill xmlns:a14="http://schemas.microsoft.com/office/drawing/2010/main">
-                <a:solidFill>
-                  <a:srgbClr val="FFFFFF"/>
-                </a:solidFill>
-              </a14:hiddenFill>
-            </a:ext>
-          </a:extLst>
-        </p:spPr>
-        <p:txBody>
-          <a:bodyPr vert="horz" wrap="square" lIns="91440" tIns="45720" rIns="91440" bIns="45720" numCol="1" anchor="t" anchorCtr="0" compatLnSpc="1">
-            <a:prstTxWarp prst="textNoShape">
-              <a:avLst/>
-            </a:prstTxWarp>
-          </a:bodyPr>
-          <a:lstStyle/>
-          <a:p>
-            <a:endParaRPr lang="ru-RU"/>
-          </a:p>
-        </p:txBody>
-      </p:sp>
-      <p:sp>
-        <p:nvSpPr>
-          <p:cNvPr id="6" name="AutoShape 4" descr="{\displaystyle \mathrm {supp} (X)={\frac {|\{t\in T;X\subseteq t\}|}{|T|}}}"/>
-          <p:cNvSpPr>
-            <a:spLocks noChangeAspect="1" noChangeArrowheads="1"/>
-          </p:cNvSpPr>
-          <p:nvPr/>
-        </p:nvSpPr>
-        <p:spPr bwMode="auto">
-          <a:xfrm>
-            <a:off x="307975" y="7937"/>
-            <a:ext cx="304800" cy="304801"/>
-          </a:xfrm>
-          <a:prstGeom prst="rect">
-            <a:avLst/>
-          </a:prstGeom>
-          <a:noFill/>
-          <a:extLst>
-            <a:ext uri="{909E8E84-426E-40DD-AFC4-6F175D3DCCD1}">
-              <a14:hiddenFill xmlns:a14="http://schemas.microsoft.com/office/drawing/2010/main">
-                <a:solidFill>
-                  <a:srgbClr val="FFFFFF"/>
-                </a:solidFill>
-              </a14:hiddenFill>
-            </a:ext>
-          </a:extLst>
-        </p:spPr>
-        <p:txBody>
-          <a:bodyPr vert="horz" wrap="square" lIns="91440" tIns="45720" rIns="91440" bIns="45720" numCol="1" anchor="t" anchorCtr="0" compatLnSpc="1">
-            <a:prstTxWarp prst="textNoShape">
-              <a:avLst/>
-            </a:prstTxWarp>
-          </a:bodyPr>
-          <a:lstStyle/>
-          <a:p>
-            <a:endParaRPr lang="ru-RU"/>
-          </a:p>
-        </p:txBody>
-      </p:sp>
-      <p:pic>
-        <p:nvPicPr>
-          <p:cNvPr id="7" name="Picture 6">
-            <a:extLst>
-              <a:ext uri="{FF2B5EF4-FFF2-40B4-BE49-F238E27FC236}">
-                <a16:creationId xmlns:a16="http://schemas.microsoft.com/office/drawing/2014/main" id="{CF72235F-5075-3EA0-DFA5-BBAC7F343781}"/>
-              </a:ext>
-            </a:extLst>
-          </p:cNvPr>
-          <p:cNvPicPr>
-            <a:picLocks noChangeAspect="1"/>
-          </p:cNvPicPr>
-          <p:nvPr/>
-        </p:nvPicPr>
-        <p:blipFill>
-          <a:blip r:embed="rId3"/>
-          <a:stretch>
-            <a:fillRect/>
-          </a:stretch>
-        </p:blipFill>
-        <p:spPr>
-          <a:xfrm>
-            <a:off x="1351280" y="1507988"/>
-            <a:ext cx="9489440" cy="4811532"/>
-          </a:xfrm>
-          <a:prstGeom prst="rect">
-            <a:avLst/>
-          </a:prstGeom>
-        </p:spPr>
-      </p:pic>
-      <p:sp>
-        <p:nvSpPr>
-          <p:cNvPr id="12" name="Footer Placeholder 11">
-            <a:extLst>
-              <a:ext uri="{FF2B5EF4-FFF2-40B4-BE49-F238E27FC236}">
-                <a16:creationId xmlns:a16="http://schemas.microsoft.com/office/drawing/2014/main" id="{2AD122A7-4BA9-6DED-10AE-114970F0E27A}"/>
+          <p:cNvPr id="2" name="Footer Placeholder 1">
+            <a:extLst>
+              <a:ext uri="{FF2B5EF4-FFF2-40B4-BE49-F238E27FC236}">
+                <a16:creationId xmlns:a16="http://schemas.microsoft.com/office/drawing/2014/main" id="{BC39E563-E5EC-7AAC-95F3-EB89210C038B}"/>
               </a:ext>
             </a:extLst>
           </p:cNvPr>
@@ -13073,10 +11269,10 @@
       </p:sp>
       <p:sp>
         <p:nvSpPr>
-          <p:cNvPr id="2" name="Slide Number Placeholder 1">
-            <a:extLst>
-              <a:ext uri="{FF2B5EF4-FFF2-40B4-BE49-F238E27FC236}">
-                <a16:creationId xmlns:a16="http://schemas.microsoft.com/office/drawing/2014/main" id="{169980F4-B585-36B1-040B-89E1EC101CBD}"/>
+          <p:cNvPr id="3" name="Slide Number Placeholder 2">
+            <a:extLst>
+              <a:ext uri="{FF2B5EF4-FFF2-40B4-BE49-F238E27FC236}">
+                <a16:creationId xmlns:a16="http://schemas.microsoft.com/office/drawing/2014/main" id="{6CE8525D-76BF-D2B5-F66E-1F8F6317FFAE}"/>
               </a:ext>
             </a:extLst>
           </p:cNvPr>
@@ -13095,387 +11291,7 @@
             <a:fld id="{7EC09024-2147-4C4E-87D2-FF66EAF91B1A}" type="slidenum">
               <a:rPr lang="ru-RU" smtClean="0"/>
               <a:pPr/>
-              <a:t>7</a:t>
-            </a:fld>
-            <a:r>
-              <a:rPr lang="ru-RU" dirty="0"/>
-              <a:t>/21</a:t>
-            </a:r>
-          </a:p>
-        </p:txBody>
-      </p:sp>
-    </p:spTree>
-    <p:extLst>
-      <p:ext uri="{BB962C8B-B14F-4D97-AF65-F5344CB8AC3E}">
-        <p14:creationId xmlns:p14="http://schemas.microsoft.com/office/powerpoint/2010/main" val="2706223742"/>
-      </p:ext>
-    </p:extLst>
-  </p:cSld>
-  <p:clrMapOvr>
-    <a:masterClrMapping/>
-  </p:clrMapOvr>
-</p:sld>
-</file>
-
-<file path=ppt/slides/slide8.xml><?xml version="1.0" encoding="utf-8"?>
-<p:sld xmlns:a="http://schemas.openxmlformats.org/drawingml/2006/main" xmlns:r="http://schemas.openxmlformats.org/officeDocument/2006/relationships" xmlns:p="http://schemas.openxmlformats.org/presentationml/2006/main">
-  <p:cSld>
-    <p:spTree>
-      <p:nvGrpSpPr>
-        <p:cNvPr id="1" name=""/>
-        <p:cNvGrpSpPr/>
-        <p:nvPr/>
-      </p:nvGrpSpPr>
-      <p:grpSpPr>
-        <a:xfrm>
-          <a:off x="0" y="0"/>
-          <a:ext cx="0" cy="0"/>
-          <a:chOff x="0" y="0"/>
-          <a:chExt cx="0" cy="0"/>
-        </a:xfrm>
-      </p:grpSpPr>
-      <p:sp>
-        <p:nvSpPr>
-          <p:cNvPr id="3" name="TextBox 2">
-            <a:extLst>
-              <a:ext uri="{FF2B5EF4-FFF2-40B4-BE49-F238E27FC236}">
-                <a16:creationId xmlns:a16="http://schemas.microsoft.com/office/drawing/2014/main" id="{100B25DD-8CC4-48A0-A45C-A43464AB841D}"/>
-              </a:ext>
-            </a:extLst>
-          </p:cNvPr>
-          <p:cNvSpPr txBox="1"/>
-          <p:nvPr/>
-        </p:nvSpPr>
-        <p:spPr>
-          <a:xfrm>
-            <a:off x="-1" y="109525"/>
-            <a:ext cx="12192000" cy="523220"/>
-          </a:xfrm>
-          <a:prstGeom prst="rect">
-            <a:avLst/>
-          </a:prstGeom>
-          <a:noFill/>
-        </p:spPr>
-        <p:txBody>
-          <a:bodyPr wrap="square">
-            <a:spAutoFit/>
-          </a:bodyPr>
-          <a:lstStyle/>
-          <a:p>
-            <a:pPr algn="ctr"/>
-            <a:r>
-              <a:rPr lang="ru-RU" sz="2800" b="1" dirty="0">
-                <a:latin typeface="Times New Roman" panose="02020603050405020304" pitchFamily="18" charset="0"/>
-                <a:cs typeface="Times New Roman" panose="02020603050405020304" pitchFamily="18" charset="0"/>
-              </a:rPr>
-              <a:t>АНАЛИЗ ПРЕДМЕТНОЙ ОБЛАСТИ</a:t>
-            </a:r>
-          </a:p>
-        </p:txBody>
-      </p:sp>
-      <p:sp>
-        <p:nvSpPr>
-          <p:cNvPr id="9" name="TextBox 8">
-            <a:extLst>
-              <a:ext uri="{FF2B5EF4-FFF2-40B4-BE49-F238E27FC236}">
-                <a16:creationId xmlns:a16="http://schemas.microsoft.com/office/drawing/2014/main" id="{E0FBD0C3-B3C9-495C-9842-EB1B6C680096}"/>
-              </a:ext>
-            </a:extLst>
-          </p:cNvPr>
-          <p:cNvSpPr txBox="1"/>
-          <p:nvPr/>
-        </p:nvSpPr>
-        <p:spPr>
-          <a:xfrm>
-            <a:off x="1459651" y="1115957"/>
-            <a:ext cx="1582474" cy="461665"/>
-          </a:xfrm>
-          <a:prstGeom prst="rect">
-            <a:avLst/>
-          </a:prstGeom>
-          <a:noFill/>
-        </p:spPr>
-        <p:txBody>
-          <a:bodyPr wrap="square" rtlCol="0">
-            <a:spAutoFit/>
-          </a:bodyPr>
-          <a:lstStyle/>
-          <a:p>
-            <a:r>
-              <a:rPr lang="en-US" sz="2400" dirty="0" err="1">
-                <a:latin typeface="Times New Roman" panose="02020603050405020304" pitchFamily="18" charset="0"/>
-                <a:cs typeface="Times New Roman" panose="02020603050405020304" pitchFamily="18" charset="0"/>
-              </a:rPr>
-              <a:t>Github</a:t>
-            </a:r>
-            <a:r>
-              <a:rPr lang="en-US" sz="2400" dirty="0">
-                <a:latin typeface="Times New Roman" panose="02020603050405020304" pitchFamily="18" charset="0"/>
-                <a:cs typeface="Times New Roman" panose="02020603050405020304" pitchFamily="18" charset="0"/>
-              </a:rPr>
-              <a:t> API</a:t>
-            </a:r>
-            <a:endParaRPr lang="ru-RU" sz="2400" dirty="0">
-              <a:latin typeface="Times New Roman" panose="02020603050405020304" pitchFamily="18" charset="0"/>
-              <a:cs typeface="Times New Roman" panose="02020603050405020304" pitchFamily="18" charset="0"/>
-            </a:endParaRPr>
-          </a:p>
-        </p:txBody>
-      </p:sp>
-      <p:sp>
-        <p:nvSpPr>
-          <p:cNvPr id="5" name="AutoShape 2" descr="{\displaystyle \mathrm {supp} (X)={\frac {|\{t\in T;X\subseteq t\}|}{|T|}}}"/>
-          <p:cNvSpPr>
-            <a:spLocks noChangeAspect="1" noChangeArrowheads="1"/>
-          </p:cNvSpPr>
-          <p:nvPr/>
-        </p:nvSpPr>
-        <p:spPr bwMode="auto">
-          <a:xfrm>
-            <a:off x="155575" y="-144463"/>
-            <a:ext cx="304800" cy="304801"/>
-          </a:xfrm>
-          <a:prstGeom prst="rect">
-            <a:avLst/>
-          </a:prstGeom>
-          <a:noFill/>
-          <a:extLst>
-            <a:ext uri="{909E8E84-426E-40DD-AFC4-6F175D3DCCD1}">
-              <a14:hiddenFill xmlns:a14="http://schemas.microsoft.com/office/drawing/2010/main">
-                <a:solidFill>
-                  <a:srgbClr val="FFFFFF"/>
-                </a:solidFill>
-              </a14:hiddenFill>
-            </a:ext>
-          </a:extLst>
-        </p:spPr>
-        <p:txBody>
-          <a:bodyPr vert="horz" wrap="square" lIns="91440" tIns="45720" rIns="91440" bIns="45720" numCol="1" anchor="t" anchorCtr="0" compatLnSpc="1">
-            <a:prstTxWarp prst="textNoShape">
-              <a:avLst/>
-            </a:prstTxWarp>
-          </a:bodyPr>
-          <a:lstStyle/>
-          <a:p>
-            <a:endParaRPr lang="ru-RU"/>
-          </a:p>
-        </p:txBody>
-      </p:sp>
-      <p:sp>
-        <p:nvSpPr>
-          <p:cNvPr id="6" name="AutoShape 4" descr="{\displaystyle \mathrm {supp} (X)={\frac {|\{t\in T;X\subseteq t\}|}{|T|}}}"/>
-          <p:cNvSpPr>
-            <a:spLocks noChangeAspect="1" noChangeArrowheads="1"/>
-          </p:cNvSpPr>
-          <p:nvPr/>
-        </p:nvSpPr>
-        <p:spPr bwMode="auto">
-          <a:xfrm>
-            <a:off x="307975" y="7937"/>
-            <a:ext cx="304800" cy="304801"/>
-          </a:xfrm>
-          <a:prstGeom prst="rect">
-            <a:avLst/>
-          </a:prstGeom>
-          <a:noFill/>
-          <a:extLst>
-            <a:ext uri="{909E8E84-426E-40DD-AFC4-6F175D3DCCD1}">
-              <a14:hiddenFill xmlns:a14="http://schemas.microsoft.com/office/drawing/2010/main">
-                <a:solidFill>
-                  <a:srgbClr val="FFFFFF"/>
-                </a:solidFill>
-              </a14:hiddenFill>
-            </a:ext>
-          </a:extLst>
-        </p:spPr>
-        <p:txBody>
-          <a:bodyPr vert="horz" wrap="square" lIns="91440" tIns="45720" rIns="91440" bIns="45720" numCol="1" anchor="t" anchorCtr="0" compatLnSpc="1">
-            <a:prstTxWarp prst="textNoShape">
-              <a:avLst/>
-            </a:prstTxWarp>
-          </a:bodyPr>
-          <a:lstStyle/>
-          <a:p>
-            <a:endParaRPr lang="ru-RU"/>
-          </a:p>
-        </p:txBody>
-      </p:sp>
-      <p:pic>
-        <p:nvPicPr>
-          <p:cNvPr id="4" name="Picture 3">
-            <a:extLst>
-              <a:ext uri="{FF2B5EF4-FFF2-40B4-BE49-F238E27FC236}">
-                <a16:creationId xmlns:a16="http://schemas.microsoft.com/office/drawing/2014/main" id="{361471FA-019D-0B87-136C-BDEC343CB9CF}"/>
-              </a:ext>
-            </a:extLst>
-          </p:cNvPr>
-          <p:cNvPicPr>
-            <a:picLocks noChangeAspect="1"/>
-          </p:cNvPicPr>
-          <p:nvPr/>
-        </p:nvPicPr>
-        <p:blipFill>
-          <a:blip r:embed="rId3"/>
-          <a:stretch>
-            <a:fillRect/>
-          </a:stretch>
-        </p:blipFill>
-        <p:spPr>
-          <a:xfrm>
-            <a:off x="1459651" y="1636018"/>
-            <a:ext cx="9272695" cy="4643677"/>
-          </a:xfrm>
-          <a:prstGeom prst="rect">
-            <a:avLst/>
-          </a:prstGeom>
-        </p:spPr>
-      </p:pic>
-      <p:sp>
-        <p:nvSpPr>
-          <p:cNvPr id="8" name="Footer Placeholder 7">
-            <a:extLst>
-              <a:ext uri="{FF2B5EF4-FFF2-40B4-BE49-F238E27FC236}">
-                <a16:creationId xmlns:a16="http://schemas.microsoft.com/office/drawing/2014/main" id="{9952E16D-C454-702C-877A-E1FA417E7E8C}"/>
-              </a:ext>
-            </a:extLst>
-          </p:cNvPr>
-          <p:cNvSpPr>
-            <a:spLocks noGrp="1"/>
-          </p:cNvSpPr>
-          <p:nvPr>
-            <p:ph type="ftr" sz="quarter" idx="11"/>
-          </p:nvPr>
-        </p:nvSpPr>
-        <p:spPr/>
-        <p:txBody>
-          <a:bodyPr/>
-          <a:lstStyle/>
-          <a:p>
-            <a:r>
-              <a:rPr lang="ru-RU"/>
-              <a:t>Система поиска шаблонов в данных GitHub</a:t>
-            </a:r>
-            <a:endParaRPr lang="ru-RU" dirty="0"/>
-          </a:p>
-        </p:txBody>
-      </p:sp>
-      <p:sp>
-        <p:nvSpPr>
-          <p:cNvPr id="2" name="Slide Number Placeholder 1">
-            <a:extLst>
-              <a:ext uri="{FF2B5EF4-FFF2-40B4-BE49-F238E27FC236}">
-                <a16:creationId xmlns:a16="http://schemas.microsoft.com/office/drawing/2014/main" id="{B7324E1D-788C-3E3F-4369-43CAD315837D}"/>
-              </a:ext>
-            </a:extLst>
-          </p:cNvPr>
-          <p:cNvSpPr>
-            <a:spLocks noGrp="1"/>
-          </p:cNvSpPr>
-          <p:nvPr>
-            <p:ph type="sldNum" sz="quarter" idx="12"/>
-          </p:nvPr>
-        </p:nvSpPr>
-        <p:spPr/>
-        <p:txBody>
-          <a:bodyPr/>
-          <a:lstStyle/>
-          <a:p>
-            <a:fld id="{7EC09024-2147-4C4E-87D2-FF66EAF91B1A}" type="slidenum">
-              <a:rPr lang="ru-RU" smtClean="0"/>
-              <a:pPr/>
-              <a:t>8</a:t>
-            </a:fld>
-            <a:r>
-              <a:rPr lang="ru-RU" dirty="0"/>
-              <a:t>/21</a:t>
-            </a:r>
-          </a:p>
-        </p:txBody>
-      </p:sp>
-    </p:spTree>
-    <p:extLst>
-      <p:ext uri="{BB962C8B-B14F-4D97-AF65-F5344CB8AC3E}">
-        <p14:creationId xmlns:p14="http://schemas.microsoft.com/office/powerpoint/2010/main" val="3961049603"/>
-      </p:ext>
-    </p:extLst>
-  </p:cSld>
-  <p:clrMapOvr>
-    <a:masterClrMapping/>
-  </p:clrMapOvr>
-</p:sld>
-</file>
-
-<file path=ppt/slides/slide9.xml><?xml version="1.0" encoding="utf-8"?>
-<p:sld xmlns:a="http://schemas.openxmlformats.org/drawingml/2006/main" xmlns:r="http://schemas.openxmlformats.org/officeDocument/2006/relationships" xmlns:p="http://schemas.openxmlformats.org/presentationml/2006/main">
-  <p:cSld>
-    <p:spTree>
-      <p:nvGrpSpPr>
-        <p:cNvPr id="1" name=""/>
-        <p:cNvGrpSpPr/>
-        <p:nvPr/>
-      </p:nvGrpSpPr>
-      <p:grpSpPr>
-        <a:xfrm>
-          <a:off x="0" y="0"/>
-          <a:ext cx="0" cy="0"/>
-          <a:chOff x="0" y="0"/>
-          <a:chExt cx="0" cy="0"/>
-        </a:xfrm>
-      </p:grpSpPr>
-      <p:sp>
-        <p:nvSpPr>
-          <p:cNvPr id="2" name="Footer Placeholder 1">
-            <a:extLst>
-              <a:ext uri="{FF2B5EF4-FFF2-40B4-BE49-F238E27FC236}">
-                <a16:creationId xmlns:a16="http://schemas.microsoft.com/office/drawing/2014/main" id="{BC39E563-E5EC-7AAC-95F3-EB89210C038B}"/>
-              </a:ext>
-            </a:extLst>
-          </p:cNvPr>
-          <p:cNvSpPr>
-            <a:spLocks noGrp="1"/>
-          </p:cNvSpPr>
-          <p:nvPr>
-            <p:ph type="ftr" sz="quarter" idx="11"/>
-          </p:nvPr>
-        </p:nvSpPr>
-        <p:spPr/>
-        <p:txBody>
-          <a:bodyPr/>
-          <a:lstStyle/>
-          <a:p>
-            <a:r>
-              <a:rPr lang="ru-RU"/>
-              <a:t>Система поиска шаблонов в данных GitHub</a:t>
-            </a:r>
-            <a:endParaRPr lang="ru-RU" dirty="0"/>
-          </a:p>
-        </p:txBody>
-      </p:sp>
-      <p:sp>
-        <p:nvSpPr>
-          <p:cNvPr id="3" name="Slide Number Placeholder 2">
-            <a:extLst>
-              <a:ext uri="{FF2B5EF4-FFF2-40B4-BE49-F238E27FC236}">
-                <a16:creationId xmlns:a16="http://schemas.microsoft.com/office/drawing/2014/main" id="{6CE8525D-76BF-D2B5-F66E-1F8F6317FFAE}"/>
-              </a:ext>
-            </a:extLst>
-          </p:cNvPr>
-          <p:cNvSpPr>
-            <a:spLocks noGrp="1"/>
-          </p:cNvSpPr>
-          <p:nvPr>
-            <p:ph type="sldNum" sz="quarter" idx="12"/>
-          </p:nvPr>
-        </p:nvSpPr>
-        <p:spPr/>
-        <p:txBody>
-          <a:bodyPr/>
-          <a:lstStyle/>
-          <a:p>
-            <a:fld id="{7EC09024-2147-4C4E-87D2-FF66EAF91B1A}" type="slidenum">
-              <a:rPr lang="ru-RU" smtClean="0"/>
-              <a:pPr/>
-              <a:t>9</a:t>
+              <a:t>5</a:t>
             </a:fld>
             <a:r>
               <a:rPr lang="ru-RU" dirty="0"/>
@@ -14341,14 +12157,14 @@
           <p:nvPr>
             <p:extLst>
               <p:ext uri="{D42A27DB-BD31-4B8C-83A1-F6EECF244321}">
-                <p14:modId xmlns:p14="http://schemas.microsoft.com/office/powerpoint/2010/main" val="1820543423"/>
+                <p14:modId xmlns:p14="http://schemas.microsoft.com/office/powerpoint/2010/main" val="1146447512"/>
               </p:ext>
             </p:extLst>
           </p:nvPr>
         </p:nvGraphicFramePr>
         <p:xfrm>
           <a:off x="6762690" y="4318573"/>
-          <a:ext cx="5199017" cy="1091746"/>
+          <a:ext cx="5273523" cy="1091746"/>
         </p:xfrm>
         <a:graphic>
           <a:graphicData uri="http://schemas.openxmlformats.org/drawingml/2006/table">
@@ -14364,28 +12180,28 @@
                     </a:ext>
                   </a:extLst>
                 </a:gridCol>
-                <a:gridCol w="1706675">
+                <a:gridCol w="1691009">
                   <a:extLst>
                     <a:ext uri="{9D8B030D-6E8A-4147-A177-3AD203B41FA5}">
                       <a16:colId xmlns:a16="http://schemas.microsoft.com/office/drawing/2014/main" val="4200375326"/>
                     </a:ext>
                   </a:extLst>
                 </a:gridCol>
-                <a:gridCol w="1085445">
+                <a:gridCol w="1101111">
                   <a:extLst>
                     <a:ext uri="{9D8B030D-6E8A-4147-A177-3AD203B41FA5}">
                       <a16:colId xmlns:a16="http://schemas.microsoft.com/office/drawing/2014/main" val="1710308964"/>
                     </a:ext>
                   </a:extLst>
                 </a:gridCol>
-                <a:gridCol w="832856">
+                <a:gridCol w="903795">
                   <a:extLst>
                     <a:ext uri="{9D8B030D-6E8A-4147-A177-3AD203B41FA5}">
                       <a16:colId xmlns:a16="http://schemas.microsoft.com/office/drawing/2014/main" val="2728156721"/>
                     </a:ext>
                   </a:extLst>
                 </a:gridCol>
-                <a:gridCol w="1276593">
+                <a:gridCol w="1280160">
                   <a:extLst>
                     <a:ext uri="{9D8B030D-6E8A-4147-A177-3AD203B41FA5}">
                       <a16:colId xmlns:a16="http://schemas.microsoft.com/office/drawing/2014/main" val="3682474319"/>
@@ -15080,6 +12896,2287 @@
     <p:extLst>
       <p:ext uri="{BB962C8B-B14F-4D97-AF65-F5344CB8AC3E}">
         <p14:creationId xmlns:p14="http://schemas.microsoft.com/office/powerpoint/2010/main" val="2587336565"/>
+      </p:ext>
+    </p:extLst>
+  </p:cSld>
+  <p:clrMapOvr>
+    <a:masterClrMapping/>
+  </p:clrMapOvr>
+</p:sld>
+</file>
+
+<file path=ppt/slides/slide6.xml><?xml version="1.0" encoding="utf-8"?>
+<p:sld xmlns:a="http://schemas.openxmlformats.org/drawingml/2006/main" xmlns:r="http://schemas.openxmlformats.org/officeDocument/2006/relationships" xmlns:p="http://schemas.openxmlformats.org/presentationml/2006/main">
+  <p:cSld>
+    <p:spTree>
+      <p:nvGrpSpPr>
+        <p:cNvPr id="1" name=""/>
+        <p:cNvGrpSpPr/>
+        <p:nvPr/>
+      </p:nvGrpSpPr>
+      <p:grpSpPr>
+        <a:xfrm>
+          <a:off x="0" y="0"/>
+          <a:ext cx="0" cy="0"/>
+          <a:chOff x="0" y="0"/>
+          <a:chExt cx="0" cy="0"/>
+        </a:xfrm>
+      </p:grpSpPr>
+      <p:sp>
+        <p:nvSpPr>
+          <p:cNvPr id="3" name="TextBox 2">
+            <a:extLst>
+              <a:ext uri="{FF2B5EF4-FFF2-40B4-BE49-F238E27FC236}">
+                <a16:creationId xmlns:a16="http://schemas.microsoft.com/office/drawing/2014/main" id="{100B25DD-8CC4-48A0-A45C-A43464AB841D}"/>
+              </a:ext>
+            </a:extLst>
+          </p:cNvPr>
+          <p:cNvSpPr txBox="1"/>
+          <p:nvPr/>
+        </p:nvSpPr>
+        <p:spPr>
+          <a:xfrm>
+            <a:off x="0" y="0"/>
+            <a:ext cx="12192000" cy="523220"/>
+          </a:xfrm>
+          <a:prstGeom prst="rect">
+            <a:avLst/>
+          </a:prstGeom>
+          <a:noFill/>
+        </p:spPr>
+        <p:txBody>
+          <a:bodyPr wrap="square">
+            <a:spAutoFit/>
+          </a:bodyPr>
+          <a:lstStyle/>
+          <a:p>
+            <a:pPr algn="ctr"/>
+            <a:r>
+              <a:rPr lang="ru-RU" sz="2800" b="1" dirty="0">
+                <a:latin typeface="Times New Roman" panose="02020603050405020304" pitchFamily="18" charset="0"/>
+                <a:cs typeface="Times New Roman" panose="02020603050405020304" pitchFamily="18" charset="0"/>
+              </a:rPr>
+              <a:t>ВАРИАНТЫ ИСПОЛЬЗОВАНИЯ</a:t>
+            </a:r>
+          </a:p>
+        </p:txBody>
+      </p:sp>
+      <p:pic>
+        <p:nvPicPr>
+          <p:cNvPr id="5" name="Picture 4">
+            <a:extLst>
+              <a:ext uri="{FF2B5EF4-FFF2-40B4-BE49-F238E27FC236}">
+                <a16:creationId xmlns:a16="http://schemas.microsoft.com/office/drawing/2014/main" id="{58AFD9A4-E09C-4265-4AD3-8D63473737C6}"/>
+              </a:ext>
+            </a:extLst>
+          </p:cNvPr>
+          <p:cNvPicPr>
+            <a:picLocks noChangeAspect="1"/>
+          </p:cNvPicPr>
+          <p:nvPr/>
+        </p:nvPicPr>
+        <p:blipFill>
+          <a:blip r:embed="rId3">
+            <a:extLst>
+              <a:ext uri="{28A0092B-C50C-407E-A947-70E740481C1C}">
+                <a14:useLocalDpi xmlns:a14="http://schemas.microsoft.com/office/drawing/2010/main" val="0"/>
+              </a:ext>
+            </a:extLst>
+          </a:blip>
+          <a:srcRect/>
+          <a:stretch>
+            <a:fillRect/>
+          </a:stretch>
+        </p:blipFill>
+        <p:spPr bwMode="auto">
+          <a:xfrm>
+            <a:off x="1805305" y="1174345"/>
+            <a:ext cx="8581390" cy="4960997"/>
+          </a:xfrm>
+          <a:prstGeom prst="rect">
+            <a:avLst/>
+          </a:prstGeom>
+          <a:noFill/>
+          <a:ln>
+            <a:noFill/>
+          </a:ln>
+        </p:spPr>
+      </p:pic>
+      <p:sp>
+        <p:nvSpPr>
+          <p:cNvPr id="6" name="Footer Placeholder 5">
+            <a:extLst>
+              <a:ext uri="{FF2B5EF4-FFF2-40B4-BE49-F238E27FC236}">
+                <a16:creationId xmlns:a16="http://schemas.microsoft.com/office/drawing/2014/main" id="{85918B98-9227-E89E-4216-E97AC57E0ECB}"/>
+              </a:ext>
+            </a:extLst>
+          </p:cNvPr>
+          <p:cNvSpPr>
+            <a:spLocks noGrp="1"/>
+          </p:cNvSpPr>
+          <p:nvPr>
+            <p:ph type="ftr" sz="quarter" idx="11"/>
+          </p:nvPr>
+        </p:nvSpPr>
+        <p:spPr/>
+        <p:txBody>
+          <a:bodyPr/>
+          <a:lstStyle/>
+          <a:p>
+            <a:r>
+              <a:rPr lang="ru-RU"/>
+              <a:t>Система поиска шаблонов в данных GitHub</a:t>
+            </a:r>
+            <a:endParaRPr lang="ru-RU" dirty="0"/>
+          </a:p>
+        </p:txBody>
+      </p:sp>
+      <p:sp>
+        <p:nvSpPr>
+          <p:cNvPr id="2" name="Slide Number Placeholder 1">
+            <a:extLst>
+              <a:ext uri="{FF2B5EF4-FFF2-40B4-BE49-F238E27FC236}">
+                <a16:creationId xmlns:a16="http://schemas.microsoft.com/office/drawing/2014/main" id="{CE171089-D0F0-A0F1-70B8-DD1E3B11651F}"/>
+              </a:ext>
+            </a:extLst>
+          </p:cNvPr>
+          <p:cNvSpPr>
+            <a:spLocks noGrp="1"/>
+          </p:cNvSpPr>
+          <p:nvPr>
+            <p:ph type="sldNum" sz="quarter" idx="12"/>
+          </p:nvPr>
+        </p:nvSpPr>
+        <p:spPr/>
+        <p:txBody>
+          <a:bodyPr/>
+          <a:lstStyle/>
+          <a:p>
+            <a:fld id="{7EC09024-2147-4C4E-87D2-FF66EAF91B1A}" type="slidenum">
+              <a:rPr lang="ru-RU" smtClean="0"/>
+              <a:pPr/>
+              <a:t>6</a:t>
+            </a:fld>
+            <a:r>
+              <a:rPr lang="ru-RU" dirty="0"/>
+              <a:t>/21</a:t>
+            </a:r>
+          </a:p>
+        </p:txBody>
+      </p:sp>
+    </p:spTree>
+    <p:extLst>
+      <p:ext uri="{BB962C8B-B14F-4D97-AF65-F5344CB8AC3E}">
+        <p14:creationId xmlns:p14="http://schemas.microsoft.com/office/powerpoint/2010/main" val="1136029519"/>
+      </p:ext>
+    </p:extLst>
+  </p:cSld>
+  <p:clrMapOvr>
+    <a:masterClrMapping/>
+  </p:clrMapOvr>
+</p:sld>
+</file>
+
+<file path=ppt/slides/slide7.xml><?xml version="1.0" encoding="utf-8"?>
+<p:sld xmlns:a="http://schemas.openxmlformats.org/drawingml/2006/main" xmlns:r="http://schemas.openxmlformats.org/officeDocument/2006/relationships" xmlns:p="http://schemas.openxmlformats.org/presentationml/2006/main">
+  <p:cSld>
+    <p:spTree>
+      <p:nvGrpSpPr>
+        <p:cNvPr id="1" name=""/>
+        <p:cNvGrpSpPr/>
+        <p:nvPr/>
+      </p:nvGrpSpPr>
+      <p:grpSpPr>
+        <a:xfrm>
+          <a:off x="0" y="0"/>
+          <a:ext cx="0" cy="0"/>
+          <a:chOff x="0" y="0"/>
+          <a:chExt cx="0" cy="0"/>
+        </a:xfrm>
+      </p:grpSpPr>
+      <p:sp>
+        <p:nvSpPr>
+          <p:cNvPr id="3" name="TextBox 2">
+            <a:extLst>
+              <a:ext uri="{FF2B5EF4-FFF2-40B4-BE49-F238E27FC236}">
+                <a16:creationId xmlns:a16="http://schemas.microsoft.com/office/drawing/2014/main" id="{100B25DD-8CC4-48A0-A45C-A43464AB841D}"/>
+              </a:ext>
+            </a:extLst>
+          </p:cNvPr>
+          <p:cNvSpPr txBox="1"/>
+          <p:nvPr/>
+        </p:nvSpPr>
+        <p:spPr>
+          <a:xfrm>
+            <a:off x="0" y="0"/>
+            <a:ext cx="12192000" cy="523220"/>
+          </a:xfrm>
+          <a:prstGeom prst="rect">
+            <a:avLst/>
+          </a:prstGeom>
+          <a:noFill/>
+        </p:spPr>
+        <p:txBody>
+          <a:bodyPr wrap="square">
+            <a:spAutoFit/>
+          </a:bodyPr>
+          <a:lstStyle/>
+          <a:p>
+            <a:pPr algn="ctr"/>
+            <a:r>
+              <a:rPr lang="ru-RU" sz="2800" b="1" dirty="0">
+                <a:latin typeface="Times New Roman" panose="02020603050405020304" pitchFamily="18" charset="0"/>
+                <a:cs typeface="Times New Roman" panose="02020603050405020304" pitchFamily="18" charset="0"/>
+              </a:rPr>
+              <a:t>АРХИТЕКТУРА</a:t>
+            </a:r>
+          </a:p>
+        </p:txBody>
+      </p:sp>
+      <p:pic>
+        <p:nvPicPr>
+          <p:cNvPr id="6" name="Picture 5">
+            <a:extLst>
+              <a:ext uri="{FF2B5EF4-FFF2-40B4-BE49-F238E27FC236}">
+                <a16:creationId xmlns:a16="http://schemas.microsoft.com/office/drawing/2014/main" id="{809FA319-53B1-BCC2-247D-A699B2E21667}"/>
+              </a:ext>
+            </a:extLst>
+          </p:cNvPr>
+          <p:cNvPicPr>
+            <a:picLocks noChangeAspect="1"/>
+          </p:cNvPicPr>
+          <p:nvPr/>
+        </p:nvPicPr>
+        <p:blipFill>
+          <a:blip r:embed="rId3">
+            <a:extLst>
+              <a:ext uri="{28A0092B-C50C-407E-A947-70E740481C1C}">
+                <a14:useLocalDpi xmlns:a14="http://schemas.microsoft.com/office/drawing/2010/main" val="0"/>
+              </a:ext>
+            </a:extLst>
+          </a:blip>
+          <a:srcRect/>
+          <a:stretch>
+            <a:fillRect/>
+          </a:stretch>
+        </p:blipFill>
+        <p:spPr bwMode="auto">
+          <a:xfrm>
+            <a:off x="2018982" y="804459"/>
+            <a:ext cx="8154036" cy="5361323"/>
+          </a:xfrm>
+          <a:prstGeom prst="rect">
+            <a:avLst/>
+          </a:prstGeom>
+          <a:noFill/>
+          <a:ln>
+            <a:noFill/>
+          </a:ln>
+        </p:spPr>
+      </p:pic>
+      <p:sp>
+        <p:nvSpPr>
+          <p:cNvPr id="8" name="Footer Placeholder 7">
+            <a:extLst>
+              <a:ext uri="{FF2B5EF4-FFF2-40B4-BE49-F238E27FC236}">
+                <a16:creationId xmlns:a16="http://schemas.microsoft.com/office/drawing/2014/main" id="{8700C46C-D356-0043-0F28-0736377B9B34}"/>
+              </a:ext>
+            </a:extLst>
+          </p:cNvPr>
+          <p:cNvSpPr>
+            <a:spLocks noGrp="1"/>
+          </p:cNvSpPr>
+          <p:nvPr>
+            <p:ph type="ftr" sz="quarter" idx="11"/>
+          </p:nvPr>
+        </p:nvSpPr>
+        <p:spPr/>
+        <p:txBody>
+          <a:bodyPr/>
+          <a:lstStyle/>
+          <a:p>
+            <a:r>
+              <a:rPr lang="ru-RU"/>
+              <a:t>Система поиска шаблонов в данных GitHub</a:t>
+            </a:r>
+            <a:endParaRPr lang="ru-RU" dirty="0"/>
+          </a:p>
+        </p:txBody>
+      </p:sp>
+      <p:sp>
+        <p:nvSpPr>
+          <p:cNvPr id="2" name="Slide Number Placeholder 1">
+            <a:extLst>
+              <a:ext uri="{FF2B5EF4-FFF2-40B4-BE49-F238E27FC236}">
+                <a16:creationId xmlns:a16="http://schemas.microsoft.com/office/drawing/2014/main" id="{BF9BEB9B-0EED-CEF8-AF80-268091C4C3E7}"/>
+              </a:ext>
+            </a:extLst>
+          </p:cNvPr>
+          <p:cNvSpPr>
+            <a:spLocks noGrp="1"/>
+          </p:cNvSpPr>
+          <p:nvPr>
+            <p:ph type="sldNum" sz="quarter" idx="12"/>
+          </p:nvPr>
+        </p:nvSpPr>
+        <p:spPr/>
+        <p:txBody>
+          <a:bodyPr/>
+          <a:lstStyle/>
+          <a:p>
+            <a:fld id="{7EC09024-2147-4C4E-87D2-FF66EAF91B1A}" type="slidenum">
+              <a:rPr lang="ru-RU" smtClean="0"/>
+              <a:pPr/>
+              <a:t>7</a:t>
+            </a:fld>
+            <a:r>
+              <a:rPr lang="ru-RU" dirty="0"/>
+              <a:t>/21</a:t>
+            </a:r>
+          </a:p>
+        </p:txBody>
+      </p:sp>
+    </p:spTree>
+    <p:extLst>
+      <p:ext uri="{BB962C8B-B14F-4D97-AF65-F5344CB8AC3E}">
+        <p14:creationId xmlns:p14="http://schemas.microsoft.com/office/powerpoint/2010/main" val="3559536693"/>
+      </p:ext>
+    </p:extLst>
+  </p:cSld>
+  <p:clrMapOvr>
+    <a:masterClrMapping/>
+  </p:clrMapOvr>
+</p:sld>
+</file>
+
+<file path=ppt/slides/slide8.xml><?xml version="1.0" encoding="utf-8"?>
+<p:sld xmlns:a="http://schemas.openxmlformats.org/drawingml/2006/main" xmlns:r="http://schemas.openxmlformats.org/officeDocument/2006/relationships" xmlns:p="http://schemas.openxmlformats.org/presentationml/2006/main">
+  <p:cSld>
+    <p:spTree>
+      <p:nvGrpSpPr>
+        <p:cNvPr id="1" name=""/>
+        <p:cNvGrpSpPr/>
+        <p:nvPr/>
+      </p:nvGrpSpPr>
+      <p:grpSpPr>
+        <a:xfrm>
+          <a:off x="0" y="0"/>
+          <a:ext cx="0" cy="0"/>
+          <a:chOff x="0" y="0"/>
+          <a:chExt cx="0" cy="0"/>
+        </a:xfrm>
+      </p:grpSpPr>
+      <p:graphicFrame>
+        <p:nvGraphicFramePr>
+          <p:cNvPr id="6" name="Table 5">
+            <a:extLst>
+              <a:ext uri="{FF2B5EF4-FFF2-40B4-BE49-F238E27FC236}">
+                <a16:creationId xmlns:a16="http://schemas.microsoft.com/office/drawing/2014/main" id="{B7BF36CC-5F4F-EF33-AA74-90EA95756E47}"/>
+              </a:ext>
+            </a:extLst>
+          </p:cNvPr>
+          <p:cNvGraphicFramePr>
+            <a:graphicFrameLocks noGrp="1"/>
+          </p:cNvGraphicFramePr>
+          <p:nvPr>
+            <p:extLst>
+              <p:ext uri="{D42A27DB-BD31-4B8C-83A1-F6EECF244321}">
+                <p14:modId xmlns:p14="http://schemas.microsoft.com/office/powerpoint/2010/main" val="616825397"/>
+              </p:ext>
+            </p:extLst>
+          </p:nvPr>
+        </p:nvGraphicFramePr>
+        <p:xfrm>
+          <a:off x="2133600" y="1247986"/>
+          <a:ext cx="7672070" cy="2133600"/>
+        </p:xfrm>
+        <a:graphic>
+          <a:graphicData uri="http://schemas.openxmlformats.org/drawingml/2006/table">
+            <a:tbl>
+              <a:tblPr firstRow="1" firstCol="1" bandRow="1">
+                <a:tableStyleId>{5940675A-B579-460E-94D1-54222C63F5DA}</a:tableStyleId>
+              </a:tblPr>
+              <a:tblGrid>
+                <a:gridCol w="2452353">
+                  <a:extLst>
+                    <a:ext uri="{9D8B030D-6E8A-4147-A177-3AD203B41FA5}">
+                      <a16:colId xmlns:a16="http://schemas.microsoft.com/office/drawing/2014/main" val="1540626529"/>
+                    </a:ext>
+                  </a:extLst>
+                </a:gridCol>
+                <a:gridCol w="800232">
+                  <a:extLst>
+                    <a:ext uri="{9D8B030D-6E8A-4147-A177-3AD203B41FA5}">
+                      <a16:colId xmlns:a16="http://schemas.microsoft.com/office/drawing/2014/main" val="1058532723"/>
+                    </a:ext>
+                  </a:extLst>
+                </a:gridCol>
+                <a:gridCol w="4419485">
+                  <a:extLst>
+                    <a:ext uri="{9D8B030D-6E8A-4147-A177-3AD203B41FA5}">
+                      <a16:colId xmlns:a16="http://schemas.microsoft.com/office/drawing/2014/main" val="1658150677"/>
+                    </a:ext>
+                  </a:extLst>
+                </a:gridCol>
+              </a:tblGrid>
+              <a:tr h="0">
+                <a:tc>
+                  <a:txBody>
+                    <a:bodyPr/>
+                    <a:lstStyle/>
+                    <a:p>
+                      <a:pPr algn="ctr"/>
+                      <a:r>
+                        <a:rPr lang="ru-RU" sz="1400" dirty="0">
+                          <a:effectLst/>
+                          <a:latin typeface="Times New Roman" panose="02020603050405020304" pitchFamily="18" charset="0"/>
+                          <a:cs typeface="Times New Roman" panose="02020603050405020304" pitchFamily="18" charset="0"/>
+                        </a:rPr>
+                        <a:t>Атрибут</a:t>
+                      </a:r>
+                      <a:endParaRPr lang="ru-RU" sz="1400" b="1" dirty="0">
+                        <a:effectLst/>
+                        <a:latin typeface="Times New Roman" panose="02020603050405020304" pitchFamily="18" charset="0"/>
+                        <a:ea typeface="Times New Roman" panose="02020603050405020304" pitchFamily="18" charset="0"/>
+                        <a:cs typeface="Times New Roman" panose="02020603050405020304" pitchFamily="18" charset="0"/>
+                      </a:endParaRPr>
+                    </a:p>
+                  </a:txBody>
+                  <a:tcPr marL="68580" marR="68580" marT="0" marB="0"/>
+                </a:tc>
+                <a:tc>
+                  <a:txBody>
+                    <a:bodyPr/>
+                    <a:lstStyle/>
+                    <a:p>
+                      <a:pPr algn="ctr"/>
+                      <a:r>
+                        <a:rPr lang="ru-RU" sz="1400">
+                          <a:effectLst/>
+                          <a:latin typeface="Times New Roman" panose="02020603050405020304" pitchFamily="18" charset="0"/>
+                          <a:cs typeface="Times New Roman" panose="02020603050405020304" pitchFamily="18" charset="0"/>
+                        </a:rPr>
+                        <a:t>Тип данных</a:t>
+                      </a:r>
+                      <a:endParaRPr lang="ru-RU" sz="1400" b="1">
+                        <a:effectLst/>
+                        <a:latin typeface="Times New Roman" panose="02020603050405020304" pitchFamily="18" charset="0"/>
+                        <a:ea typeface="Times New Roman" panose="02020603050405020304" pitchFamily="18" charset="0"/>
+                        <a:cs typeface="Times New Roman" panose="02020603050405020304" pitchFamily="18" charset="0"/>
+                      </a:endParaRPr>
+                    </a:p>
+                  </a:txBody>
+                  <a:tcPr marL="68580" marR="68580" marT="0" marB="0"/>
+                </a:tc>
+                <a:tc>
+                  <a:txBody>
+                    <a:bodyPr/>
+                    <a:lstStyle/>
+                    <a:p>
+                      <a:pPr algn="ctr"/>
+                      <a:r>
+                        <a:rPr lang="ru-RU" sz="1400">
+                          <a:effectLst/>
+                          <a:latin typeface="Times New Roman" panose="02020603050405020304" pitchFamily="18" charset="0"/>
+                          <a:cs typeface="Times New Roman" panose="02020603050405020304" pitchFamily="18" charset="0"/>
+                        </a:rPr>
+                        <a:t>Семантика</a:t>
+                      </a:r>
+                      <a:endParaRPr lang="ru-RU" sz="1400" b="1">
+                        <a:effectLst/>
+                        <a:latin typeface="Times New Roman" panose="02020603050405020304" pitchFamily="18" charset="0"/>
+                        <a:ea typeface="Times New Roman" panose="02020603050405020304" pitchFamily="18" charset="0"/>
+                        <a:cs typeface="Times New Roman" panose="02020603050405020304" pitchFamily="18" charset="0"/>
+                      </a:endParaRPr>
+                    </a:p>
+                  </a:txBody>
+                  <a:tcPr marL="68580" marR="68580" marT="0" marB="0"/>
+                </a:tc>
+                <a:extLst>
+                  <a:ext uri="{0D108BD9-81ED-4DB2-BD59-A6C34878D82A}">
+                    <a16:rowId xmlns:a16="http://schemas.microsoft.com/office/drawing/2014/main" val="3693032744"/>
+                  </a:ext>
+                </a:extLst>
+              </a:tr>
+              <a:tr h="0">
+                <a:tc>
+                  <a:txBody>
+                    <a:bodyPr/>
+                    <a:lstStyle/>
+                    <a:p>
+                      <a:r>
+                        <a:rPr lang="ru-RU" sz="1400">
+                          <a:effectLst/>
+                          <a:latin typeface="Times New Roman" panose="02020603050405020304" pitchFamily="18" charset="0"/>
+                          <a:cs typeface="Times New Roman" panose="02020603050405020304" pitchFamily="18" charset="0"/>
+                        </a:rPr>
+                        <a:t>pushes</a:t>
+                      </a:r>
+                      <a:endParaRPr lang="ru-RU" sz="1400">
+                        <a:effectLst/>
+                        <a:latin typeface="Times New Roman" panose="02020603050405020304" pitchFamily="18" charset="0"/>
+                        <a:ea typeface="Times New Roman" panose="02020603050405020304" pitchFamily="18" charset="0"/>
+                        <a:cs typeface="Times New Roman" panose="02020603050405020304" pitchFamily="18" charset="0"/>
+                      </a:endParaRPr>
+                    </a:p>
+                  </a:txBody>
+                  <a:tcPr marL="68580" marR="68580" marT="0" marB="0"/>
+                </a:tc>
+                <a:tc>
+                  <a:txBody>
+                    <a:bodyPr/>
+                    <a:lstStyle/>
+                    <a:p>
+                      <a:r>
+                        <a:rPr lang="ru-RU" sz="1400">
+                          <a:effectLst/>
+                          <a:latin typeface="Times New Roman" panose="02020603050405020304" pitchFamily="18" charset="0"/>
+                          <a:cs typeface="Times New Roman" panose="02020603050405020304" pitchFamily="18" charset="0"/>
+                        </a:rPr>
+                        <a:t>Число</a:t>
+                      </a:r>
+                      <a:endParaRPr lang="ru-RU" sz="1400">
+                        <a:effectLst/>
+                        <a:latin typeface="Times New Roman" panose="02020603050405020304" pitchFamily="18" charset="0"/>
+                        <a:ea typeface="Times New Roman" panose="02020603050405020304" pitchFamily="18" charset="0"/>
+                        <a:cs typeface="Times New Roman" panose="02020603050405020304" pitchFamily="18" charset="0"/>
+                      </a:endParaRPr>
+                    </a:p>
+                  </a:txBody>
+                  <a:tcPr marL="68580" marR="68580" marT="0" marB="0"/>
+                </a:tc>
+                <a:tc>
+                  <a:txBody>
+                    <a:bodyPr/>
+                    <a:lstStyle/>
+                    <a:p>
+                      <a:r>
+                        <a:rPr lang="ru-RU" sz="1400" dirty="0">
+                          <a:effectLst/>
+                          <a:latin typeface="Times New Roman" panose="02020603050405020304" pitchFamily="18" charset="0"/>
+                          <a:cs typeface="Times New Roman" panose="02020603050405020304" pitchFamily="18" charset="0"/>
+                        </a:rPr>
+                        <a:t>Количество отправленных изменений (</a:t>
+                      </a:r>
+                      <a:r>
+                        <a:rPr lang="ru-RU" sz="1400" dirty="0" err="1">
+                          <a:effectLst/>
+                          <a:latin typeface="Times New Roman" panose="02020603050405020304" pitchFamily="18" charset="0"/>
+                          <a:cs typeface="Times New Roman" panose="02020603050405020304" pitchFamily="18" charset="0"/>
+                        </a:rPr>
+                        <a:t>pushes</a:t>
+                      </a:r>
+                      <a:r>
+                        <a:rPr lang="ru-RU" sz="1400" dirty="0">
+                          <a:effectLst/>
+                          <a:latin typeface="Times New Roman" panose="02020603050405020304" pitchFamily="18" charset="0"/>
+                          <a:cs typeface="Times New Roman" panose="02020603050405020304" pitchFamily="18" charset="0"/>
+                        </a:rPr>
+                        <a:t>) в репозиторий</a:t>
+                      </a:r>
+                      <a:endParaRPr lang="ru-RU" sz="1400" dirty="0">
+                        <a:effectLst/>
+                        <a:latin typeface="Times New Roman" panose="02020603050405020304" pitchFamily="18" charset="0"/>
+                        <a:ea typeface="Times New Roman" panose="02020603050405020304" pitchFamily="18" charset="0"/>
+                        <a:cs typeface="Times New Roman" panose="02020603050405020304" pitchFamily="18" charset="0"/>
+                      </a:endParaRPr>
+                    </a:p>
+                  </a:txBody>
+                  <a:tcPr marL="68580" marR="68580" marT="0" marB="0"/>
+                </a:tc>
+                <a:extLst>
+                  <a:ext uri="{0D108BD9-81ED-4DB2-BD59-A6C34878D82A}">
+                    <a16:rowId xmlns:a16="http://schemas.microsoft.com/office/drawing/2014/main" val="2298570547"/>
+                  </a:ext>
+                </a:extLst>
+              </a:tr>
+              <a:tr h="0">
+                <a:tc>
+                  <a:txBody>
+                    <a:bodyPr/>
+                    <a:lstStyle/>
+                    <a:p>
+                      <a:r>
+                        <a:rPr lang="ru-RU" sz="1400" dirty="0" err="1">
+                          <a:effectLst/>
+                          <a:latin typeface="Times New Roman" panose="02020603050405020304" pitchFamily="18" charset="0"/>
+                          <a:cs typeface="Times New Roman" panose="02020603050405020304" pitchFamily="18" charset="0"/>
+                        </a:rPr>
+                        <a:t>avg_push_size</a:t>
+                      </a:r>
+                      <a:endParaRPr lang="ru-RU" sz="1400" dirty="0">
+                        <a:effectLst/>
+                        <a:latin typeface="Times New Roman" panose="02020603050405020304" pitchFamily="18" charset="0"/>
+                        <a:ea typeface="Times New Roman" panose="02020603050405020304" pitchFamily="18" charset="0"/>
+                        <a:cs typeface="Times New Roman" panose="02020603050405020304" pitchFamily="18" charset="0"/>
+                      </a:endParaRPr>
+                    </a:p>
+                  </a:txBody>
+                  <a:tcPr marL="68580" marR="68580" marT="0" marB="0"/>
+                </a:tc>
+                <a:tc>
+                  <a:txBody>
+                    <a:bodyPr/>
+                    <a:lstStyle/>
+                    <a:p>
+                      <a:r>
+                        <a:rPr lang="ru-RU" sz="1400">
+                          <a:effectLst/>
+                          <a:latin typeface="Times New Roman" panose="02020603050405020304" pitchFamily="18" charset="0"/>
+                          <a:cs typeface="Times New Roman" panose="02020603050405020304" pitchFamily="18" charset="0"/>
+                        </a:rPr>
+                        <a:t>Число</a:t>
+                      </a:r>
+                      <a:endParaRPr lang="ru-RU" sz="1400">
+                        <a:effectLst/>
+                        <a:latin typeface="Times New Roman" panose="02020603050405020304" pitchFamily="18" charset="0"/>
+                        <a:ea typeface="Times New Roman" panose="02020603050405020304" pitchFamily="18" charset="0"/>
+                        <a:cs typeface="Times New Roman" panose="02020603050405020304" pitchFamily="18" charset="0"/>
+                      </a:endParaRPr>
+                    </a:p>
+                  </a:txBody>
+                  <a:tcPr marL="68580" marR="68580" marT="0" marB="0"/>
+                </a:tc>
+                <a:tc>
+                  <a:txBody>
+                    <a:bodyPr/>
+                    <a:lstStyle/>
+                    <a:p>
+                      <a:r>
+                        <a:rPr lang="ru-RU" sz="1400">
+                          <a:effectLst/>
+                          <a:latin typeface="Times New Roman" panose="02020603050405020304" pitchFamily="18" charset="0"/>
+                          <a:cs typeface="Times New Roman" panose="02020603050405020304" pitchFamily="18" charset="0"/>
+                        </a:rPr>
+                        <a:t>Средний размер отправленных изменений (pushes)</a:t>
+                      </a:r>
+                      <a:endParaRPr lang="ru-RU" sz="1400">
+                        <a:effectLst/>
+                        <a:latin typeface="Times New Roman" panose="02020603050405020304" pitchFamily="18" charset="0"/>
+                        <a:ea typeface="Times New Roman" panose="02020603050405020304" pitchFamily="18" charset="0"/>
+                        <a:cs typeface="Times New Roman" panose="02020603050405020304" pitchFamily="18" charset="0"/>
+                      </a:endParaRPr>
+                    </a:p>
+                  </a:txBody>
+                  <a:tcPr marL="68580" marR="68580" marT="0" marB="0"/>
+                </a:tc>
+                <a:extLst>
+                  <a:ext uri="{0D108BD9-81ED-4DB2-BD59-A6C34878D82A}">
+                    <a16:rowId xmlns:a16="http://schemas.microsoft.com/office/drawing/2014/main" val="1672261219"/>
+                  </a:ext>
+                </a:extLst>
+              </a:tr>
+              <a:tr h="0">
+                <a:tc>
+                  <a:txBody>
+                    <a:bodyPr/>
+                    <a:lstStyle/>
+                    <a:p>
+                      <a:r>
+                        <a:rPr lang="ru-RU" sz="1400" dirty="0" err="1">
+                          <a:effectLst/>
+                          <a:latin typeface="Times New Roman" panose="02020603050405020304" pitchFamily="18" charset="0"/>
+                          <a:cs typeface="Times New Roman" panose="02020603050405020304" pitchFamily="18" charset="0"/>
+                        </a:rPr>
+                        <a:t>pull_requests</a:t>
+                      </a:r>
+                      <a:endParaRPr lang="ru-RU" sz="1400" dirty="0">
+                        <a:effectLst/>
+                        <a:latin typeface="Times New Roman" panose="02020603050405020304" pitchFamily="18" charset="0"/>
+                        <a:ea typeface="Times New Roman" panose="02020603050405020304" pitchFamily="18" charset="0"/>
+                        <a:cs typeface="Times New Roman" panose="02020603050405020304" pitchFamily="18" charset="0"/>
+                      </a:endParaRPr>
+                    </a:p>
+                  </a:txBody>
+                  <a:tcPr marL="68580" marR="68580" marT="0" marB="0"/>
+                </a:tc>
+                <a:tc>
+                  <a:txBody>
+                    <a:bodyPr/>
+                    <a:lstStyle/>
+                    <a:p>
+                      <a:r>
+                        <a:rPr lang="ru-RU" sz="1400" dirty="0">
+                          <a:effectLst/>
+                          <a:latin typeface="Times New Roman" panose="02020603050405020304" pitchFamily="18" charset="0"/>
+                          <a:cs typeface="Times New Roman" panose="02020603050405020304" pitchFamily="18" charset="0"/>
+                        </a:rPr>
+                        <a:t>Число</a:t>
+                      </a:r>
+                      <a:endParaRPr lang="ru-RU" sz="1400" dirty="0">
+                        <a:effectLst/>
+                        <a:latin typeface="Times New Roman" panose="02020603050405020304" pitchFamily="18" charset="0"/>
+                        <a:ea typeface="Times New Roman" panose="02020603050405020304" pitchFamily="18" charset="0"/>
+                        <a:cs typeface="Times New Roman" panose="02020603050405020304" pitchFamily="18" charset="0"/>
+                      </a:endParaRPr>
+                    </a:p>
+                  </a:txBody>
+                  <a:tcPr marL="68580" marR="68580" marT="0" marB="0"/>
+                </a:tc>
+                <a:tc>
+                  <a:txBody>
+                    <a:bodyPr/>
+                    <a:lstStyle/>
+                    <a:p>
+                      <a:r>
+                        <a:rPr lang="ru-RU" sz="1400">
+                          <a:effectLst/>
+                          <a:latin typeface="Times New Roman" panose="02020603050405020304" pitchFamily="18" charset="0"/>
+                          <a:cs typeface="Times New Roman" panose="02020603050405020304" pitchFamily="18" charset="0"/>
+                        </a:rPr>
+                        <a:t>Количество запросов на внесение изменений (pull requests)</a:t>
+                      </a:r>
+                      <a:endParaRPr lang="ru-RU" sz="1400">
+                        <a:effectLst/>
+                        <a:latin typeface="Times New Roman" panose="02020603050405020304" pitchFamily="18" charset="0"/>
+                        <a:ea typeface="Times New Roman" panose="02020603050405020304" pitchFamily="18" charset="0"/>
+                        <a:cs typeface="Times New Roman" panose="02020603050405020304" pitchFamily="18" charset="0"/>
+                      </a:endParaRPr>
+                    </a:p>
+                  </a:txBody>
+                  <a:tcPr marL="68580" marR="68580" marT="0" marB="0"/>
+                </a:tc>
+                <a:extLst>
+                  <a:ext uri="{0D108BD9-81ED-4DB2-BD59-A6C34878D82A}">
+                    <a16:rowId xmlns:a16="http://schemas.microsoft.com/office/drawing/2014/main" val="734987367"/>
+                  </a:ext>
+                </a:extLst>
+              </a:tr>
+              <a:tr h="0">
+                <a:tc>
+                  <a:txBody>
+                    <a:bodyPr/>
+                    <a:lstStyle/>
+                    <a:p>
+                      <a:r>
+                        <a:rPr lang="ru-RU" sz="1400" dirty="0" err="1">
+                          <a:effectLst/>
+                          <a:latin typeface="Times New Roman" panose="02020603050405020304" pitchFamily="18" charset="0"/>
+                          <a:cs typeface="Times New Roman" panose="02020603050405020304" pitchFamily="18" charset="0"/>
+                        </a:rPr>
+                        <a:t>merged_pull_requests_ratio</a:t>
+                      </a:r>
+                      <a:endParaRPr lang="ru-RU" sz="1400" dirty="0">
+                        <a:effectLst/>
+                        <a:latin typeface="Times New Roman" panose="02020603050405020304" pitchFamily="18" charset="0"/>
+                        <a:ea typeface="Times New Roman" panose="02020603050405020304" pitchFamily="18" charset="0"/>
+                        <a:cs typeface="Times New Roman" panose="02020603050405020304" pitchFamily="18" charset="0"/>
+                      </a:endParaRPr>
+                    </a:p>
+                  </a:txBody>
+                  <a:tcPr marL="68580" marR="68580" marT="0" marB="0"/>
+                </a:tc>
+                <a:tc>
+                  <a:txBody>
+                    <a:bodyPr/>
+                    <a:lstStyle/>
+                    <a:p>
+                      <a:r>
+                        <a:rPr lang="ru-RU" sz="1400">
+                          <a:effectLst/>
+                          <a:latin typeface="Times New Roman" panose="02020603050405020304" pitchFamily="18" charset="0"/>
+                          <a:cs typeface="Times New Roman" panose="02020603050405020304" pitchFamily="18" charset="0"/>
+                        </a:rPr>
+                        <a:t>Число</a:t>
+                      </a:r>
+                      <a:endParaRPr lang="ru-RU" sz="1400">
+                        <a:effectLst/>
+                        <a:latin typeface="Times New Roman" panose="02020603050405020304" pitchFamily="18" charset="0"/>
+                        <a:ea typeface="Times New Roman" panose="02020603050405020304" pitchFamily="18" charset="0"/>
+                        <a:cs typeface="Times New Roman" panose="02020603050405020304" pitchFamily="18" charset="0"/>
+                      </a:endParaRPr>
+                    </a:p>
+                  </a:txBody>
+                  <a:tcPr marL="68580" marR="68580" marT="0" marB="0"/>
+                </a:tc>
+                <a:tc>
+                  <a:txBody>
+                    <a:bodyPr/>
+                    <a:lstStyle/>
+                    <a:p>
+                      <a:r>
+                        <a:rPr lang="ru-RU" sz="1400" dirty="0">
+                          <a:effectLst/>
+                          <a:latin typeface="Times New Roman" panose="02020603050405020304" pitchFamily="18" charset="0"/>
+                          <a:cs typeface="Times New Roman" panose="02020603050405020304" pitchFamily="18" charset="0"/>
+                        </a:rPr>
+                        <a:t>Отношение успешно принятых запросов на внесение изменений (</a:t>
+                      </a:r>
+                      <a:r>
+                        <a:rPr lang="ru-RU" sz="1400" dirty="0" err="1">
+                          <a:effectLst/>
+                          <a:latin typeface="Times New Roman" panose="02020603050405020304" pitchFamily="18" charset="0"/>
+                          <a:cs typeface="Times New Roman" panose="02020603050405020304" pitchFamily="18" charset="0"/>
+                        </a:rPr>
+                        <a:t>pull</a:t>
+                      </a:r>
+                      <a:r>
+                        <a:rPr lang="ru-RU" sz="1400" dirty="0">
+                          <a:effectLst/>
+                          <a:latin typeface="Times New Roman" panose="02020603050405020304" pitchFamily="18" charset="0"/>
+                          <a:cs typeface="Times New Roman" panose="02020603050405020304" pitchFamily="18" charset="0"/>
+                        </a:rPr>
+                        <a:t> </a:t>
+                      </a:r>
+                      <a:r>
+                        <a:rPr lang="ru-RU" sz="1400" dirty="0" err="1">
+                          <a:effectLst/>
+                          <a:latin typeface="Times New Roman" panose="02020603050405020304" pitchFamily="18" charset="0"/>
+                          <a:cs typeface="Times New Roman" panose="02020603050405020304" pitchFamily="18" charset="0"/>
+                        </a:rPr>
+                        <a:t>requests</a:t>
+                      </a:r>
+                      <a:r>
+                        <a:rPr lang="ru-RU" sz="1400" dirty="0">
+                          <a:effectLst/>
+                          <a:latin typeface="Times New Roman" panose="02020603050405020304" pitchFamily="18" charset="0"/>
+                          <a:cs typeface="Times New Roman" panose="02020603050405020304" pitchFamily="18" charset="0"/>
+                        </a:rPr>
+                        <a:t>) к общему числу таких запросов</a:t>
+                      </a:r>
+                      <a:endParaRPr lang="ru-RU" sz="1400" dirty="0">
+                        <a:effectLst/>
+                        <a:latin typeface="Times New Roman" panose="02020603050405020304" pitchFamily="18" charset="0"/>
+                        <a:ea typeface="Times New Roman" panose="02020603050405020304" pitchFamily="18" charset="0"/>
+                        <a:cs typeface="Times New Roman" panose="02020603050405020304" pitchFamily="18" charset="0"/>
+                      </a:endParaRPr>
+                    </a:p>
+                  </a:txBody>
+                  <a:tcPr marL="68580" marR="68580" marT="0" marB="0"/>
+                </a:tc>
+                <a:extLst>
+                  <a:ext uri="{0D108BD9-81ED-4DB2-BD59-A6C34878D82A}">
+                    <a16:rowId xmlns:a16="http://schemas.microsoft.com/office/drawing/2014/main" val="2069057979"/>
+                  </a:ext>
+                </a:extLst>
+              </a:tr>
+            </a:tbl>
+          </a:graphicData>
+        </a:graphic>
+      </p:graphicFrame>
+      <p:graphicFrame>
+        <p:nvGraphicFramePr>
+          <p:cNvPr id="7" name="Table 6">
+            <a:extLst>
+              <a:ext uri="{FF2B5EF4-FFF2-40B4-BE49-F238E27FC236}">
+                <a16:creationId xmlns:a16="http://schemas.microsoft.com/office/drawing/2014/main" id="{B569CDED-8AE1-E809-599B-A96351ADA4F9}"/>
+              </a:ext>
+            </a:extLst>
+          </p:cNvPr>
+          <p:cNvGraphicFramePr>
+            <a:graphicFrameLocks noGrp="1"/>
+          </p:cNvGraphicFramePr>
+          <p:nvPr>
+            <p:extLst>
+              <p:ext uri="{D42A27DB-BD31-4B8C-83A1-F6EECF244321}">
+                <p14:modId xmlns:p14="http://schemas.microsoft.com/office/powerpoint/2010/main" val="3355597408"/>
+              </p:ext>
+            </p:extLst>
+          </p:nvPr>
+        </p:nvGraphicFramePr>
+        <p:xfrm>
+          <a:off x="2133599" y="3379046"/>
+          <a:ext cx="7672068" cy="2898140"/>
+        </p:xfrm>
+        <a:graphic>
+          <a:graphicData uri="http://schemas.openxmlformats.org/drawingml/2006/table">
+            <a:tbl>
+              <a:tblPr firstRow="1" firstCol="1" bandRow="1">
+                <a:tableStyleId>{5940675A-B579-460E-94D1-54222C63F5DA}</a:tableStyleId>
+              </a:tblPr>
+              <a:tblGrid>
+                <a:gridCol w="2452352">
+                  <a:extLst>
+                    <a:ext uri="{9D8B030D-6E8A-4147-A177-3AD203B41FA5}">
+                      <a16:colId xmlns:a16="http://schemas.microsoft.com/office/drawing/2014/main" val="1533574516"/>
+                    </a:ext>
+                  </a:extLst>
+                </a:gridCol>
+                <a:gridCol w="800232">
+                  <a:extLst>
+                    <a:ext uri="{9D8B030D-6E8A-4147-A177-3AD203B41FA5}">
+                      <a16:colId xmlns:a16="http://schemas.microsoft.com/office/drawing/2014/main" val="2388763894"/>
+                    </a:ext>
+                  </a:extLst>
+                </a:gridCol>
+                <a:gridCol w="4419484">
+                  <a:extLst>
+                    <a:ext uri="{9D8B030D-6E8A-4147-A177-3AD203B41FA5}">
+                      <a16:colId xmlns:a16="http://schemas.microsoft.com/office/drawing/2014/main" val="1032431029"/>
+                    </a:ext>
+                  </a:extLst>
+                </a:gridCol>
+              </a:tblGrid>
+              <a:tr h="0">
+                <a:tc>
+                  <a:txBody>
+                    <a:bodyPr/>
+                    <a:lstStyle/>
+                    <a:p>
+                      <a:r>
+                        <a:rPr lang="ru-RU" sz="1400" dirty="0" err="1">
+                          <a:effectLst/>
+                          <a:latin typeface="Times New Roman" panose="02020603050405020304" pitchFamily="18" charset="0"/>
+                          <a:cs typeface="Times New Roman" panose="02020603050405020304" pitchFamily="18" charset="0"/>
+                        </a:rPr>
+                        <a:t>issues</a:t>
+                      </a:r>
+                      <a:endParaRPr lang="ru-RU" sz="1400" dirty="0">
+                        <a:effectLst/>
+                        <a:latin typeface="Times New Roman" panose="02020603050405020304" pitchFamily="18" charset="0"/>
+                        <a:ea typeface="Times New Roman" panose="02020603050405020304" pitchFamily="18" charset="0"/>
+                        <a:cs typeface="Times New Roman" panose="02020603050405020304" pitchFamily="18" charset="0"/>
+                      </a:endParaRPr>
+                    </a:p>
+                  </a:txBody>
+                  <a:tcPr marL="68580" marR="68580" marT="0" marB="0"/>
+                </a:tc>
+                <a:tc>
+                  <a:txBody>
+                    <a:bodyPr/>
+                    <a:lstStyle/>
+                    <a:p>
+                      <a:r>
+                        <a:rPr lang="ru-RU" sz="1400">
+                          <a:effectLst/>
+                          <a:latin typeface="Times New Roman" panose="02020603050405020304" pitchFamily="18" charset="0"/>
+                          <a:cs typeface="Times New Roman" panose="02020603050405020304" pitchFamily="18" charset="0"/>
+                        </a:rPr>
+                        <a:t>Число</a:t>
+                      </a:r>
+                      <a:endParaRPr lang="ru-RU" sz="1400">
+                        <a:effectLst/>
+                        <a:latin typeface="Times New Roman" panose="02020603050405020304" pitchFamily="18" charset="0"/>
+                        <a:ea typeface="Times New Roman" panose="02020603050405020304" pitchFamily="18" charset="0"/>
+                        <a:cs typeface="Times New Roman" panose="02020603050405020304" pitchFamily="18" charset="0"/>
+                      </a:endParaRPr>
+                    </a:p>
+                  </a:txBody>
+                  <a:tcPr marL="68580" marR="68580" marT="0" marB="0"/>
+                </a:tc>
+                <a:tc>
+                  <a:txBody>
+                    <a:bodyPr/>
+                    <a:lstStyle/>
+                    <a:p>
+                      <a:r>
+                        <a:rPr lang="ru-RU" sz="1400">
+                          <a:effectLst/>
+                          <a:latin typeface="Times New Roman" panose="02020603050405020304" pitchFamily="18" charset="0"/>
+                          <a:cs typeface="Times New Roman" panose="02020603050405020304" pitchFamily="18" charset="0"/>
+                        </a:rPr>
+                        <a:t>Количество созданных вопросов или проблем (issues)</a:t>
+                      </a:r>
+                      <a:endParaRPr lang="ru-RU" sz="1400">
+                        <a:effectLst/>
+                        <a:latin typeface="Times New Roman" panose="02020603050405020304" pitchFamily="18" charset="0"/>
+                        <a:ea typeface="Times New Roman" panose="02020603050405020304" pitchFamily="18" charset="0"/>
+                        <a:cs typeface="Times New Roman" panose="02020603050405020304" pitchFamily="18" charset="0"/>
+                      </a:endParaRPr>
+                    </a:p>
+                  </a:txBody>
+                  <a:tcPr marL="68580" marR="68580" marT="0" marB="0"/>
+                </a:tc>
+                <a:extLst>
+                  <a:ext uri="{0D108BD9-81ED-4DB2-BD59-A6C34878D82A}">
+                    <a16:rowId xmlns:a16="http://schemas.microsoft.com/office/drawing/2014/main" val="3890829921"/>
+                  </a:ext>
+                </a:extLst>
+              </a:tr>
+              <a:tr h="276225">
+                <a:tc>
+                  <a:txBody>
+                    <a:bodyPr/>
+                    <a:lstStyle/>
+                    <a:p>
+                      <a:r>
+                        <a:rPr lang="ru-RU" sz="1400" dirty="0" err="1">
+                          <a:effectLst/>
+                          <a:latin typeface="Times New Roman" panose="02020603050405020304" pitchFamily="18" charset="0"/>
+                          <a:cs typeface="Times New Roman" panose="02020603050405020304" pitchFamily="18" charset="0"/>
+                        </a:rPr>
+                        <a:t>new_members_count</a:t>
+                      </a:r>
+                      <a:endParaRPr lang="ru-RU" sz="1400" dirty="0">
+                        <a:effectLst/>
+                        <a:latin typeface="Times New Roman" panose="02020603050405020304" pitchFamily="18" charset="0"/>
+                        <a:ea typeface="Times New Roman" panose="02020603050405020304" pitchFamily="18" charset="0"/>
+                        <a:cs typeface="Times New Roman" panose="02020603050405020304" pitchFamily="18" charset="0"/>
+                      </a:endParaRPr>
+                    </a:p>
+                  </a:txBody>
+                  <a:tcPr marL="68580" marR="68580" marT="0" marB="0"/>
+                </a:tc>
+                <a:tc>
+                  <a:txBody>
+                    <a:bodyPr/>
+                    <a:lstStyle/>
+                    <a:p>
+                      <a:r>
+                        <a:rPr lang="ru-RU" sz="1400">
+                          <a:effectLst/>
+                          <a:latin typeface="Times New Roman" panose="02020603050405020304" pitchFamily="18" charset="0"/>
+                          <a:cs typeface="Times New Roman" panose="02020603050405020304" pitchFamily="18" charset="0"/>
+                        </a:rPr>
+                        <a:t>Число</a:t>
+                      </a:r>
+                      <a:endParaRPr lang="ru-RU" sz="1400">
+                        <a:effectLst/>
+                        <a:latin typeface="Times New Roman" panose="02020603050405020304" pitchFamily="18" charset="0"/>
+                        <a:ea typeface="Times New Roman" panose="02020603050405020304" pitchFamily="18" charset="0"/>
+                        <a:cs typeface="Times New Roman" panose="02020603050405020304" pitchFamily="18" charset="0"/>
+                      </a:endParaRPr>
+                    </a:p>
+                  </a:txBody>
+                  <a:tcPr marL="68580" marR="68580" marT="0" marB="0"/>
+                </a:tc>
+                <a:tc>
+                  <a:txBody>
+                    <a:bodyPr/>
+                    <a:lstStyle/>
+                    <a:p>
+                      <a:r>
+                        <a:rPr lang="ru-RU" sz="1400">
+                          <a:effectLst/>
+                          <a:latin typeface="Times New Roman" panose="02020603050405020304" pitchFamily="18" charset="0"/>
+                          <a:cs typeface="Times New Roman" panose="02020603050405020304" pitchFamily="18" charset="0"/>
+                        </a:rPr>
+                        <a:t>Количество новых участников репозитория</a:t>
+                      </a:r>
+                      <a:endParaRPr lang="ru-RU" sz="1400">
+                        <a:effectLst/>
+                        <a:latin typeface="Times New Roman" panose="02020603050405020304" pitchFamily="18" charset="0"/>
+                        <a:ea typeface="Times New Roman" panose="02020603050405020304" pitchFamily="18" charset="0"/>
+                        <a:cs typeface="Times New Roman" panose="02020603050405020304" pitchFamily="18" charset="0"/>
+                      </a:endParaRPr>
+                    </a:p>
+                  </a:txBody>
+                  <a:tcPr marL="68580" marR="68580" marT="0" marB="0"/>
+                </a:tc>
+                <a:extLst>
+                  <a:ext uri="{0D108BD9-81ED-4DB2-BD59-A6C34878D82A}">
+                    <a16:rowId xmlns:a16="http://schemas.microsoft.com/office/drawing/2014/main" val="1755832373"/>
+                  </a:ext>
+                </a:extLst>
+              </a:tr>
+              <a:tr h="0">
+                <a:tc>
+                  <a:txBody>
+                    <a:bodyPr/>
+                    <a:lstStyle/>
+                    <a:p>
+                      <a:r>
+                        <a:rPr lang="ru-RU" sz="1400" dirty="0" err="1">
+                          <a:effectLst/>
+                          <a:latin typeface="Times New Roman" panose="02020603050405020304" pitchFamily="18" charset="0"/>
+                          <a:cs typeface="Times New Roman" panose="02020603050405020304" pitchFamily="18" charset="0"/>
+                        </a:rPr>
+                        <a:t>closed_issues_ratio</a:t>
+                      </a:r>
+                      <a:endParaRPr lang="ru-RU" sz="1400" dirty="0">
+                        <a:effectLst/>
+                        <a:latin typeface="Times New Roman" panose="02020603050405020304" pitchFamily="18" charset="0"/>
+                        <a:ea typeface="Times New Roman" panose="02020603050405020304" pitchFamily="18" charset="0"/>
+                        <a:cs typeface="Times New Roman" panose="02020603050405020304" pitchFamily="18" charset="0"/>
+                      </a:endParaRPr>
+                    </a:p>
+                  </a:txBody>
+                  <a:tcPr marL="68580" marR="68580" marT="0" marB="0"/>
+                </a:tc>
+                <a:tc>
+                  <a:txBody>
+                    <a:bodyPr/>
+                    <a:lstStyle/>
+                    <a:p>
+                      <a:r>
+                        <a:rPr lang="ru-RU" sz="1400" dirty="0">
+                          <a:effectLst/>
+                          <a:latin typeface="Times New Roman" panose="02020603050405020304" pitchFamily="18" charset="0"/>
+                          <a:cs typeface="Times New Roman" panose="02020603050405020304" pitchFamily="18" charset="0"/>
+                        </a:rPr>
+                        <a:t>Число</a:t>
+                      </a:r>
+                      <a:endParaRPr lang="ru-RU" sz="1400" dirty="0">
+                        <a:effectLst/>
+                        <a:latin typeface="Times New Roman" panose="02020603050405020304" pitchFamily="18" charset="0"/>
+                        <a:ea typeface="Times New Roman" panose="02020603050405020304" pitchFamily="18" charset="0"/>
+                        <a:cs typeface="Times New Roman" panose="02020603050405020304" pitchFamily="18" charset="0"/>
+                      </a:endParaRPr>
+                    </a:p>
+                  </a:txBody>
+                  <a:tcPr marL="68580" marR="68580" marT="0" marB="0"/>
+                </a:tc>
+                <a:tc>
+                  <a:txBody>
+                    <a:bodyPr/>
+                    <a:lstStyle/>
+                    <a:p>
+                      <a:r>
+                        <a:rPr lang="ru-RU" sz="1400" dirty="0">
+                          <a:effectLst/>
+                          <a:latin typeface="Times New Roman" panose="02020603050405020304" pitchFamily="18" charset="0"/>
+                          <a:cs typeface="Times New Roman" panose="02020603050405020304" pitchFamily="18" charset="0"/>
+                        </a:rPr>
+                        <a:t>Отношение успешно закрытых вопросов или проблем (</a:t>
+                      </a:r>
+                      <a:r>
+                        <a:rPr lang="ru-RU" sz="1400" dirty="0" err="1">
+                          <a:effectLst/>
+                          <a:latin typeface="Times New Roman" panose="02020603050405020304" pitchFamily="18" charset="0"/>
+                          <a:cs typeface="Times New Roman" panose="02020603050405020304" pitchFamily="18" charset="0"/>
+                        </a:rPr>
+                        <a:t>issues</a:t>
+                      </a:r>
+                      <a:r>
+                        <a:rPr lang="ru-RU" sz="1400" dirty="0">
+                          <a:effectLst/>
+                          <a:latin typeface="Times New Roman" panose="02020603050405020304" pitchFamily="18" charset="0"/>
+                          <a:cs typeface="Times New Roman" panose="02020603050405020304" pitchFamily="18" charset="0"/>
+                        </a:rPr>
+                        <a:t>) к общему числу таких вопросов</a:t>
+                      </a:r>
+                      <a:endParaRPr lang="ru-RU" sz="1400" dirty="0">
+                        <a:effectLst/>
+                        <a:latin typeface="Times New Roman" panose="02020603050405020304" pitchFamily="18" charset="0"/>
+                        <a:ea typeface="Times New Roman" panose="02020603050405020304" pitchFamily="18" charset="0"/>
+                        <a:cs typeface="Times New Roman" panose="02020603050405020304" pitchFamily="18" charset="0"/>
+                      </a:endParaRPr>
+                    </a:p>
+                  </a:txBody>
+                  <a:tcPr marL="68580" marR="68580" marT="0" marB="0"/>
+                </a:tc>
+                <a:extLst>
+                  <a:ext uri="{0D108BD9-81ED-4DB2-BD59-A6C34878D82A}">
+                    <a16:rowId xmlns:a16="http://schemas.microsoft.com/office/drawing/2014/main" val="199243005"/>
+                  </a:ext>
+                </a:extLst>
+              </a:tr>
+              <a:tr h="0">
+                <a:tc>
+                  <a:txBody>
+                    <a:bodyPr/>
+                    <a:lstStyle/>
+                    <a:p>
+                      <a:r>
+                        <a:rPr lang="ru-RU" sz="1400">
+                          <a:effectLst/>
+                          <a:latin typeface="Times New Roman" panose="02020603050405020304" pitchFamily="18" charset="0"/>
+                          <a:cs typeface="Times New Roman" panose="02020603050405020304" pitchFamily="18" charset="0"/>
+                        </a:rPr>
+                        <a:t>watches</a:t>
+                      </a:r>
+                      <a:endParaRPr lang="ru-RU" sz="1400">
+                        <a:effectLst/>
+                        <a:latin typeface="Times New Roman" panose="02020603050405020304" pitchFamily="18" charset="0"/>
+                        <a:ea typeface="Times New Roman" panose="02020603050405020304" pitchFamily="18" charset="0"/>
+                        <a:cs typeface="Times New Roman" panose="02020603050405020304" pitchFamily="18" charset="0"/>
+                      </a:endParaRPr>
+                    </a:p>
+                  </a:txBody>
+                  <a:tcPr marL="68580" marR="68580" marT="0" marB="0"/>
+                </a:tc>
+                <a:tc>
+                  <a:txBody>
+                    <a:bodyPr/>
+                    <a:lstStyle/>
+                    <a:p>
+                      <a:r>
+                        <a:rPr lang="ru-RU" sz="1400" dirty="0">
+                          <a:effectLst/>
+                          <a:latin typeface="Times New Roman" panose="02020603050405020304" pitchFamily="18" charset="0"/>
+                          <a:cs typeface="Times New Roman" panose="02020603050405020304" pitchFamily="18" charset="0"/>
+                        </a:rPr>
+                        <a:t>Число</a:t>
+                      </a:r>
+                      <a:endParaRPr lang="ru-RU" sz="1400" dirty="0">
+                        <a:effectLst/>
+                        <a:latin typeface="Times New Roman" panose="02020603050405020304" pitchFamily="18" charset="0"/>
+                        <a:ea typeface="Times New Roman" panose="02020603050405020304" pitchFamily="18" charset="0"/>
+                        <a:cs typeface="Times New Roman" panose="02020603050405020304" pitchFamily="18" charset="0"/>
+                      </a:endParaRPr>
+                    </a:p>
+                  </a:txBody>
+                  <a:tcPr marL="68580" marR="68580" marT="0" marB="0"/>
+                </a:tc>
+                <a:tc>
+                  <a:txBody>
+                    <a:bodyPr/>
+                    <a:lstStyle/>
+                    <a:p>
+                      <a:r>
+                        <a:rPr lang="ru-RU" sz="1400" dirty="0">
+                          <a:effectLst/>
+                          <a:latin typeface="Times New Roman" panose="02020603050405020304" pitchFamily="18" charset="0"/>
+                          <a:cs typeface="Times New Roman" panose="02020603050405020304" pitchFamily="18" charset="0"/>
+                        </a:rPr>
+                        <a:t>Количество пользователей, отслеживающих обновления репозитория</a:t>
+                      </a:r>
+                      <a:endParaRPr lang="ru-RU" sz="1400" dirty="0">
+                        <a:effectLst/>
+                        <a:latin typeface="Times New Roman" panose="02020603050405020304" pitchFamily="18" charset="0"/>
+                        <a:ea typeface="Times New Roman" panose="02020603050405020304" pitchFamily="18" charset="0"/>
+                        <a:cs typeface="Times New Roman" panose="02020603050405020304" pitchFamily="18" charset="0"/>
+                      </a:endParaRPr>
+                    </a:p>
+                  </a:txBody>
+                  <a:tcPr marL="68580" marR="68580" marT="0" marB="0"/>
+                </a:tc>
+                <a:extLst>
+                  <a:ext uri="{0D108BD9-81ED-4DB2-BD59-A6C34878D82A}">
+                    <a16:rowId xmlns:a16="http://schemas.microsoft.com/office/drawing/2014/main" val="1016787709"/>
+                  </a:ext>
+                </a:extLst>
+              </a:tr>
+              <a:tr h="274955">
+                <a:tc>
+                  <a:txBody>
+                    <a:bodyPr/>
+                    <a:lstStyle/>
+                    <a:p>
+                      <a:r>
+                        <a:rPr lang="ru-RU" sz="1400">
+                          <a:effectLst/>
+                          <a:latin typeface="Times New Roman" panose="02020603050405020304" pitchFamily="18" charset="0"/>
+                          <a:cs typeface="Times New Roman" panose="02020603050405020304" pitchFamily="18" charset="0"/>
+                        </a:rPr>
+                        <a:t>forks</a:t>
+                      </a:r>
+                      <a:endParaRPr lang="ru-RU" sz="1400">
+                        <a:effectLst/>
+                        <a:latin typeface="Times New Roman" panose="02020603050405020304" pitchFamily="18" charset="0"/>
+                        <a:ea typeface="Times New Roman" panose="02020603050405020304" pitchFamily="18" charset="0"/>
+                        <a:cs typeface="Times New Roman" panose="02020603050405020304" pitchFamily="18" charset="0"/>
+                      </a:endParaRPr>
+                    </a:p>
+                  </a:txBody>
+                  <a:tcPr marL="68580" marR="68580" marT="0" marB="0"/>
+                </a:tc>
+                <a:tc>
+                  <a:txBody>
+                    <a:bodyPr/>
+                    <a:lstStyle/>
+                    <a:p>
+                      <a:r>
+                        <a:rPr lang="ru-RU" sz="1400" dirty="0">
+                          <a:effectLst/>
+                          <a:latin typeface="Times New Roman" panose="02020603050405020304" pitchFamily="18" charset="0"/>
+                          <a:cs typeface="Times New Roman" panose="02020603050405020304" pitchFamily="18" charset="0"/>
+                        </a:rPr>
+                        <a:t>Число</a:t>
+                      </a:r>
+                      <a:endParaRPr lang="ru-RU" sz="1400" dirty="0">
+                        <a:effectLst/>
+                        <a:latin typeface="Times New Roman" panose="02020603050405020304" pitchFamily="18" charset="0"/>
+                        <a:ea typeface="Times New Roman" panose="02020603050405020304" pitchFamily="18" charset="0"/>
+                        <a:cs typeface="Times New Roman" panose="02020603050405020304" pitchFamily="18" charset="0"/>
+                      </a:endParaRPr>
+                    </a:p>
+                  </a:txBody>
+                  <a:tcPr marL="68580" marR="68580" marT="0" marB="0"/>
+                </a:tc>
+                <a:tc>
+                  <a:txBody>
+                    <a:bodyPr/>
+                    <a:lstStyle/>
+                    <a:p>
+                      <a:r>
+                        <a:rPr lang="ru-RU" sz="1400" dirty="0">
+                          <a:effectLst/>
+                          <a:latin typeface="Times New Roman" panose="02020603050405020304" pitchFamily="18" charset="0"/>
+                          <a:cs typeface="Times New Roman" panose="02020603050405020304" pitchFamily="18" charset="0"/>
+                        </a:rPr>
+                        <a:t>Количество ветвлений (</a:t>
+                      </a:r>
+                      <a:r>
+                        <a:rPr lang="ru-RU" sz="1400" dirty="0" err="1">
+                          <a:effectLst/>
+                          <a:latin typeface="Times New Roman" panose="02020603050405020304" pitchFamily="18" charset="0"/>
+                          <a:cs typeface="Times New Roman" panose="02020603050405020304" pitchFamily="18" charset="0"/>
+                        </a:rPr>
+                        <a:t>forks</a:t>
+                      </a:r>
+                      <a:r>
+                        <a:rPr lang="ru-RU" sz="1400" dirty="0">
+                          <a:effectLst/>
+                          <a:latin typeface="Times New Roman" panose="02020603050405020304" pitchFamily="18" charset="0"/>
+                          <a:cs typeface="Times New Roman" panose="02020603050405020304" pitchFamily="18" charset="0"/>
+                        </a:rPr>
+                        <a:t>) репозитория</a:t>
+                      </a:r>
+                      <a:endParaRPr lang="ru-RU" sz="1400" dirty="0">
+                        <a:effectLst/>
+                        <a:latin typeface="Times New Roman" panose="02020603050405020304" pitchFamily="18" charset="0"/>
+                        <a:ea typeface="Times New Roman" panose="02020603050405020304" pitchFamily="18" charset="0"/>
+                        <a:cs typeface="Times New Roman" panose="02020603050405020304" pitchFamily="18" charset="0"/>
+                      </a:endParaRPr>
+                    </a:p>
+                  </a:txBody>
+                  <a:tcPr marL="68580" marR="68580" marT="0" marB="0"/>
+                </a:tc>
+                <a:extLst>
+                  <a:ext uri="{0D108BD9-81ED-4DB2-BD59-A6C34878D82A}">
+                    <a16:rowId xmlns:a16="http://schemas.microsoft.com/office/drawing/2014/main" val="3449522417"/>
+                  </a:ext>
+                </a:extLst>
+              </a:tr>
+              <a:tr h="0">
+                <a:tc>
+                  <a:txBody>
+                    <a:bodyPr/>
+                    <a:lstStyle/>
+                    <a:p>
+                      <a:r>
+                        <a:rPr lang="ru-RU" sz="1400">
+                          <a:effectLst/>
+                          <a:latin typeface="Times New Roman" panose="02020603050405020304" pitchFamily="18" charset="0"/>
+                          <a:cs typeface="Times New Roman" panose="02020603050405020304" pitchFamily="18" charset="0"/>
+                        </a:rPr>
+                        <a:t>language</a:t>
+                      </a:r>
+                      <a:endParaRPr lang="ru-RU" sz="1400">
+                        <a:effectLst/>
+                        <a:latin typeface="Times New Roman" panose="02020603050405020304" pitchFamily="18" charset="0"/>
+                        <a:ea typeface="Times New Roman" panose="02020603050405020304" pitchFamily="18" charset="0"/>
+                        <a:cs typeface="Times New Roman" panose="02020603050405020304" pitchFamily="18" charset="0"/>
+                      </a:endParaRPr>
+                    </a:p>
+                  </a:txBody>
+                  <a:tcPr marL="68580" marR="68580" marT="0" marB="0"/>
+                </a:tc>
+                <a:tc>
+                  <a:txBody>
+                    <a:bodyPr/>
+                    <a:lstStyle/>
+                    <a:p>
+                      <a:r>
+                        <a:rPr lang="ru-RU" sz="1400" dirty="0">
+                          <a:effectLst/>
+                          <a:latin typeface="Times New Roman" panose="02020603050405020304" pitchFamily="18" charset="0"/>
+                          <a:cs typeface="Times New Roman" panose="02020603050405020304" pitchFamily="18" charset="0"/>
+                        </a:rPr>
+                        <a:t>Строка</a:t>
+                      </a:r>
+                      <a:endParaRPr lang="ru-RU" sz="1400" dirty="0">
+                        <a:effectLst/>
+                        <a:latin typeface="Times New Roman" panose="02020603050405020304" pitchFamily="18" charset="0"/>
+                        <a:ea typeface="Times New Roman" panose="02020603050405020304" pitchFamily="18" charset="0"/>
+                        <a:cs typeface="Times New Roman" panose="02020603050405020304" pitchFamily="18" charset="0"/>
+                      </a:endParaRPr>
+                    </a:p>
+                  </a:txBody>
+                  <a:tcPr marL="68580" marR="68580" marT="0" marB="0"/>
+                </a:tc>
+                <a:tc>
+                  <a:txBody>
+                    <a:bodyPr/>
+                    <a:lstStyle/>
+                    <a:p>
+                      <a:r>
+                        <a:rPr lang="ru-RU" sz="1400" dirty="0">
+                          <a:effectLst/>
+                          <a:latin typeface="Times New Roman" panose="02020603050405020304" pitchFamily="18" charset="0"/>
+                          <a:cs typeface="Times New Roman" panose="02020603050405020304" pitchFamily="18" charset="0"/>
+                        </a:rPr>
+                        <a:t>Язык программирования, на котором написан код в репозитории</a:t>
+                      </a:r>
+                      <a:endParaRPr lang="ru-RU" sz="1400" dirty="0">
+                        <a:effectLst/>
+                        <a:latin typeface="Times New Roman" panose="02020603050405020304" pitchFamily="18" charset="0"/>
+                        <a:ea typeface="Times New Roman" panose="02020603050405020304" pitchFamily="18" charset="0"/>
+                        <a:cs typeface="Times New Roman" panose="02020603050405020304" pitchFamily="18" charset="0"/>
+                      </a:endParaRPr>
+                    </a:p>
+                  </a:txBody>
+                  <a:tcPr marL="68580" marR="68580" marT="0" marB="0"/>
+                </a:tc>
+                <a:extLst>
+                  <a:ext uri="{0D108BD9-81ED-4DB2-BD59-A6C34878D82A}">
+                    <a16:rowId xmlns:a16="http://schemas.microsoft.com/office/drawing/2014/main" val="2965922709"/>
+                  </a:ext>
+                </a:extLst>
+              </a:tr>
+              <a:tr h="0">
+                <a:tc>
+                  <a:txBody>
+                    <a:bodyPr/>
+                    <a:lstStyle/>
+                    <a:p>
+                      <a:r>
+                        <a:rPr lang="ru-RU" sz="1400">
+                          <a:effectLst/>
+                          <a:latin typeface="Times New Roman" panose="02020603050405020304" pitchFamily="18" charset="0"/>
+                          <a:cs typeface="Times New Roman" panose="02020603050405020304" pitchFamily="18" charset="0"/>
+                        </a:rPr>
+                        <a:t>license_name</a:t>
+                      </a:r>
+                      <a:endParaRPr lang="ru-RU" sz="1400">
+                        <a:effectLst/>
+                        <a:latin typeface="Times New Roman" panose="02020603050405020304" pitchFamily="18" charset="0"/>
+                        <a:ea typeface="Times New Roman" panose="02020603050405020304" pitchFamily="18" charset="0"/>
+                        <a:cs typeface="Times New Roman" panose="02020603050405020304" pitchFamily="18" charset="0"/>
+                      </a:endParaRPr>
+                    </a:p>
+                  </a:txBody>
+                  <a:tcPr marL="68580" marR="68580" marT="0" marB="0"/>
+                </a:tc>
+                <a:tc>
+                  <a:txBody>
+                    <a:bodyPr/>
+                    <a:lstStyle/>
+                    <a:p>
+                      <a:r>
+                        <a:rPr lang="ru-RU" sz="1400" dirty="0">
+                          <a:effectLst/>
+                          <a:latin typeface="Times New Roman" panose="02020603050405020304" pitchFamily="18" charset="0"/>
+                          <a:cs typeface="Times New Roman" panose="02020603050405020304" pitchFamily="18" charset="0"/>
+                        </a:rPr>
+                        <a:t>Строка</a:t>
+                      </a:r>
+                      <a:endParaRPr lang="ru-RU" sz="1400" dirty="0">
+                        <a:effectLst/>
+                        <a:latin typeface="Times New Roman" panose="02020603050405020304" pitchFamily="18" charset="0"/>
+                        <a:ea typeface="Times New Roman" panose="02020603050405020304" pitchFamily="18" charset="0"/>
+                        <a:cs typeface="Times New Roman" panose="02020603050405020304" pitchFamily="18" charset="0"/>
+                      </a:endParaRPr>
+                    </a:p>
+                  </a:txBody>
+                  <a:tcPr marL="68580" marR="68580" marT="0" marB="0"/>
+                </a:tc>
+                <a:tc>
+                  <a:txBody>
+                    <a:bodyPr/>
+                    <a:lstStyle/>
+                    <a:p>
+                      <a:r>
+                        <a:rPr lang="ru-RU" sz="1400" dirty="0">
+                          <a:effectLst/>
+                          <a:latin typeface="Times New Roman" panose="02020603050405020304" pitchFamily="18" charset="0"/>
+                          <a:cs typeface="Times New Roman" panose="02020603050405020304" pitchFamily="18" charset="0"/>
+                        </a:rPr>
+                        <a:t>Название лицензии, под которой распространяется код в репозитории</a:t>
+                      </a:r>
+                      <a:endParaRPr lang="ru-RU" sz="1400" dirty="0">
+                        <a:effectLst/>
+                        <a:latin typeface="Times New Roman" panose="02020603050405020304" pitchFamily="18" charset="0"/>
+                        <a:ea typeface="Times New Roman" panose="02020603050405020304" pitchFamily="18" charset="0"/>
+                        <a:cs typeface="Times New Roman" panose="02020603050405020304" pitchFamily="18" charset="0"/>
+                      </a:endParaRPr>
+                    </a:p>
+                  </a:txBody>
+                  <a:tcPr marL="68580" marR="68580" marT="0" marB="0"/>
+                </a:tc>
+                <a:extLst>
+                  <a:ext uri="{0D108BD9-81ED-4DB2-BD59-A6C34878D82A}">
+                    <a16:rowId xmlns:a16="http://schemas.microsoft.com/office/drawing/2014/main" val="1559159964"/>
+                  </a:ext>
+                </a:extLst>
+              </a:tr>
+              <a:tr h="0">
+                <a:tc>
+                  <a:txBody>
+                    <a:bodyPr/>
+                    <a:lstStyle/>
+                    <a:p>
+                      <a:r>
+                        <a:rPr lang="ru-RU" sz="1400">
+                          <a:effectLst/>
+                          <a:latin typeface="Times New Roman" panose="02020603050405020304" pitchFamily="18" charset="0"/>
+                          <a:cs typeface="Times New Roman" panose="02020603050405020304" pitchFamily="18" charset="0"/>
+                        </a:rPr>
+                        <a:t>is_deleted_or_private</a:t>
+                      </a:r>
+                      <a:endParaRPr lang="ru-RU" sz="1400">
+                        <a:effectLst/>
+                        <a:latin typeface="Times New Roman" panose="02020603050405020304" pitchFamily="18" charset="0"/>
+                        <a:ea typeface="Times New Roman" panose="02020603050405020304" pitchFamily="18" charset="0"/>
+                        <a:cs typeface="Times New Roman" panose="02020603050405020304" pitchFamily="18" charset="0"/>
+                      </a:endParaRPr>
+                    </a:p>
+                  </a:txBody>
+                  <a:tcPr marL="68580" marR="68580" marT="0" marB="0"/>
+                </a:tc>
+                <a:tc>
+                  <a:txBody>
+                    <a:bodyPr/>
+                    <a:lstStyle/>
+                    <a:p>
+                      <a:r>
+                        <a:rPr lang="ru-RU" sz="1400" dirty="0">
+                          <a:effectLst/>
+                          <a:latin typeface="Times New Roman" panose="02020603050405020304" pitchFamily="18" charset="0"/>
+                          <a:cs typeface="Times New Roman" panose="02020603050405020304" pitchFamily="18" charset="0"/>
+                        </a:rPr>
+                        <a:t>Булево</a:t>
+                      </a:r>
+                      <a:endParaRPr lang="ru-RU" sz="1400" dirty="0">
+                        <a:effectLst/>
+                        <a:latin typeface="Times New Roman" panose="02020603050405020304" pitchFamily="18" charset="0"/>
+                        <a:ea typeface="Times New Roman" panose="02020603050405020304" pitchFamily="18" charset="0"/>
+                        <a:cs typeface="Times New Roman" panose="02020603050405020304" pitchFamily="18" charset="0"/>
+                      </a:endParaRPr>
+                    </a:p>
+                  </a:txBody>
+                  <a:tcPr marL="68580" marR="68580" marT="0" marB="0"/>
+                </a:tc>
+                <a:tc>
+                  <a:txBody>
+                    <a:bodyPr/>
+                    <a:lstStyle/>
+                    <a:p>
+                      <a:r>
+                        <a:rPr lang="ru-RU" sz="1400" dirty="0">
+                          <a:effectLst/>
+                          <a:latin typeface="Times New Roman" panose="02020603050405020304" pitchFamily="18" charset="0"/>
+                          <a:cs typeface="Times New Roman" panose="02020603050405020304" pitchFamily="18" charset="0"/>
+                        </a:rPr>
+                        <a:t>Индикатор, указывающий, удален репозиторий или является ли он приватным</a:t>
+                      </a:r>
+                      <a:endParaRPr lang="ru-RU" sz="1400" dirty="0">
+                        <a:effectLst/>
+                        <a:latin typeface="Times New Roman" panose="02020603050405020304" pitchFamily="18" charset="0"/>
+                        <a:ea typeface="Times New Roman" panose="02020603050405020304" pitchFamily="18" charset="0"/>
+                        <a:cs typeface="Times New Roman" panose="02020603050405020304" pitchFamily="18" charset="0"/>
+                      </a:endParaRPr>
+                    </a:p>
+                  </a:txBody>
+                  <a:tcPr marL="68580" marR="68580" marT="0" marB="0"/>
+                </a:tc>
+                <a:extLst>
+                  <a:ext uri="{0D108BD9-81ED-4DB2-BD59-A6C34878D82A}">
+                    <a16:rowId xmlns:a16="http://schemas.microsoft.com/office/drawing/2014/main" val="895075867"/>
+                  </a:ext>
+                </a:extLst>
+              </a:tr>
+            </a:tbl>
+          </a:graphicData>
+        </a:graphic>
+      </p:graphicFrame>
+      <p:sp>
+        <p:nvSpPr>
+          <p:cNvPr id="9" name="TextBox 8">
+            <a:extLst>
+              <a:ext uri="{FF2B5EF4-FFF2-40B4-BE49-F238E27FC236}">
+                <a16:creationId xmlns:a16="http://schemas.microsoft.com/office/drawing/2014/main" id="{536328AF-06C6-9624-8276-E3DA5DD89AE1}"/>
+              </a:ext>
+            </a:extLst>
+          </p:cNvPr>
+          <p:cNvSpPr txBox="1"/>
+          <p:nvPr/>
+        </p:nvSpPr>
+        <p:spPr>
+          <a:xfrm>
+            <a:off x="0" y="0"/>
+            <a:ext cx="12192000" cy="523220"/>
+          </a:xfrm>
+          <a:prstGeom prst="rect">
+            <a:avLst/>
+          </a:prstGeom>
+          <a:noFill/>
+        </p:spPr>
+        <p:txBody>
+          <a:bodyPr wrap="square">
+            <a:spAutoFit/>
+          </a:bodyPr>
+          <a:lstStyle/>
+          <a:p>
+            <a:pPr algn="ctr"/>
+            <a:r>
+              <a:rPr lang="ru-RU" sz="2800" b="1" dirty="0">
+                <a:latin typeface="Times New Roman" panose="02020603050405020304" pitchFamily="18" charset="0"/>
+                <a:cs typeface="Times New Roman" panose="02020603050405020304" pitchFamily="18" charset="0"/>
+              </a:rPr>
+              <a:t>ДАННЫЕ ДЛЯ ПОИСКА ШАБЛОНОВ</a:t>
+            </a:r>
+          </a:p>
+        </p:txBody>
+      </p:sp>
+      <p:sp>
+        <p:nvSpPr>
+          <p:cNvPr id="10" name="Footer Placeholder 9">
+            <a:extLst>
+              <a:ext uri="{FF2B5EF4-FFF2-40B4-BE49-F238E27FC236}">
+                <a16:creationId xmlns:a16="http://schemas.microsoft.com/office/drawing/2014/main" id="{4209F32A-4ECF-C331-C576-6B2BAA968566}"/>
+              </a:ext>
+            </a:extLst>
+          </p:cNvPr>
+          <p:cNvSpPr>
+            <a:spLocks noGrp="1"/>
+          </p:cNvSpPr>
+          <p:nvPr>
+            <p:ph type="ftr" sz="quarter" idx="11"/>
+          </p:nvPr>
+        </p:nvSpPr>
+        <p:spPr/>
+        <p:txBody>
+          <a:bodyPr/>
+          <a:lstStyle/>
+          <a:p>
+            <a:r>
+              <a:rPr lang="ru-RU"/>
+              <a:t>Система поиска шаблонов в данных GitHub</a:t>
+            </a:r>
+            <a:endParaRPr lang="ru-RU" dirty="0"/>
+          </a:p>
+        </p:txBody>
+      </p:sp>
+      <p:sp>
+        <p:nvSpPr>
+          <p:cNvPr id="2" name="Slide Number Placeholder 1">
+            <a:extLst>
+              <a:ext uri="{FF2B5EF4-FFF2-40B4-BE49-F238E27FC236}">
+                <a16:creationId xmlns:a16="http://schemas.microsoft.com/office/drawing/2014/main" id="{08D6E7C9-78EA-0D85-48B9-878386FA4875}"/>
+              </a:ext>
+            </a:extLst>
+          </p:cNvPr>
+          <p:cNvSpPr>
+            <a:spLocks noGrp="1"/>
+          </p:cNvSpPr>
+          <p:nvPr>
+            <p:ph type="sldNum" sz="quarter" idx="12"/>
+          </p:nvPr>
+        </p:nvSpPr>
+        <p:spPr/>
+        <p:txBody>
+          <a:bodyPr/>
+          <a:lstStyle/>
+          <a:p>
+            <a:fld id="{7EC09024-2147-4C4E-87D2-FF66EAF91B1A}" type="slidenum">
+              <a:rPr lang="ru-RU" smtClean="0"/>
+              <a:pPr/>
+              <a:t>8</a:t>
+            </a:fld>
+            <a:r>
+              <a:rPr lang="ru-RU" dirty="0"/>
+              <a:t>/21</a:t>
+            </a:r>
+          </a:p>
+        </p:txBody>
+      </p:sp>
+    </p:spTree>
+    <p:extLst>
+      <p:ext uri="{BB962C8B-B14F-4D97-AF65-F5344CB8AC3E}">
+        <p14:creationId xmlns:p14="http://schemas.microsoft.com/office/powerpoint/2010/main" val="3626478721"/>
+      </p:ext>
+    </p:extLst>
+  </p:cSld>
+  <p:clrMapOvr>
+    <a:masterClrMapping/>
+  </p:clrMapOvr>
+</p:sld>
+</file>
+
+<file path=ppt/slides/slide9.xml><?xml version="1.0" encoding="utf-8"?>
+<p:sld xmlns:a="http://schemas.openxmlformats.org/drawingml/2006/main" xmlns:r="http://schemas.openxmlformats.org/officeDocument/2006/relationships" xmlns:p="http://schemas.openxmlformats.org/presentationml/2006/main">
+  <p:cSld>
+    <p:spTree>
+      <p:nvGrpSpPr>
+        <p:cNvPr id="1" name=""/>
+        <p:cNvGrpSpPr/>
+        <p:nvPr/>
+      </p:nvGrpSpPr>
+      <p:grpSpPr>
+        <a:xfrm>
+          <a:off x="0" y="0"/>
+          <a:ext cx="0" cy="0"/>
+          <a:chOff x="0" y="0"/>
+          <a:chExt cx="0" cy="0"/>
+        </a:xfrm>
+      </p:grpSpPr>
+      <p:sp>
+        <p:nvSpPr>
+          <p:cNvPr id="3" name="TextBox 2">
+            <a:extLst>
+              <a:ext uri="{FF2B5EF4-FFF2-40B4-BE49-F238E27FC236}">
+                <a16:creationId xmlns:a16="http://schemas.microsoft.com/office/drawing/2014/main" id="{100B25DD-8CC4-48A0-A45C-A43464AB841D}"/>
+              </a:ext>
+            </a:extLst>
+          </p:cNvPr>
+          <p:cNvSpPr txBox="1"/>
+          <p:nvPr/>
+        </p:nvSpPr>
+        <p:spPr>
+          <a:xfrm>
+            <a:off x="0" y="0"/>
+            <a:ext cx="12192000" cy="523220"/>
+          </a:xfrm>
+          <a:prstGeom prst="rect">
+            <a:avLst/>
+          </a:prstGeom>
+          <a:noFill/>
+        </p:spPr>
+        <p:txBody>
+          <a:bodyPr wrap="square">
+            <a:spAutoFit/>
+          </a:bodyPr>
+          <a:lstStyle/>
+          <a:p>
+            <a:pPr algn="ctr"/>
+            <a:r>
+              <a:rPr lang="ru-RU" sz="2800" b="1" dirty="0">
+                <a:latin typeface="Times New Roman" panose="02020603050405020304" pitchFamily="18" charset="0"/>
+                <a:cs typeface="Times New Roman" panose="02020603050405020304" pitchFamily="18" charset="0"/>
+              </a:rPr>
+              <a:t>СРЕДСТВА РАЗРАБОТКИ</a:t>
+            </a:r>
+          </a:p>
+        </p:txBody>
+      </p:sp>
+      <p:sp>
+        <p:nvSpPr>
+          <p:cNvPr id="7" name="TextBox 6">
+            <a:extLst>
+              <a:ext uri="{FF2B5EF4-FFF2-40B4-BE49-F238E27FC236}">
+                <a16:creationId xmlns:a16="http://schemas.microsoft.com/office/drawing/2014/main" id="{BE24D6F0-2BBA-4957-AFC5-93A7AC6BA1FC}"/>
+              </a:ext>
+            </a:extLst>
+          </p:cNvPr>
+          <p:cNvSpPr txBox="1"/>
+          <p:nvPr/>
+        </p:nvSpPr>
+        <p:spPr>
+          <a:xfrm>
+            <a:off x="497540" y="676088"/>
+            <a:ext cx="11053483" cy="661207"/>
+          </a:xfrm>
+          <a:prstGeom prst="rect">
+            <a:avLst/>
+          </a:prstGeom>
+          <a:noFill/>
+        </p:spPr>
+        <p:txBody>
+          <a:bodyPr wrap="square" rtlCol="0">
+            <a:spAutoFit/>
+          </a:bodyPr>
+          <a:lstStyle/>
+          <a:p>
+            <a:pPr algn="just">
+              <a:lnSpc>
+                <a:spcPct val="150000"/>
+              </a:lnSpc>
+            </a:pPr>
+            <a:r>
+              <a:rPr lang="ru-RU" sz="2800" b="1" dirty="0">
+                <a:latin typeface="Times New Roman" panose="02020603050405020304" pitchFamily="18" charset="0"/>
+                <a:cs typeface="Times New Roman" panose="02020603050405020304" pitchFamily="18" charset="0"/>
+              </a:rPr>
+              <a:t>Язык программирования: </a:t>
+            </a:r>
+            <a:r>
+              <a:rPr lang="en-US" sz="2800" dirty="0">
+                <a:latin typeface="Times New Roman" panose="02020603050405020304" pitchFamily="18" charset="0"/>
+                <a:cs typeface="Times New Roman" panose="02020603050405020304" pitchFamily="18" charset="0"/>
+              </a:rPr>
+              <a:t>Python 3.11.7</a:t>
+            </a:r>
+            <a:endParaRPr lang="ru-RU" sz="2800" dirty="0">
+              <a:latin typeface="Times New Roman" panose="02020603050405020304" pitchFamily="18" charset="0"/>
+              <a:cs typeface="Times New Roman" panose="02020603050405020304" pitchFamily="18" charset="0"/>
+            </a:endParaRPr>
+          </a:p>
+        </p:txBody>
+      </p:sp>
+      <p:sp>
+        <p:nvSpPr>
+          <p:cNvPr id="8" name="TextBox 7">
+            <a:extLst>
+              <a:ext uri="{FF2B5EF4-FFF2-40B4-BE49-F238E27FC236}">
+                <a16:creationId xmlns:a16="http://schemas.microsoft.com/office/drawing/2014/main" id="{81517F12-9988-40E4-9947-B94A9D063E28}"/>
+              </a:ext>
+            </a:extLst>
+          </p:cNvPr>
+          <p:cNvSpPr txBox="1"/>
+          <p:nvPr/>
+        </p:nvSpPr>
+        <p:spPr>
+          <a:xfrm>
+            <a:off x="497540" y="1628507"/>
+            <a:ext cx="2315697" cy="523220"/>
+          </a:xfrm>
+          <a:prstGeom prst="rect">
+            <a:avLst/>
+          </a:prstGeom>
+          <a:noFill/>
+        </p:spPr>
+        <p:txBody>
+          <a:bodyPr wrap="square" rtlCol="0">
+            <a:spAutoFit/>
+          </a:bodyPr>
+          <a:lstStyle/>
+          <a:p>
+            <a:pPr algn="just"/>
+            <a:r>
+              <a:rPr lang="ru-RU" sz="2800" b="1" dirty="0">
+                <a:latin typeface="Times New Roman" panose="02020603050405020304" pitchFamily="18" charset="0"/>
+                <a:cs typeface="Times New Roman" panose="02020603050405020304" pitchFamily="18" charset="0"/>
+              </a:rPr>
+              <a:t>Библиотеки:</a:t>
+            </a:r>
+            <a:endParaRPr lang="en-US" sz="2800" dirty="0">
+              <a:latin typeface="Times New Roman" panose="02020603050405020304" pitchFamily="18" charset="0"/>
+              <a:cs typeface="Times New Roman" panose="02020603050405020304" pitchFamily="18" charset="0"/>
+            </a:endParaRPr>
+          </a:p>
+        </p:txBody>
+      </p:sp>
+      <p:graphicFrame>
+        <p:nvGraphicFramePr>
+          <p:cNvPr id="10" name="Таблица 10">
+            <a:extLst>
+              <a:ext uri="{FF2B5EF4-FFF2-40B4-BE49-F238E27FC236}">
+                <a16:creationId xmlns:a16="http://schemas.microsoft.com/office/drawing/2014/main" id="{B3DC80B2-F4E9-4C8D-8012-A196D51CEBFE}"/>
+              </a:ext>
+            </a:extLst>
+          </p:cNvPr>
+          <p:cNvGraphicFramePr>
+            <a:graphicFrameLocks noGrp="1"/>
+          </p:cNvGraphicFramePr>
+          <p:nvPr>
+            <p:extLst>
+              <p:ext uri="{D42A27DB-BD31-4B8C-83A1-F6EECF244321}">
+                <p14:modId xmlns:p14="http://schemas.microsoft.com/office/powerpoint/2010/main" val="1550775521"/>
+              </p:ext>
+            </p:extLst>
+          </p:nvPr>
+        </p:nvGraphicFramePr>
+        <p:xfrm>
+          <a:off x="497540" y="2300843"/>
+          <a:ext cx="11264154" cy="4096668"/>
+        </p:xfrm>
+        <a:graphic>
+          <a:graphicData uri="http://schemas.openxmlformats.org/drawingml/2006/table">
+            <a:tbl>
+              <a:tblPr firstRow="1" bandRow="1">
+                <a:tableStyleId>{5940675A-B579-460E-94D1-54222C63F5DA}</a:tableStyleId>
+              </a:tblPr>
+              <a:tblGrid>
+                <a:gridCol w="2523566">
+                  <a:extLst>
+                    <a:ext uri="{9D8B030D-6E8A-4147-A177-3AD203B41FA5}">
+                      <a16:colId xmlns:a16="http://schemas.microsoft.com/office/drawing/2014/main" val="1253534247"/>
+                    </a:ext>
+                  </a:extLst>
+                </a:gridCol>
+                <a:gridCol w="3087627">
+                  <a:extLst>
+                    <a:ext uri="{9D8B030D-6E8A-4147-A177-3AD203B41FA5}">
+                      <a16:colId xmlns:a16="http://schemas.microsoft.com/office/drawing/2014/main" val="4231175743"/>
+                    </a:ext>
+                  </a:extLst>
+                </a:gridCol>
+                <a:gridCol w="2784711">
+                  <a:extLst>
+                    <a:ext uri="{9D8B030D-6E8A-4147-A177-3AD203B41FA5}">
+                      <a16:colId xmlns:a16="http://schemas.microsoft.com/office/drawing/2014/main" val="2219686513"/>
+                    </a:ext>
+                  </a:extLst>
+                </a:gridCol>
+                <a:gridCol w="2868250">
+                  <a:extLst>
+                    <a:ext uri="{9D8B030D-6E8A-4147-A177-3AD203B41FA5}">
+                      <a16:colId xmlns:a16="http://schemas.microsoft.com/office/drawing/2014/main" val="2332371237"/>
+                    </a:ext>
+                  </a:extLst>
+                </a:gridCol>
+              </a:tblGrid>
+              <a:tr h="700546">
+                <a:tc>
+                  <a:txBody>
+                    <a:bodyPr/>
+                    <a:lstStyle/>
+                    <a:p>
+                      <a:pPr algn="ctr"/>
+                      <a:r>
+                        <a:rPr lang="ru-RU" sz="2800" dirty="0">
+                          <a:latin typeface="Times New Roman" panose="02020603050405020304" pitchFamily="18" charset="0"/>
+                          <a:cs typeface="Times New Roman" panose="02020603050405020304" pitchFamily="18" charset="0"/>
+                        </a:rPr>
+                        <a:t>Веб-интерфейс</a:t>
+                      </a:r>
+                    </a:p>
+                  </a:txBody>
+                  <a:tcPr/>
+                </a:tc>
+                <a:tc>
+                  <a:txBody>
+                    <a:bodyPr/>
+                    <a:lstStyle/>
+                    <a:p>
+                      <a:pPr algn="ctr"/>
+                      <a:r>
+                        <a:rPr lang="ru-RU" sz="2800" dirty="0">
+                          <a:latin typeface="Times New Roman" panose="02020603050405020304" pitchFamily="18" charset="0"/>
+                          <a:cs typeface="Times New Roman" panose="02020603050405020304" pitchFamily="18" charset="0"/>
+                        </a:rPr>
+                        <a:t>Запрос данных</a:t>
+                      </a:r>
+                    </a:p>
+                  </a:txBody>
+                  <a:tcPr/>
+                </a:tc>
+                <a:tc>
+                  <a:txBody>
+                    <a:bodyPr/>
+                    <a:lstStyle/>
+                    <a:p>
+                      <a:pPr algn="ctr"/>
+                      <a:r>
+                        <a:rPr lang="ru-RU" sz="2800" dirty="0">
+                          <a:latin typeface="Times New Roman" panose="02020603050405020304" pitchFamily="18" charset="0"/>
+                          <a:cs typeface="Times New Roman" panose="02020603050405020304" pitchFamily="18" charset="0"/>
+                        </a:rPr>
+                        <a:t>Хранение и преобразование</a:t>
+                      </a:r>
+                      <a:r>
+                        <a:rPr lang="ru-RU" sz="2800" baseline="0" dirty="0">
+                          <a:latin typeface="Times New Roman" panose="02020603050405020304" pitchFamily="18" charset="0"/>
+                          <a:cs typeface="Times New Roman" panose="02020603050405020304" pitchFamily="18" charset="0"/>
+                        </a:rPr>
+                        <a:t> данных</a:t>
+                      </a:r>
+                      <a:endParaRPr lang="ru-RU" sz="2800" dirty="0">
+                        <a:latin typeface="Times New Roman" panose="02020603050405020304" pitchFamily="18" charset="0"/>
+                        <a:cs typeface="Times New Roman" panose="02020603050405020304" pitchFamily="18" charset="0"/>
+                      </a:endParaRPr>
+                    </a:p>
+                  </a:txBody>
+                  <a:tcPr/>
+                </a:tc>
+                <a:tc>
+                  <a:txBody>
+                    <a:bodyPr/>
+                    <a:lstStyle/>
+                    <a:p>
+                      <a:pPr algn="ctr"/>
+                      <a:r>
+                        <a:rPr lang="ru-RU" sz="2800" dirty="0">
+                          <a:latin typeface="Times New Roman" panose="02020603050405020304" pitchFamily="18" charset="0"/>
+                          <a:cs typeface="Times New Roman" panose="02020603050405020304" pitchFamily="18" charset="0"/>
+                        </a:rPr>
+                        <a:t>Поиск шаблонов</a:t>
+                      </a:r>
+                    </a:p>
+                  </a:txBody>
+                  <a:tcPr/>
+                </a:tc>
+                <a:extLst>
+                  <a:ext uri="{0D108BD9-81ED-4DB2-BD59-A6C34878D82A}">
+                    <a16:rowId xmlns:a16="http://schemas.microsoft.com/office/drawing/2014/main" val="3025199985"/>
+                  </a:ext>
+                </a:extLst>
+              </a:tr>
+              <a:tr h="2725068">
+                <a:tc>
+                  <a:txBody>
+                    <a:bodyPr/>
+                    <a:lstStyle/>
+                    <a:p>
+                      <a:pPr marL="0" indent="0" algn="l">
+                        <a:lnSpc>
+                          <a:spcPct val="150000"/>
+                        </a:lnSpc>
+                        <a:buFont typeface="+mj-lt"/>
+                        <a:buNone/>
+                      </a:pPr>
+                      <a:r>
+                        <a:rPr lang="en-US" sz="2800" dirty="0">
+                          <a:latin typeface="Times New Roman" panose="02020603050405020304" pitchFamily="18" charset="0"/>
+                          <a:cs typeface="Times New Roman" panose="02020603050405020304" pitchFamily="18" charset="0"/>
+                        </a:rPr>
+                        <a:t>Django</a:t>
+                      </a:r>
+                      <a:endParaRPr lang="ru-RU" sz="2800" dirty="0">
+                        <a:latin typeface="Times New Roman" panose="02020603050405020304" pitchFamily="18" charset="0"/>
+                        <a:cs typeface="Times New Roman" panose="02020603050405020304" pitchFamily="18" charset="0"/>
+                      </a:endParaRPr>
+                    </a:p>
+                  </a:txBody>
+                  <a:tcPr/>
+                </a:tc>
+                <a:tc>
+                  <a:txBody>
+                    <a:bodyPr/>
+                    <a:lstStyle/>
+                    <a:p>
+                      <a:pPr marL="0" marR="0" lvl="0" indent="0" algn="l" defTabSz="914400" rtl="0" eaLnBrk="1" fontAlgn="auto" latinLnBrk="0" hangingPunct="1">
+                        <a:lnSpc>
+                          <a:spcPct val="150000"/>
+                        </a:lnSpc>
+                        <a:spcBef>
+                          <a:spcPts val="0"/>
+                        </a:spcBef>
+                        <a:spcAft>
+                          <a:spcPts val="0"/>
+                        </a:spcAft>
+                        <a:buClrTx/>
+                        <a:buSzTx/>
+                        <a:buFont typeface="+mj-lt"/>
+                        <a:buNone/>
+                        <a:tabLst/>
+                        <a:defRPr/>
+                      </a:pPr>
+                      <a:r>
+                        <a:rPr lang="ru-RU" sz="2800" dirty="0">
+                          <a:latin typeface="Times New Roman" panose="02020603050405020304" pitchFamily="18" charset="0"/>
+                          <a:cs typeface="Times New Roman" panose="02020603050405020304" pitchFamily="18" charset="0"/>
+                        </a:rPr>
+                        <a:t>А</a:t>
+                      </a:r>
+                      <a:r>
+                        <a:rPr lang="en-US" sz="2800" dirty="0" err="1">
+                          <a:latin typeface="Times New Roman" panose="02020603050405020304" pitchFamily="18" charset="0"/>
+                          <a:cs typeface="Times New Roman" panose="02020603050405020304" pitchFamily="18" charset="0"/>
+                        </a:rPr>
+                        <a:t>iohttp</a:t>
+                      </a:r>
+                      <a:endParaRPr lang="ru-RU" sz="2800" dirty="0">
+                        <a:latin typeface="Times New Roman" panose="02020603050405020304" pitchFamily="18" charset="0"/>
+                        <a:cs typeface="Times New Roman" panose="02020603050405020304" pitchFamily="18" charset="0"/>
+                      </a:endParaRPr>
+                    </a:p>
+                    <a:p>
+                      <a:pPr marL="0" marR="0" lvl="0" indent="0" algn="l" defTabSz="914400" rtl="0" eaLnBrk="1" fontAlgn="auto" latinLnBrk="0" hangingPunct="1">
+                        <a:lnSpc>
+                          <a:spcPct val="150000"/>
+                        </a:lnSpc>
+                        <a:spcBef>
+                          <a:spcPts val="0"/>
+                        </a:spcBef>
+                        <a:spcAft>
+                          <a:spcPts val="0"/>
+                        </a:spcAft>
+                        <a:buClrTx/>
+                        <a:buSzTx/>
+                        <a:buFont typeface="+mj-lt"/>
+                        <a:buNone/>
+                        <a:tabLst/>
+                        <a:defRPr/>
+                      </a:pPr>
+                      <a:r>
+                        <a:rPr lang="en-US" sz="2800" kern="1200" dirty="0" err="1">
+                          <a:solidFill>
+                            <a:schemeClr val="tx1"/>
+                          </a:solidFill>
+                          <a:effectLst/>
+                          <a:latin typeface="Times New Roman" panose="02020603050405020304" pitchFamily="18" charset="0"/>
+                          <a:ea typeface="+mn-ea"/>
+                          <a:cs typeface="Times New Roman" panose="02020603050405020304" pitchFamily="18" charset="0"/>
+                        </a:rPr>
+                        <a:t>Asyncio</a:t>
+                      </a:r>
+                      <a:endParaRPr lang="en-US" sz="2800" kern="1200" dirty="0">
+                        <a:solidFill>
+                          <a:schemeClr val="tx1"/>
+                        </a:solidFill>
+                        <a:effectLst/>
+                        <a:latin typeface="Times New Roman" panose="02020603050405020304" pitchFamily="18" charset="0"/>
+                        <a:ea typeface="+mn-ea"/>
+                        <a:cs typeface="Times New Roman" panose="02020603050405020304" pitchFamily="18" charset="0"/>
+                      </a:endParaRPr>
+                    </a:p>
+                    <a:p>
+                      <a:pPr marL="0" marR="0" lvl="0" indent="0" algn="l" defTabSz="914400" rtl="0" eaLnBrk="1" fontAlgn="auto" latinLnBrk="0" hangingPunct="1">
+                        <a:lnSpc>
+                          <a:spcPct val="150000"/>
+                        </a:lnSpc>
+                        <a:spcBef>
+                          <a:spcPts val="0"/>
+                        </a:spcBef>
+                        <a:spcAft>
+                          <a:spcPts val="0"/>
+                        </a:spcAft>
+                        <a:buClrTx/>
+                        <a:buSzTx/>
+                        <a:buFont typeface="+mj-lt"/>
+                        <a:buNone/>
+                        <a:tabLst/>
+                        <a:defRPr/>
+                      </a:pPr>
+                      <a:r>
+                        <a:rPr lang="en-US" sz="2800" kern="1200" dirty="0">
+                          <a:solidFill>
+                            <a:schemeClr val="tx1"/>
+                          </a:solidFill>
+                          <a:effectLst/>
+                          <a:latin typeface="Times New Roman" panose="02020603050405020304" pitchFamily="18" charset="0"/>
+                          <a:ea typeface="+mn-ea"/>
+                          <a:cs typeface="Times New Roman" panose="02020603050405020304" pitchFamily="18" charset="0"/>
+                        </a:rPr>
+                        <a:t>Selenium</a:t>
+                      </a:r>
+                      <a:endParaRPr lang="ru-RU" sz="2800" kern="1200" dirty="0">
+                        <a:solidFill>
+                          <a:schemeClr val="tx1"/>
+                        </a:solidFill>
+                        <a:effectLst/>
+                        <a:latin typeface="Times New Roman" panose="02020603050405020304" pitchFamily="18" charset="0"/>
+                        <a:ea typeface="+mn-ea"/>
+                        <a:cs typeface="Times New Roman" panose="02020603050405020304" pitchFamily="18" charset="0"/>
+                      </a:endParaRPr>
+                    </a:p>
+                  </a:txBody>
+                  <a:tcPr/>
+                </a:tc>
+                <a:tc>
+                  <a:txBody>
+                    <a:bodyPr/>
+                    <a:lstStyle/>
+                    <a:p>
+                      <a:pPr marL="0" indent="0" algn="l">
+                        <a:lnSpc>
+                          <a:spcPct val="150000"/>
+                        </a:lnSpc>
+                        <a:buFont typeface="+mj-lt"/>
+                        <a:buNone/>
+                      </a:pPr>
+                      <a:r>
+                        <a:rPr lang="en-US" sz="2800" kern="1200" dirty="0">
+                          <a:solidFill>
+                            <a:schemeClr val="tx1"/>
+                          </a:solidFill>
+                          <a:effectLst/>
+                          <a:latin typeface="Times New Roman" panose="02020603050405020304" pitchFamily="18" charset="0"/>
+                          <a:ea typeface="+mn-ea"/>
+                          <a:cs typeface="Times New Roman" panose="02020603050405020304" pitchFamily="18" charset="0"/>
+                        </a:rPr>
+                        <a:t>Pandas </a:t>
+                      </a:r>
+                    </a:p>
+                    <a:p>
+                      <a:pPr marL="0" indent="0" algn="l">
+                        <a:lnSpc>
+                          <a:spcPct val="150000"/>
+                        </a:lnSpc>
+                        <a:buFont typeface="+mj-lt"/>
+                        <a:buNone/>
+                      </a:pPr>
+                      <a:r>
+                        <a:rPr lang="en-US" sz="2800" kern="1200" dirty="0" err="1">
+                          <a:solidFill>
+                            <a:schemeClr val="tx1"/>
+                          </a:solidFill>
+                          <a:effectLst/>
+                          <a:latin typeface="Times New Roman" panose="02020603050405020304" pitchFamily="18" charset="0"/>
+                          <a:ea typeface="+mn-ea"/>
+                          <a:cs typeface="Times New Roman" panose="02020603050405020304" pitchFamily="18" charset="0"/>
+                        </a:rPr>
+                        <a:t>Numpy</a:t>
+                      </a:r>
+                      <a:endParaRPr lang="ru-RU" sz="2800" kern="1200" dirty="0">
+                        <a:solidFill>
+                          <a:schemeClr val="tx1"/>
+                        </a:solidFill>
+                        <a:effectLst/>
+                        <a:latin typeface="Times New Roman" panose="02020603050405020304" pitchFamily="18" charset="0"/>
+                        <a:ea typeface="+mn-ea"/>
+                        <a:cs typeface="Times New Roman" panose="02020603050405020304" pitchFamily="18" charset="0"/>
+                      </a:endParaRPr>
+                    </a:p>
+                  </a:txBody>
+                  <a:tcPr/>
+                </a:tc>
+                <a:tc>
+                  <a:txBody>
+                    <a:bodyPr/>
+                    <a:lstStyle/>
+                    <a:p>
+                      <a:pPr marL="0" indent="0" algn="l">
+                        <a:lnSpc>
+                          <a:spcPct val="150000"/>
+                        </a:lnSpc>
+                        <a:buFont typeface="+mj-lt"/>
+                        <a:buNone/>
+                      </a:pPr>
+                      <a:r>
+                        <a:rPr lang="en-US" sz="2800" dirty="0" err="1">
+                          <a:latin typeface="Times New Roman" panose="02020603050405020304" pitchFamily="18" charset="0"/>
+                          <a:cs typeface="Times New Roman" panose="02020603050405020304" pitchFamily="18" charset="0"/>
+                        </a:rPr>
+                        <a:t>Mlxtend</a:t>
+                      </a:r>
+                      <a:endParaRPr lang="ru-RU" sz="2800" dirty="0">
+                        <a:latin typeface="Times New Roman" panose="02020603050405020304" pitchFamily="18" charset="0"/>
+                        <a:cs typeface="Times New Roman" panose="02020603050405020304" pitchFamily="18" charset="0"/>
+                      </a:endParaRPr>
+                    </a:p>
+                  </a:txBody>
+                  <a:tcPr/>
+                </a:tc>
+                <a:extLst>
+                  <a:ext uri="{0D108BD9-81ED-4DB2-BD59-A6C34878D82A}">
+                    <a16:rowId xmlns:a16="http://schemas.microsoft.com/office/drawing/2014/main" val="1059376421"/>
+                  </a:ext>
+                </a:extLst>
+              </a:tr>
+            </a:tbl>
+          </a:graphicData>
+        </a:graphic>
+      </p:graphicFrame>
+      <p:sp>
+        <p:nvSpPr>
+          <p:cNvPr id="4" name="Footer Placeholder 3">
+            <a:extLst>
+              <a:ext uri="{FF2B5EF4-FFF2-40B4-BE49-F238E27FC236}">
+                <a16:creationId xmlns:a16="http://schemas.microsoft.com/office/drawing/2014/main" id="{530AC945-535B-E233-D133-28DDAB6120C2}"/>
+              </a:ext>
+            </a:extLst>
+          </p:cNvPr>
+          <p:cNvSpPr>
+            <a:spLocks noGrp="1"/>
+          </p:cNvSpPr>
+          <p:nvPr>
+            <p:ph type="ftr" sz="quarter" idx="11"/>
+          </p:nvPr>
+        </p:nvSpPr>
+        <p:spPr/>
+        <p:txBody>
+          <a:bodyPr/>
+          <a:lstStyle/>
+          <a:p>
+            <a:r>
+              <a:rPr lang="ru-RU"/>
+              <a:t>Система поиска шаблонов в данных GitHub</a:t>
+            </a:r>
+            <a:endParaRPr lang="ru-RU" dirty="0"/>
+          </a:p>
+        </p:txBody>
+      </p:sp>
+      <p:sp>
+        <p:nvSpPr>
+          <p:cNvPr id="2" name="Slide Number Placeholder 1">
+            <a:extLst>
+              <a:ext uri="{FF2B5EF4-FFF2-40B4-BE49-F238E27FC236}">
+                <a16:creationId xmlns:a16="http://schemas.microsoft.com/office/drawing/2014/main" id="{F9D0223E-66CA-8800-98BE-2A53CD09E18D}"/>
+              </a:ext>
+            </a:extLst>
+          </p:cNvPr>
+          <p:cNvSpPr>
+            <a:spLocks noGrp="1"/>
+          </p:cNvSpPr>
+          <p:nvPr>
+            <p:ph type="sldNum" sz="quarter" idx="12"/>
+          </p:nvPr>
+        </p:nvSpPr>
+        <p:spPr/>
+        <p:txBody>
+          <a:bodyPr/>
+          <a:lstStyle/>
+          <a:p>
+            <a:fld id="{7EC09024-2147-4C4E-87D2-FF66EAF91B1A}" type="slidenum">
+              <a:rPr lang="ru-RU" smtClean="0"/>
+              <a:pPr/>
+              <a:t>9</a:t>
+            </a:fld>
+            <a:r>
+              <a:rPr lang="ru-RU" dirty="0"/>
+              <a:t>/21</a:t>
+            </a:r>
+          </a:p>
+        </p:txBody>
+      </p:sp>
+    </p:spTree>
+    <p:extLst>
+      <p:ext uri="{BB962C8B-B14F-4D97-AF65-F5344CB8AC3E}">
+        <p14:creationId xmlns:p14="http://schemas.microsoft.com/office/powerpoint/2010/main" val="1433868080"/>
       </p:ext>
     </p:extLst>
   </p:cSld>
